--- a/docs/clases/clase_04/clase_04.pptx
+++ b/docs/clases/clase_04/clase_04.pptx
@@ -2,51 +2,52 @@
 <file path=ppt/presentation.xml><?xml version="1.0" encoding="utf-8"?>
 <p:presentation xmlns:a="http://schemas.openxmlformats.org/drawingml/2006/main" xmlns:r="http://schemas.openxmlformats.org/officeDocument/2006/relationships" xmlns:mc="http://schemas.openxmlformats.org/markup-compatibility/2006" xmlns:mv="urn:schemas-microsoft-com:mac:vml" xmlns:p="http://schemas.openxmlformats.org/presentationml/2006/main" xmlns:c="http://schemas.openxmlformats.org/drawingml/2006/chart" xmlns:dgm="http://schemas.openxmlformats.org/drawingml/2006/diagram" xmlns:o="urn:schemas-microsoft-com:office:office" xmlns:v="urn:schemas-microsoft-com:vml" xmlns:pvml="urn:schemas-microsoft-com:office:powerpoint" xmlns:com="http://schemas.openxmlformats.org/drawingml/2006/compatibility" xmlns:p14="http://schemas.microsoft.com/office/powerpoint/2010/main" xmlns:p15="http://schemas.microsoft.com/office/powerpoint/2012/main" xmlns:ahyp="http://schemas.microsoft.com/office/drawing/2018/hyperlinkcolor" autoCompressPictures="0" embedTrueTypeFonts="1" strictFirstAndLastChars="0" saveSubsetFonts="1" showSpecialPlsOnTitleSld="0">
   <p:sldMasterIdLst>
-    <p:sldMasterId id="2147483659" r:id="rId5"/>
+    <p:sldMasterId id="2147483670" r:id="rId5"/>
+    <p:sldMasterId id="2147483671" r:id="rId6"/>
   </p:sldMasterIdLst>
   <p:notesMasterIdLst>
-    <p:notesMasterId r:id="rId6"/>
+    <p:notesMasterId r:id="rId7"/>
   </p:notesMasterIdLst>
   <p:sldIdLst>
-    <p:sldId id="256" r:id="rId7"/>
-    <p:sldId id="257" r:id="rId8"/>
-    <p:sldId id="258" r:id="rId9"/>
-    <p:sldId id="259" r:id="rId10"/>
-    <p:sldId id="260" r:id="rId11"/>
-    <p:sldId id="261" r:id="rId12"/>
-    <p:sldId id="262" r:id="rId13"/>
-    <p:sldId id="263" r:id="rId14"/>
-    <p:sldId id="264" r:id="rId15"/>
-    <p:sldId id="265" r:id="rId16"/>
-    <p:sldId id="266" r:id="rId17"/>
-    <p:sldId id="267" r:id="rId18"/>
-    <p:sldId id="268" r:id="rId19"/>
-    <p:sldId id="269" r:id="rId20"/>
-    <p:sldId id="270" r:id="rId21"/>
-    <p:sldId id="271" r:id="rId22"/>
-    <p:sldId id="272" r:id="rId23"/>
-    <p:sldId id="273" r:id="rId24"/>
-    <p:sldId id="274" r:id="rId25"/>
-    <p:sldId id="275" r:id="rId26"/>
-    <p:sldId id="276" r:id="rId27"/>
-    <p:sldId id="277" r:id="rId28"/>
-    <p:sldId id="278" r:id="rId29"/>
-    <p:sldId id="279" r:id="rId30"/>
-    <p:sldId id="280" r:id="rId31"/>
-    <p:sldId id="281" r:id="rId32"/>
-    <p:sldId id="282" r:id="rId33"/>
-    <p:sldId id="283" r:id="rId34"/>
-    <p:sldId id="284" r:id="rId35"/>
+    <p:sldId id="256" r:id="rId8"/>
+    <p:sldId id="257" r:id="rId9"/>
+    <p:sldId id="258" r:id="rId10"/>
+    <p:sldId id="259" r:id="rId11"/>
+    <p:sldId id="260" r:id="rId12"/>
+    <p:sldId id="261" r:id="rId13"/>
+    <p:sldId id="262" r:id="rId14"/>
+    <p:sldId id="263" r:id="rId15"/>
+    <p:sldId id="264" r:id="rId16"/>
+    <p:sldId id="265" r:id="rId17"/>
+    <p:sldId id="266" r:id="rId18"/>
+    <p:sldId id="267" r:id="rId19"/>
+    <p:sldId id="268" r:id="rId20"/>
+    <p:sldId id="269" r:id="rId21"/>
+    <p:sldId id="270" r:id="rId22"/>
+    <p:sldId id="271" r:id="rId23"/>
+    <p:sldId id="272" r:id="rId24"/>
+    <p:sldId id="273" r:id="rId25"/>
+    <p:sldId id="274" r:id="rId26"/>
+    <p:sldId id="275" r:id="rId27"/>
+    <p:sldId id="276" r:id="rId28"/>
+    <p:sldId id="277" r:id="rId29"/>
+    <p:sldId id="278" r:id="rId30"/>
+    <p:sldId id="279" r:id="rId31"/>
+    <p:sldId id="280" r:id="rId32"/>
+    <p:sldId id="281" r:id="rId33"/>
+    <p:sldId id="282" r:id="rId34"/>
+    <p:sldId id="283" r:id="rId35"/>
+    <p:sldId id="284" r:id="rId36"/>
   </p:sldIdLst>
   <p:sldSz cy="5143500" cx="9144000"/>
   <p:notesSz cx="6858000" cy="9144000"/>
   <p:embeddedFontLst>
     <p:embeddedFont>
       <p:font typeface="EB Garamond"/>
-      <p:regular r:id="rId36"/>
-      <p:bold r:id="rId37"/>
-      <p:italic r:id="rId38"/>
-      <p:boldItalic r:id="rId39"/>
+      <p:regular r:id="rId37"/>
+      <p:bold r:id="rId38"/>
+      <p:italic r:id="rId39"/>
+      <p:boldItalic r:id="rId40"/>
     </p:embeddedFont>
   </p:embeddedFontLst>
   <p:defaultTextStyle>
@@ -728,7 +729,7 @@
   <p:cSld>
     <p:spTree>
       <p:nvGrpSpPr>
-        <p:cNvPr id="50" name="Shape 50"/>
+        <p:cNvPr id="95" name="Shape 95"/>
         <p:cNvGrpSpPr/>
         <p:nvPr/>
       </p:nvGrpSpPr>
@@ -742,7 +743,7 @@
       </p:grpSpPr>
       <p:sp>
         <p:nvSpPr>
-          <p:cNvPr id="51" name="Google Shape;51;g2fad2387cd9_0_0:notes"/>
+          <p:cNvPr id="96" name="Google Shape;96;g3fbda14fd91_0_53:notes"/>
           <p:cNvSpPr/>
           <p:nvPr>
             <p:ph idx="2" type="sldImg"/>
@@ -777,7 +778,7 @@
       </p:sp>
       <p:sp>
         <p:nvSpPr>
-          <p:cNvPr id="52" name="Google Shape;52;g2fad2387cd9_0_0:notes"/>
+          <p:cNvPr id="97" name="Google Shape;97;g3fbda14fd91_0_53:notes"/>
           <p:cNvSpPr txBox="1"/>
           <p:nvPr>
             <p:ph idx="1" type="body"/>
@@ -827,7 +828,7 @@
   <p:cSld>
     <p:spTree>
       <p:nvGrpSpPr>
-        <p:cNvPr id="145" name="Shape 145"/>
+        <p:cNvPr id="190" name="Shape 190"/>
         <p:cNvGrpSpPr/>
         <p:nvPr/>
       </p:nvGrpSpPr>
@@ -841,7 +842,7 @@
       </p:grpSpPr>
       <p:sp>
         <p:nvSpPr>
-          <p:cNvPr id="146" name="Google Shape;146;g2ca5485ad83_0_86:notes"/>
+          <p:cNvPr id="191" name="Google Shape;191;g2ca5485ad83_0_86:notes"/>
           <p:cNvSpPr/>
           <p:nvPr>
             <p:ph idx="2" type="sldImg"/>
@@ -876,7 +877,7 @@
       </p:sp>
       <p:sp>
         <p:nvSpPr>
-          <p:cNvPr id="147" name="Google Shape;147;g2ca5485ad83_0_86:notes"/>
+          <p:cNvPr id="192" name="Google Shape;192;g2ca5485ad83_0_86:notes"/>
           <p:cNvSpPr txBox="1"/>
           <p:nvPr>
             <p:ph idx="1" type="body"/>
@@ -926,7 +927,7 @@
   <p:cSld>
     <p:spTree>
       <p:nvGrpSpPr>
-        <p:cNvPr id="160" name="Shape 160"/>
+        <p:cNvPr id="205" name="Shape 205"/>
         <p:cNvGrpSpPr/>
         <p:nvPr/>
       </p:nvGrpSpPr>
@@ -940,7 +941,7 @@
       </p:grpSpPr>
       <p:sp>
         <p:nvSpPr>
-          <p:cNvPr id="161" name="Google Shape;161;g2ca5485ad83_0_143:notes"/>
+          <p:cNvPr id="206" name="Google Shape;206;g2ca5485ad83_0_143:notes"/>
           <p:cNvSpPr/>
           <p:nvPr>
             <p:ph idx="2" type="sldImg"/>
@@ -975,7 +976,7 @@
       </p:sp>
       <p:sp>
         <p:nvSpPr>
-          <p:cNvPr id="162" name="Google Shape;162;g2ca5485ad83_0_143:notes"/>
+          <p:cNvPr id="207" name="Google Shape;207;g2ca5485ad83_0_143:notes"/>
           <p:cNvSpPr txBox="1"/>
           <p:nvPr>
             <p:ph idx="1" type="body"/>
@@ -1025,7 +1026,7 @@
   <p:cSld>
     <p:spTree>
       <p:nvGrpSpPr>
-        <p:cNvPr id="169" name="Shape 169"/>
+        <p:cNvPr id="214" name="Shape 214"/>
         <p:cNvGrpSpPr/>
         <p:nvPr/>
       </p:nvGrpSpPr>
@@ -1039,7 +1040,7 @@
       </p:grpSpPr>
       <p:sp>
         <p:nvSpPr>
-          <p:cNvPr id="170" name="Google Shape;170;g2ca5485ad83_0_160:notes"/>
+          <p:cNvPr id="215" name="Google Shape;215;g2ca5485ad83_0_160:notes"/>
           <p:cNvSpPr/>
           <p:nvPr>
             <p:ph idx="2" type="sldImg"/>
@@ -1074,7 +1075,7 @@
       </p:sp>
       <p:sp>
         <p:nvSpPr>
-          <p:cNvPr id="171" name="Google Shape;171;g2ca5485ad83_0_160:notes"/>
+          <p:cNvPr id="216" name="Google Shape;216;g2ca5485ad83_0_160:notes"/>
           <p:cNvSpPr txBox="1"/>
           <p:nvPr>
             <p:ph idx="1" type="body"/>
@@ -1124,7 +1125,7 @@
   <p:cSld>
     <p:spTree>
       <p:nvGrpSpPr>
-        <p:cNvPr id="178" name="Shape 178"/>
+        <p:cNvPr id="223" name="Shape 223"/>
         <p:cNvGrpSpPr/>
         <p:nvPr/>
       </p:nvGrpSpPr>
@@ -1138,7 +1139,7 @@
       </p:grpSpPr>
       <p:sp>
         <p:nvSpPr>
-          <p:cNvPr id="179" name="Google Shape;179;g2ca5485ad83_0_168:notes"/>
+          <p:cNvPr id="224" name="Google Shape;224;g2ca5485ad83_0_168:notes"/>
           <p:cNvSpPr/>
           <p:nvPr>
             <p:ph idx="2" type="sldImg"/>
@@ -1173,7 +1174,7 @@
       </p:sp>
       <p:sp>
         <p:nvSpPr>
-          <p:cNvPr id="180" name="Google Shape;180;g2ca5485ad83_0_168:notes"/>
+          <p:cNvPr id="225" name="Google Shape;225;g2ca5485ad83_0_168:notes"/>
           <p:cNvSpPr txBox="1"/>
           <p:nvPr>
             <p:ph idx="1" type="body"/>
@@ -1223,7 +1224,7 @@
   <p:cSld>
     <p:spTree>
       <p:nvGrpSpPr>
-        <p:cNvPr id="185" name="Shape 185"/>
+        <p:cNvPr id="230" name="Shape 230"/>
         <p:cNvGrpSpPr/>
         <p:nvPr/>
       </p:nvGrpSpPr>
@@ -1237,7 +1238,7 @@
       </p:grpSpPr>
       <p:sp>
         <p:nvSpPr>
-          <p:cNvPr id="186" name="Google Shape;186;g2ca5485ad83_0_187:notes"/>
+          <p:cNvPr id="231" name="Google Shape;231;g2ca5485ad83_0_187:notes"/>
           <p:cNvSpPr/>
           <p:nvPr>
             <p:ph idx="2" type="sldImg"/>
@@ -1272,7 +1273,7 @@
       </p:sp>
       <p:sp>
         <p:nvSpPr>
-          <p:cNvPr id="187" name="Google Shape;187;g2ca5485ad83_0_187:notes"/>
+          <p:cNvPr id="232" name="Google Shape;232;g2ca5485ad83_0_187:notes"/>
           <p:cNvSpPr txBox="1"/>
           <p:nvPr>
             <p:ph idx="1" type="body"/>
@@ -1322,7 +1323,7 @@
   <p:cSld>
     <p:spTree>
       <p:nvGrpSpPr>
-        <p:cNvPr id="192" name="Shape 192"/>
+        <p:cNvPr id="237" name="Shape 237"/>
         <p:cNvGrpSpPr/>
         <p:nvPr/>
       </p:nvGrpSpPr>
@@ -1336,7 +1337,7 @@
       </p:grpSpPr>
       <p:sp>
         <p:nvSpPr>
-          <p:cNvPr id="193" name="Google Shape;193;g2ca5485ad83_0_175:notes"/>
+          <p:cNvPr id="238" name="Google Shape;238;g2ca5485ad83_0_175:notes"/>
           <p:cNvSpPr/>
           <p:nvPr>
             <p:ph idx="2" type="sldImg"/>
@@ -1371,7 +1372,7 @@
       </p:sp>
       <p:sp>
         <p:nvSpPr>
-          <p:cNvPr id="194" name="Google Shape;194;g2ca5485ad83_0_175:notes"/>
+          <p:cNvPr id="239" name="Google Shape;239;g2ca5485ad83_0_175:notes"/>
           <p:cNvSpPr txBox="1"/>
           <p:nvPr>
             <p:ph idx="1" type="body"/>
@@ -1421,7 +1422,7 @@
   <p:cSld>
     <p:spTree>
       <p:nvGrpSpPr>
-        <p:cNvPr id="199" name="Shape 199"/>
+        <p:cNvPr id="244" name="Shape 244"/>
         <p:cNvGrpSpPr/>
         <p:nvPr/>
       </p:nvGrpSpPr>
@@ -1435,7 +1436,7 @@
       </p:grpSpPr>
       <p:sp>
         <p:nvSpPr>
-          <p:cNvPr id="200" name="Google Shape;200;g38861042ef3_0_58:notes"/>
+          <p:cNvPr id="245" name="Google Shape;245;g38861042ef3_0_58:notes"/>
           <p:cNvSpPr/>
           <p:nvPr>
             <p:ph idx="2" type="sldImg"/>
@@ -1470,7 +1471,7 @@
       </p:sp>
       <p:sp>
         <p:nvSpPr>
-          <p:cNvPr id="201" name="Google Shape;201;g38861042ef3_0_58:notes"/>
+          <p:cNvPr id="246" name="Google Shape;246;g38861042ef3_0_58:notes"/>
           <p:cNvSpPr txBox="1"/>
           <p:nvPr>
             <p:ph idx="1" type="body"/>
@@ -1520,7 +1521,7 @@
   <p:cSld>
     <p:spTree>
       <p:nvGrpSpPr>
-        <p:cNvPr id="205" name="Shape 205"/>
+        <p:cNvPr id="250" name="Shape 250"/>
         <p:cNvGrpSpPr/>
         <p:nvPr/>
       </p:nvGrpSpPr>
@@ -1534,7 +1535,7 @@
       </p:grpSpPr>
       <p:sp>
         <p:nvSpPr>
-          <p:cNvPr id="206" name="Google Shape;206;g38861042ef3_0_63:notes"/>
+          <p:cNvPr id="251" name="Google Shape;251;g38861042ef3_0_63:notes"/>
           <p:cNvSpPr/>
           <p:nvPr>
             <p:ph idx="2" type="sldImg"/>
@@ -1569,7 +1570,7 @@
       </p:sp>
       <p:sp>
         <p:nvSpPr>
-          <p:cNvPr id="207" name="Google Shape;207;g38861042ef3_0_63:notes"/>
+          <p:cNvPr id="252" name="Google Shape;252;g38861042ef3_0_63:notes"/>
           <p:cNvSpPr txBox="1"/>
           <p:nvPr>
             <p:ph idx="1" type="body"/>
@@ -1619,7 +1620,7 @@
   <p:cSld>
     <p:spTree>
       <p:nvGrpSpPr>
-        <p:cNvPr id="213" name="Shape 213"/>
+        <p:cNvPr id="258" name="Shape 258"/>
         <p:cNvGrpSpPr/>
         <p:nvPr/>
       </p:nvGrpSpPr>
@@ -1633,7 +1634,7 @@
       </p:grpSpPr>
       <p:sp>
         <p:nvSpPr>
-          <p:cNvPr id="214" name="Google Shape;214;g38861042ef3_0_70:notes"/>
+          <p:cNvPr id="259" name="Google Shape;259;g38861042ef3_0_70:notes"/>
           <p:cNvSpPr/>
           <p:nvPr>
             <p:ph idx="2" type="sldImg"/>
@@ -1668,7 +1669,7 @@
       </p:sp>
       <p:sp>
         <p:nvSpPr>
-          <p:cNvPr id="215" name="Google Shape;215;g38861042ef3_0_70:notes"/>
+          <p:cNvPr id="260" name="Google Shape;260;g38861042ef3_0_70:notes"/>
           <p:cNvSpPr txBox="1"/>
           <p:nvPr>
             <p:ph idx="1" type="body"/>
@@ -1718,7 +1719,7 @@
   <p:cSld>
     <p:spTree>
       <p:nvGrpSpPr>
-        <p:cNvPr id="221" name="Shape 221"/>
+        <p:cNvPr id="266" name="Shape 266"/>
         <p:cNvGrpSpPr/>
         <p:nvPr/>
       </p:nvGrpSpPr>
@@ -1732,7 +1733,7 @@
       </p:grpSpPr>
       <p:sp>
         <p:nvSpPr>
-          <p:cNvPr id="222" name="Google Shape;222;g38861042ef3_0_77:notes"/>
+          <p:cNvPr id="267" name="Google Shape;267;g38861042ef3_0_77:notes"/>
           <p:cNvSpPr/>
           <p:nvPr>
             <p:ph idx="2" type="sldImg"/>
@@ -1767,7 +1768,7 @@
       </p:sp>
       <p:sp>
         <p:nvSpPr>
-          <p:cNvPr id="223" name="Google Shape;223;g38861042ef3_0_77:notes"/>
+          <p:cNvPr id="268" name="Google Shape;268;g38861042ef3_0_77:notes"/>
           <p:cNvSpPr txBox="1"/>
           <p:nvPr>
             <p:ph idx="1" type="body"/>
@@ -1817,7 +1818,7 @@
   <p:cSld>
     <p:spTree>
       <p:nvGrpSpPr>
-        <p:cNvPr id="59" name="Shape 59"/>
+        <p:cNvPr id="104" name="Shape 104"/>
         <p:cNvGrpSpPr/>
         <p:nvPr/>
       </p:nvGrpSpPr>
@@ -1831,7 +1832,7 @@
       </p:grpSpPr>
       <p:sp>
         <p:nvSpPr>
-          <p:cNvPr id="60" name="Google Shape;60;g38861042ef3_0_8:notes"/>
+          <p:cNvPr id="105" name="Google Shape;105;g3fbda14fd91_0_156:notes"/>
           <p:cNvSpPr/>
           <p:nvPr>
             <p:ph idx="2" type="sldImg"/>
@@ -1866,7 +1867,7 @@
       </p:sp>
       <p:sp>
         <p:nvSpPr>
-          <p:cNvPr id="61" name="Google Shape;61;g38861042ef3_0_8:notes"/>
+          <p:cNvPr id="106" name="Google Shape;106;g3fbda14fd91_0_156:notes"/>
           <p:cNvSpPr txBox="1"/>
           <p:nvPr>
             <p:ph idx="1" type="body"/>
@@ -1916,7 +1917,7 @@
   <p:cSld>
     <p:spTree>
       <p:nvGrpSpPr>
-        <p:cNvPr id="234" name="Shape 234"/>
+        <p:cNvPr id="279" name="Shape 279"/>
         <p:cNvGrpSpPr/>
         <p:nvPr/>
       </p:nvGrpSpPr>
@@ -1930,7 +1931,7 @@
       </p:grpSpPr>
       <p:sp>
         <p:nvSpPr>
-          <p:cNvPr id="235" name="Google Shape;235;g38861042ef3_0_89:notes"/>
+          <p:cNvPr id="280" name="Google Shape;280;g38861042ef3_0_89:notes"/>
           <p:cNvSpPr/>
           <p:nvPr>
             <p:ph idx="2" type="sldImg"/>
@@ -1965,7 +1966,7 @@
       </p:sp>
       <p:sp>
         <p:nvSpPr>
-          <p:cNvPr id="236" name="Google Shape;236;g38861042ef3_0_89:notes"/>
+          <p:cNvPr id="281" name="Google Shape;281;g38861042ef3_0_89:notes"/>
           <p:cNvSpPr txBox="1"/>
           <p:nvPr>
             <p:ph idx="1" type="body"/>
@@ -2015,7 +2016,7 @@
   <p:cSld>
     <p:spTree>
       <p:nvGrpSpPr>
-        <p:cNvPr id="249" name="Shape 249"/>
+        <p:cNvPr id="294" name="Shape 294"/>
         <p:cNvGrpSpPr/>
         <p:nvPr/>
       </p:nvGrpSpPr>
@@ -2029,7 +2030,7 @@
       </p:grpSpPr>
       <p:sp>
         <p:nvSpPr>
-          <p:cNvPr id="250" name="Google Shape;250;g38861042ef3_0_103:notes"/>
+          <p:cNvPr id="295" name="Google Shape;295;g38861042ef3_0_103:notes"/>
           <p:cNvSpPr/>
           <p:nvPr>
             <p:ph idx="2" type="sldImg"/>
@@ -2064,7 +2065,7 @@
       </p:sp>
       <p:sp>
         <p:nvSpPr>
-          <p:cNvPr id="251" name="Google Shape;251;g38861042ef3_0_103:notes"/>
+          <p:cNvPr id="296" name="Google Shape;296;g38861042ef3_0_103:notes"/>
           <p:cNvSpPr txBox="1"/>
           <p:nvPr>
             <p:ph idx="1" type="body"/>
@@ -2114,7 +2115,7 @@
   <p:cSld>
     <p:spTree>
       <p:nvGrpSpPr>
-        <p:cNvPr id="256" name="Shape 256"/>
+        <p:cNvPr id="301" name="Shape 301"/>
         <p:cNvGrpSpPr/>
         <p:nvPr/>
       </p:nvGrpSpPr>
@@ -2128,7 +2129,7 @@
       </p:grpSpPr>
       <p:sp>
         <p:nvSpPr>
-          <p:cNvPr id="257" name="Google Shape;257;g38861042ef3_0_109:notes"/>
+          <p:cNvPr id="302" name="Google Shape;302;g38861042ef3_0_109:notes"/>
           <p:cNvSpPr/>
           <p:nvPr>
             <p:ph idx="2" type="sldImg"/>
@@ -2163,7 +2164,7 @@
       </p:sp>
       <p:sp>
         <p:nvSpPr>
-          <p:cNvPr id="258" name="Google Shape;258;g38861042ef3_0_109:notes"/>
+          <p:cNvPr id="303" name="Google Shape;303;g38861042ef3_0_109:notes"/>
           <p:cNvSpPr txBox="1"/>
           <p:nvPr>
             <p:ph idx="1" type="body"/>
@@ -2213,7 +2214,7 @@
   <p:cSld>
     <p:spTree>
       <p:nvGrpSpPr>
-        <p:cNvPr id="271" name="Shape 271"/>
+        <p:cNvPr id="316" name="Shape 316"/>
         <p:cNvGrpSpPr/>
         <p:nvPr/>
       </p:nvGrpSpPr>
@@ -2227,7 +2228,7 @@
       </p:grpSpPr>
       <p:sp>
         <p:nvSpPr>
-          <p:cNvPr id="272" name="Google Shape;272;g38861042ef3_0_123:notes"/>
+          <p:cNvPr id="317" name="Google Shape;317;g38861042ef3_0_123:notes"/>
           <p:cNvSpPr/>
           <p:nvPr>
             <p:ph idx="2" type="sldImg"/>
@@ -2262,7 +2263,7 @@
       </p:sp>
       <p:sp>
         <p:nvSpPr>
-          <p:cNvPr id="273" name="Google Shape;273;g38861042ef3_0_123:notes"/>
+          <p:cNvPr id="318" name="Google Shape;318;g38861042ef3_0_123:notes"/>
           <p:cNvSpPr txBox="1"/>
           <p:nvPr>
             <p:ph idx="1" type="body"/>
@@ -2312,7 +2313,7 @@
   <p:cSld>
     <p:spTree>
       <p:nvGrpSpPr>
-        <p:cNvPr id="281" name="Shape 281"/>
+        <p:cNvPr id="326" name="Shape 326"/>
         <p:cNvGrpSpPr/>
         <p:nvPr/>
       </p:nvGrpSpPr>
@@ -2326,7 +2327,7 @@
       </p:grpSpPr>
       <p:sp>
         <p:nvSpPr>
-          <p:cNvPr id="282" name="Google Shape;282;g38861042ef3_0_132:notes"/>
+          <p:cNvPr id="327" name="Google Shape;327;g38861042ef3_0_132:notes"/>
           <p:cNvSpPr/>
           <p:nvPr>
             <p:ph idx="2" type="sldImg"/>
@@ -2361,7 +2362,7 @@
       </p:sp>
       <p:sp>
         <p:nvSpPr>
-          <p:cNvPr id="283" name="Google Shape;283;g38861042ef3_0_132:notes"/>
+          <p:cNvPr id="328" name="Google Shape;328;g38861042ef3_0_132:notes"/>
           <p:cNvSpPr txBox="1"/>
           <p:nvPr>
             <p:ph idx="1" type="body"/>
@@ -2411,7 +2412,7 @@
   <p:cSld>
     <p:spTree>
       <p:nvGrpSpPr>
-        <p:cNvPr id="287" name="Shape 287"/>
+        <p:cNvPr id="332" name="Shape 332"/>
         <p:cNvGrpSpPr/>
         <p:nvPr/>
       </p:nvGrpSpPr>
@@ -2425,7 +2426,7 @@
       </p:grpSpPr>
       <p:sp>
         <p:nvSpPr>
-          <p:cNvPr id="288" name="Google Shape;288;g38861042ef3_0_139:notes"/>
+          <p:cNvPr id="333" name="Google Shape;333;g38861042ef3_0_139:notes"/>
           <p:cNvSpPr/>
           <p:nvPr>
             <p:ph idx="2" type="sldImg"/>
@@ -2460,7 +2461,7 @@
       </p:sp>
       <p:sp>
         <p:nvSpPr>
-          <p:cNvPr id="289" name="Google Shape;289;g38861042ef3_0_139:notes"/>
+          <p:cNvPr id="334" name="Google Shape;334;g38861042ef3_0_139:notes"/>
           <p:cNvSpPr txBox="1"/>
           <p:nvPr>
             <p:ph idx="1" type="body"/>
@@ -2510,7 +2511,7 @@
   <p:cSld>
     <p:spTree>
       <p:nvGrpSpPr>
-        <p:cNvPr id="293" name="Shape 293"/>
+        <p:cNvPr id="338" name="Shape 338"/>
         <p:cNvGrpSpPr/>
         <p:nvPr/>
       </p:nvGrpSpPr>
@@ -2524,7 +2525,7 @@
       </p:grpSpPr>
       <p:sp>
         <p:nvSpPr>
-          <p:cNvPr id="294" name="Google Shape;294;g38861042ef3_0_144:notes"/>
+          <p:cNvPr id="339" name="Google Shape;339;g38861042ef3_0_144:notes"/>
           <p:cNvSpPr/>
           <p:nvPr>
             <p:ph idx="2" type="sldImg"/>
@@ -2559,7 +2560,7 @@
       </p:sp>
       <p:sp>
         <p:nvSpPr>
-          <p:cNvPr id="295" name="Google Shape;295;g38861042ef3_0_144:notes"/>
+          <p:cNvPr id="340" name="Google Shape;340;g38861042ef3_0_144:notes"/>
           <p:cNvSpPr txBox="1"/>
           <p:nvPr>
             <p:ph idx="1" type="body"/>
@@ -2609,7 +2610,7 @@
   <p:cSld>
     <p:spTree>
       <p:nvGrpSpPr>
-        <p:cNvPr id="300" name="Shape 300"/>
+        <p:cNvPr id="345" name="Shape 345"/>
         <p:cNvGrpSpPr/>
         <p:nvPr/>
       </p:nvGrpSpPr>
@@ -2623,7 +2624,7 @@
       </p:grpSpPr>
       <p:sp>
         <p:nvSpPr>
-          <p:cNvPr id="301" name="Google Shape;301;g38861042ef3_0_150:notes"/>
+          <p:cNvPr id="346" name="Google Shape;346;g38861042ef3_0_150:notes"/>
           <p:cNvSpPr/>
           <p:nvPr>
             <p:ph idx="2" type="sldImg"/>
@@ -2658,7 +2659,7 @@
       </p:sp>
       <p:sp>
         <p:nvSpPr>
-          <p:cNvPr id="302" name="Google Shape;302;g38861042ef3_0_150:notes"/>
+          <p:cNvPr id="347" name="Google Shape;347;g38861042ef3_0_150:notes"/>
           <p:cNvSpPr txBox="1"/>
           <p:nvPr>
             <p:ph idx="1" type="body"/>
@@ -2708,7 +2709,7 @@
   <p:cSld>
     <p:spTree>
       <p:nvGrpSpPr>
-        <p:cNvPr id="307" name="Shape 307"/>
+        <p:cNvPr id="352" name="Shape 352"/>
         <p:cNvGrpSpPr/>
         <p:nvPr/>
       </p:nvGrpSpPr>
@@ -2722,7 +2723,7 @@
       </p:grpSpPr>
       <p:sp>
         <p:nvSpPr>
-          <p:cNvPr id="308" name="Google Shape;308;g38861042ef3_0_156:notes"/>
+          <p:cNvPr id="353" name="Google Shape;353;g38861042ef3_0_156:notes"/>
           <p:cNvSpPr/>
           <p:nvPr>
             <p:ph idx="2" type="sldImg"/>
@@ -2757,7 +2758,7 @@
       </p:sp>
       <p:sp>
         <p:nvSpPr>
-          <p:cNvPr id="309" name="Google Shape;309;g38861042ef3_0_156:notes"/>
+          <p:cNvPr id="354" name="Google Shape;354;g38861042ef3_0_156:notes"/>
           <p:cNvSpPr txBox="1"/>
           <p:nvPr>
             <p:ph idx="1" type="body"/>
@@ -2807,7 +2808,7 @@
   <p:cSld>
     <p:spTree>
       <p:nvGrpSpPr>
-        <p:cNvPr id="314" name="Shape 314"/>
+        <p:cNvPr id="359" name="Shape 359"/>
         <p:cNvGrpSpPr/>
         <p:nvPr/>
       </p:nvGrpSpPr>
@@ -2821,7 +2822,7 @@
       </p:grpSpPr>
       <p:sp>
         <p:nvSpPr>
-          <p:cNvPr id="315" name="Google Shape;315;g38861042ef3_0_0:notes"/>
+          <p:cNvPr id="360" name="Google Shape;360;g38861042ef3_0_0:notes"/>
           <p:cNvSpPr/>
           <p:nvPr>
             <p:ph idx="2" type="sldImg"/>
@@ -2856,7 +2857,7 @@
       </p:sp>
       <p:sp>
         <p:nvSpPr>
-          <p:cNvPr id="316" name="Google Shape;316;g38861042ef3_0_0:notes"/>
+          <p:cNvPr id="361" name="Google Shape;361;g38861042ef3_0_0:notes"/>
           <p:cNvSpPr txBox="1"/>
           <p:nvPr>
             <p:ph idx="1" type="body"/>
@@ -2906,7 +2907,7 @@
   <p:cSld>
     <p:spTree>
       <p:nvGrpSpPr>
-        <p:cNvPr id="65" name="Shape 65"/>
+        <p:cNvPr id="110" name="Shape 110"/>
         <p:cNvGrpSpPr/>
         <p:nvPr/>
       </p:nvGrpSpPr>
@@ -2920,7 +2921,7 @@
       </p:grpSpPr>
       <p:sp>
         <p:nvSpPr>
-          <p:cNvPr id="66" name="Google Shape;66;g2be0ec9c984_0_493:notes"/>
+          <p:cNvPr id="111" name="Google Shape;111;g2be0ec9c984_0_493:notes"/>
           <p:cNvSpPr/>
           <p:nvPr>
             <p:ph idx="2" type="sldImg"/>
@@ -2955,7 +2956,7 @@
       </p:sp>
       <p:sp>
         <p:nvSpPr>
-          <p:cNvPr id="67" name="Google Shape;67;g2be0ec9c984_0_493:notes"/>
+          <p:cNvPr id="112" name="Google Shape;112;g2be0ec9c984_0_493:notes"/>
           <p:cNvSpPr txBox="1"/>
           <p:nvPr>
             <p:ph idx="1" type="body"/>
@@ -3005,7 +3006,7 @@
   <p:cSld>
     <p:spTree>
       <p:nvGrpSpPr>
-        <p:cNvPr id="73" name="Shape 73"/>
+        <p:cNvPr id="118" name="Shape 118"/>
         <p:cNvGrpSpPr/>
         <p:nvPr/>
       </p:nvGrpSpPr>
@@ -3019,7 +3020,7 @@
       </p:grpSpPr>
       <p:sp>
         <p:nvSpPr>
-          <p:cNvPr id="74" name="Google Shape;74;g2be0ec9c984_0_498:notes"/>
+          <p:cNvPr id="119" name="Google Shape;119;g2be0ec9c984_0_498:notes"/>
           <p:cNvSpPr/>
           <p:nvPr>
             <p:ph idx="2" type="sldImg"/>
@@ -3054,7 +3055,7 @@
       </p:sp>
       <p:sp>
         <p:nvSpPr>
-          <p:cNvPr id="75" name="Google Shape;75;g2be0ec9c984_0_498:notes"/>
+          <p:cNvPr id="120" name="Google Shape;120;g2be0ec9c984_0_498:notes"/>
           <p:cNvSpPr txBox="1"/>
           <p:nvPr>
             <p:ph idx="1" type="body"/>
@@ -3104,7 +3105,7 @@
   <p:cSld>
     <p:spTree>
       <p:nvGrpSpPr>
-        <p:cNvPr id="79" name="Shape 79"/>
+        <p:cNvPr id="124" name="Shape 124"/>
         <p:cNvGrpSpPr/>
         <p:nvPr/>
       </p:nvGrpSpPr>
@@ -3118,7 +3119,7 @@
       </p:grpSpPr>
       <p:sp>
         <p:nvSpPr>
-          <p:cNvPr id="80" name="Google Shape;80;g2ca5485ad83_0_2:notes"/>
+          <p:cNvPr id="125" name="Google Shape;125;g2ca5485ad83_0_2:notes"/>
           <p:cNvSpPr/>
           <p:nvPr>
             <p:ph idx="2" type="sldImg"/>
@@ -3153,7 +3154,7 @@
       </p:sp>
       <p:sp>
         <p:nvSpPr>
-          <p:cNvPr id="81" name="Google Shape;81;g2ca5485ad83_0_2:notes"/>
+          <p:cNvPr id="126" name="Google Shape;126;g2ca5485ad83_0_2:notes"/>
           <p:cNvSpPr txBox="1"/>
           <p:nvPr>
             <p:ph idx="1" type="body"/>
@@ -3203,7 +3204,7 @@
   <p:cSld>
     <p:spTree>
       <p:nvGrpSpPr>
-        <p:cNvPr id="86" name="Shape 86"/>
+        <p:cNvPr id="131" name="Shape 131"/>
         <p:cNvGrpSpPr/>
         <p:nvPr/>
       </p:nvGrpSpPr>
@@ -3217,7 +3218,7 @@
       </p:grpSpPr>
       <p:sp>
         <p:nvSpPr>
-          <p:cNvPr id="87" name="Google Shape;87;g2ca5485ad83_0_51:notes"/>
+          <p:cNvPr id="132" name="Google Shape;132;g2ca5485ad83_0_51:notes"/>
           <p:cNvSpPr/>
           <p:nvPr>
             <p:ph idx="2" type="sldImg"/>
@@ -3252,7 +3253,7 @@
       </p:sp>
       <p:sp>
         <p:nvSpPr>
-          <p:cNvPr id="88" name="Google Shape;88;g2ca5485ad83_0_51:notes"/>
+          <p:cNvPr id="133" name="Google Shape;133;g2ca5485ad83_0_51:notes"/>
           <p:cNvSpPr txBox="1"/>
           <p:nvPr>
             <p:ph idx="1" type="body"/>
@@ -3302,7 +3303,7 @@
   <p:cSld>
     <p:spTree>
       <p:nvGrpSpPr>
-        <p:cNvPr id="119" name="Shape 119"/>
+        <p:cNvPr id="164" name="Shape 164"/>
         <p:cNvGrpSpPr/>
         <p:nvPr/>
       </p:nvGrpSpPr>
@@ -3316,7 +3317,7 @@
       </p:grpSpPr>
       <p:sp>
         <p:nvSpPr>
-          <p:cNvPr id="120" name="Google Shape;120;g2ca5485ad83_0_17:notes"/>
+          <p:cNvPr id="165" name="Google Shape;165;g2ca5485ad83_0_17:notes"/>
           <p:cNvSpPr/>
           <p:nvPr>
             <p:ph idx="2" type="sldImg"/>
@@ -3351,7 +3352,7 @@
       </p:sp>
       <p:sp>
         <p:nvSpPr>
-          <p:cNvPr id="121" name="Google Shape;121;g2ca5485ad83_0_17:notes"/>
+          <p:cNvPr id="166" name="Google Shape;166;g2ca5485ad83_0_17:notes"/>
           <p:cNvSpPr txBox="1"/>
           <p:nvPr>
             <p:ph idx="1" type="body"/>
@@ -3401,7 +3402,7 @@
   <p:cSld>
     <p:spTree>
       <p:nvGrpSpPr>
-        <p:cNvPr id="127" name="Shape 127"/>
+        <p:cNvPr id="172" name="Shape 172"/>
         <p:cNvGrpSpPr/>
         <p:nvPr/>
       </p:nvGrpSpPr>
@@ -3415,7 +3416,7 @@
       </p:grpSpPr>
       <p:sp>
         <p:nvSpPr>
-          <p:cNvPr id="128" name="Google Shape;128;g2ca5485ad83_0_25:notes"/>
+          <p:cNvPr id="173" name="Google Shape;173;g2ca5485ad83_0_25:notes"/>
           <p:cNvSpPr/>
           <p:nvPr>
             <p:ph idx="2" type="sldImg"/>
@@ -3450,7 +3451,7 @@
       </p:sp>
       <p:sp>
         <p:nvSpPr>
-          <p:cNvPr id="129" name="Google Shape;129;g2ca5485ad83_0_25:notes"/>
+          <p:cNvPr id="174" name="Google Shape;174;g2ca5485ad83_0_25:notes"/>
           <p:cNvSpPr txBox="1"/>
           <p:nvPr>
             <p:ph idx="1" type="body"/>
@@ -3500,7 +3501,7 @@
   <p:cSld>
     <p:spTree>
       <p:nvGrpSpPr>
-        <p:cNvPr id="136" name="Shape 136"/>
+        <p:cNvPr id="181" name="Shape 181"/>
         <p:cNvGrpSpPr/>
         <p:nvPr/>
       </p:nvGrpSpPr>
@@ -3514,7 +3515,7 @@
       </p:grpSpPr>
       <p:sp>
         <p:nvSpPr>
-          <p:cNvPr id="137" name="Google Shape;137;g2ca5485ad83_0_33:notes"/>
+          <p:cNvPr id="182" name="Google Shape;182;g2ca5485ad83_0_33:notes"/>
           <p:cNvSpPr/>
           <p:nvPr>
             <p:ph idx="2" type="sldImg"/>
@@ -3549,7 +3550,7 @@
       </p:sp>
       <p:sp>
         <p:nvSpPr>
-          <p:cNvPr id="138" name="Google Shape;138;g2ca5485ad83_0_33:notes"/>
+          <p:cNvPr id="183" name="Google Shape;183;g2ca5485ad83_0_33:notes"/>
           <p:cNvSpPr txBox="1"/>
           <p:nvPr>
             <p:ph idx="1" type="body"/>
@@ -4431,6 +4432,2794 @@
 </p:sldLayout>
 </file>
 
+<file path=ppt/slideLayouts/slideLayout12.xml><?xml version="1.0" encoding="utf-8"?>
+<p:sldLayout xmlns:a="http://schemas.openxmlformats.org/drawingml/2006/main" xmlns:r="http://schemas.openxmlformats.org/officeDocument/2006/relationships" xmlns:mc="http://schemas.openxmlformats.org/markup-compatibility/2006" xmlns:mv="urn:schemas-microsoft-com:mac:vml" xmlns:p="http://schemas.openxmlformats.org/presentationml/2006/main" xmlns:c="http://schemas.openxmlformats.org/drawingml/2006/chart" xmlns:dgm="http://schemas.openxmlformats.org/drawingml/2006/diagram" xmlns:o="urn:schemas-microsoft-com:office:office" xmlns:v="urn:schemas-microsoft-com:vml" xmlns:pvml="urn:schemas-microsoft-com:office:powerpoint" xmlns:com="http://schemas.openxmlformats.org/drawingml/2006/compatibility" xmlns:p14="http://schemas.microsoft.com/office/powerpoint/2010/main" xmlns:p15="http://schemas.microsoft.com/office/powerpoint/2012/main" xmlns:ahyp="http://schemas.microsoft.com/office/drawing/2018/hyperlinkcolor" matchingName="Title slide" type="title">
+  <p:cSld name="TITLE">
+    <p:spTree>
+      <p:nvGrpSpPr>
+        <p:cNvPr id="54" name="Shape 54"/>
+        <p:cNvGrpSpPr/>
+        <p:nvPr/>
+      </p:nvGrpSpPr>
+      <p:grpSpPr>
+        <a:xfrm>
+          <a:off x="0" y="0"/>
+          <a:ext cx="0" cy="0"/>
+          <a:chOff x="0" y="0"/>
+          <a:chExt cx="0" cy="0"/>
+        </a:xfrm>
+      </p:grpSpPr>
+      <p:sp>
+        <p:nvSpPr>
+          <p:cNvPr id="55" name="Google Shape;55;p14"/>
+          <p:cNvSpPr txBox="1"/>
+          <p:nvPr>
+            <p:ph type="ctrTitle"/>
+          </p:nvPr>
+        </p:nvSpPr>
+        <p:spPr>
+          <a:xfrm>
+            <a:off x="311708" y="744575"/>
+            <a:ext cx="8520600" cy="2052600"/>
+          </a:xfrm>
+          <a:prstGeom prst="rect">
+            <a:avLst/>
+          </a:prstGeom>
+        </p:spPr>
+        <p:txBody>
+          <a:bodyPr anchorCtr="0" anchor="b" bIns="91425" lIns="91425" spcFirstLastPara="1" rIns="91425" wrap="square" tIns="91425">
+            <a:normAutofit/>
+          </a:bodyPr>
+          <a:lstStyle>
+            <a:lvl1pPr lvl="0" algn="ctr">
+              <a:spcBef>
+                <a:spcPts val="0"/>
+              </a:spcBef>
+              <a:spcAft>
+                <a:spcPts val="0"/>
+              </a:spcAft>
+              <a:buSzPts val="5200"/>
+              <a:buNone/>
+              <a:defRPr sz="5200"/>
+            </a:lvl1pPr>
+            <a:lvl2pPr lvl="1" algn="ctr">
+              <a:spcBef>
+                <a:spcPts val="0"/>
+              </a:spcBef>
+              <a:spcAft>
+                <a:spcPts val="0"/>
+              </a:spcAft>
+              <a:buSzPts val="5200"/>
+              <a:buNone/>
+              <a:defRPr sz="5200"/>
+            </a:lvl2pPr>
+            <a:lvl3pPr lvl="2" algn="ctr">
+              <a:spcBef>
+                <a:spcPts val="0"/>
+              </a:spcBef>
+              <a:spcAft>
+                <a:spcPts val="0"/>
+              </a:spcAft>
+              <a:buSzPts val="5200"/>
+              <a:buNone/>
+              <a:defRPr sz="5200"/>
+            </a:lvl3pPr>
+            <a:lvl4pPr lvl="3" algn="ctr">
+              <a:spcBef>
+                <a:spcPts val="0"/>
+              </a:spcBef>
+              <a:spcAft>
+                <a:spcPts val="0"/>
+              </a:spcAft>
+              <a:buSzPts val="5200"/>
+              <a:buNone/>
+              <a:defRPr sz="5200"/>
+            </a:lvl4pPr>
+            <a:lvl5pPr lvl="4" algn="ctr">
+              <a:spcBef>
+                <a:spcPts val="0"/>
+              </a:spcBef>
+              <a:spcAft>
+                <a:spcPts val="0"/>
+              </a:spcAft>
+              <a:buSzPts val="5200"/>
+              <a:buNone/>
+              <a:defRPr sz="5200"/>
+            </a:lvl5pPr>
+            <a:lvl6pPr lvl="5" algn="ctr">
+              <a:spcBef>
+                <a:spcPts val="0"/>
+              </a:spcBef>
+              <a:spcAft>
+                <a:spcPts val="0"/>
+              </a:spcAft>
+              <a:buSzPts val="5200"/>
+              <a:buNone/>
+              <a:defRPr sz="5200"/>
+            </a:lvl6pPr>
+            <a:lvl7pPr lvl="6" algn="ctr">
+              <a:spcBef>
+                <a:spcPts val="0"/>
+              </a:spcBef>
+              <a:spcAft>
+                <a:spcPts val="0"/>
+              </a:spcAft>
+              <a:buSzPts val="5200"/>
+              <a:buNone/>
+              <a:defRPr sz="5200"/>
+            </a:lvl7pPr>
+            <a:lvl8pPr lvl="7" algn="ctr">
+              <a:spcBef>
+                <a:spcPts val="0"/>
+              </a:spcBef>
+              <a:spcAft>
+                <a:spcPts val="0"/>
+              </a:spcAft>
+              <a:buSzPts val="5200"/>
+              <a:buNone/>
+              <a:defRPr sz="5200"/>
+            </a:lvl8pPr>
+            <a:lvl9pPr lvl="8" algn="ctr">
+              <a:spcBef>
+                <a:spcPts val="0"/>
+              </a:spcBef>
+              <a:spcAft>
+                <a:spcPts val="0"/>
+              </a:spcAft>
+              <a:buSzPts val="5200"/>
+              <a:buNone/>
+              <a:defRPr sz="5200"/>
+            </a:lvl9pPr>
+          </a:lstStyle>
+          <a:p/>
+        </p:txBody>
+      </p:sp>
+      <p:sp>
+        <p:nvSpPr>
+          <p:cNvPr id="56" name="Google Shape;56;p14"/>
+          <p:cNvSpPr txBox="1"/>
+          <p:nvPr>
+            <p:ph idx="1" type="subTitle"/>
+          </p:nvPr>
+        </p:nvSpPr>
+        <p:spPr>
+          <a:xfrm>
+            <a:off x="311700" y="2834125"/>
+            <a:ext cx="8520600" cy="792600"/>
+          </a:xfrm>
+          <a:prstGeom prst="rect">
+            <a:avLst/>
+          </a:prstGeom>
+        </p:spPr>
+        <p:txBody>
+          <a:bodyPr anchorCtr="0" anchor="t" bIns="91425" lIns="91425" spcFirstLastPara="1" rIns="91425" wrap="square" tIns="91425">
+            <a:normAutofit/>
+          </a:bodyPr>
+          <a:lstStyle>
+            <a:lvl1pPr lvl="0" algn="ctr">
+              <a:lnSpc>
+                <a:spcPct val="100000"/>
+              </a:lnSpc>
+              <a:spcBef>
+                <a:spcPts val="0"/>
+              </a:spcBef>
+              <a:spcAft>
+                <a:spcPts val="0"/>
+              </a:spcAft>
+              <a:buSzPts val="2800"/>
+              <a:buNone/>
+              <a:defRPr sz="2800"/>
+            </a:lvl1pPr>
+            <a:lvl2pPr lvl="1" algn="ctr">
+              <a:lnSpc>
+                <a:spcPct val="100000"/>
+              </a:lnSpc>
+              <a:spcBef>
+                <a:spcPts val="0"/>
+              </a:spcBef>
+              <a:spcAft>
+                <a:spcPts val="0"/>
+              </a:spcAft>
+              <a:buSzPts val="2800"/>
+              <a:buNone/>
+              <a:defRPr sz="2800"/>
+            </a:lvl2pPr>
+            <a:lvl3pPr lvl="2" algn="ctr">
+              <a:lnSpc>
+                <a:spcPct val="100000"/>
+              </a:lnSpc>
+              <a:spcBef>
+                <a:spcPts val="0"/>
+              </a:spcBef>
+              <a:spcAft>
+                <a:spcPts val="0"/>
+              </a:spcAft>
+              <a:buSzPts val="2800"/>
+              <a:buNone/>
+              <a:defRPr sz="2800"/>
+            </a:lvl3pPr>
+            <a:lvl4pPr lvl="3" algn="ctr">
+              <a:lnSpc>
+                <a:spcPct val="100000"/>
+              </a:lnSpc>
+              <a:spcBef>
+                <a:spcPts val="0"/>
+              </a:spcBef>
+              <a:spcAft>
+                <a:spcPts val="0"/>
+              </a:spcAft>
+              <a:buSzPts val="2800"/>
+              <a:buNone/>
+              <a:defRPr sz="2800"/>
+            </a:lvl4pPr>
+            <a:lvl5pPr lvl="4" algn="ctr">
+              <a:lnSpc>
+                <a:spcPct val="100000"/>
+              </a:lnSpc>
+              <a:spcBef>
+                <a:spcPts val="0"/>
+              </a:spcBef>
+              <a:spcAft>
+                <a:spcPts val="0"/>
+              </a:spcAft>
+              <a:buSzPts val="2800"/>
+              <a:buNone/>
+              <a:defRPr sz="2800"/>
+            </a:lvl5pPr>
+            <a:lvl6pPr lvl="5" algn="ctr">
+              <a:lnSpc>
+                <a:spcPct val="100000"/>
+              </a:lnSpc>
+              <a:spcBef>
+                <a:spcPts val="0"/>
+              </a:spcBef>
+              <a:spcAft>
+                <a:spcPts val="0"/>
+              </a:spcAft>
+              <a:buSzPts val="2800"/>
+              <a:buNone/>
+              <a:defRPr sz="2800"/>
+            </a:lvl6pPr>
+            <a:lvl7pPr lvl="6" algn="ctr">
+              <a:lnSpc>
+                <a:spcPct val="100000"/>
+              </a:lnSpc>
+              <a:spcBef>
+                <a:spcPts val="0"/>
+              </a:spcBef>
+              <a:spcAft>
+                <a:spcPts val="0"/>
+              </a:spcAft>
+              <a:buSzPts val="2800"/>
+              <a:buNone/>
+              <a:defRPr sz="2800"/>
+            </a:lvl7pPr>
+            <a:lvl8pPr lvl="7" algn="ctr">
+              <a:lnSpc>
+                <a:spcPct val="100000"/>
+              </a:lnSpc>
+              <a:spcBef>
+                <a:spcPts val="0"/>
+              </a:spcBef>
+              <a:spcAft>
+                <a:spcPts val="0"/>
+              </a:spcAft>
+              <a:buSzPts val="2800"/>
+              <a:buNone/>
+              <a:defRPr sz="2800"/>
+            </a:lvl8pPr>
+            <a:lvl9pPr lvl="8" algn="ctr">
+              <a:lnSpc>
+                <a:spcPct val="100000"/>
+              </a:lnSpc>
+              <a:spcBef>
+                <a:spcPts val="0"/>
+              </a:spcBef>
+              <a:spcAft>
+                <a:spcPts val="0"/>
+              </a:spcAft>
+              <a:buSzPts val="2800"/>
+              <a:buNone/>
+              <a:defRPr sz="2800"/>
+            </a:lvl9pPr>
+          </a:lstStyle>
+          <a:p/>
+        </p:txBody>
+      </p:sp>
+      <p:sp>
+        <p:nvSpPr>
+          <p:cNvPr id="57" name="Google Shape;57;p14"/>
+          <p:cNvSpPr txBox="1"/>
+          <p:nvPr>
+            <p:ph idx="12" type="sldNum"/>
+          </p:nvPr>
+        </p:nvSpPr>
+        <p:spPr>
+          <a:xfrm>
+            <a:off x="8472458" y="4663217"/>
+            <a:ext cx="548700" cy="393600"/>
+          </a:xfrm>
+          <a:prstGeom prst="rect">
+            <a:avLst/>
+          </a:prstGeom>
+        </p:spPr>
+        <p:txBody>
+          <a:bodyPr anchorCtr="0" anchor="ctr" bIns="91425" lIns="91425" spcFirstLastPara="1" rIns="91425" wrap="square" tIns="91425">
+            <a:normAutofit/>
+          </a:bodyPr>
+          <a:lstStyle>
+            <a:lvl1pPr lvl="0">
+              <a:buNone/>
+              <a:defRPr/>
+            </a:lvl1pPr>
+            <a:lvl2pPr lvl="1">
+              <a:buNone/>
+              <a:defRPr/>
+            </a:lvl2pPr>
+            <a:lvl3pPr lvl="2">
+              <a:buNone/>
+              <a:defRPr/>
+            </a:lvl3pPr>
+            <a:lvl4pPr lvl="3">
+              <a:buNone/>
+              <a:defRPr/>
+            </a:lvl4pPr>
+            <a:lvl5pPr lvl="4">
+              <a:buNone/>
+              <a:defRPr/>
+            </a:lvl5pPr>
+            <a:lvl6pPr lvl="5">
+              <a:buNone/>
+              <a:defRPr/>
+            </a:lvl6pPr>
+            <a:lvl7pPr lvl="6">
+              <a:buNone/>
+              <a:defRPr/>
+            </a:lvl7pPr>
+            <a:lvl8pPr lvl="7">
+              <a:buNone/>
+              <a:defRPr/>
+            </a:lvl8pPr>
+            <a:lvl9pPr lvl="8">
+              <a:buNone/>
+              <a:defRPr/>
+            </a:lvl9pPr>
+          </a:lstStyle>
+          <a:p>
+            <a:pPr indent="0" lvl="0" marL="0" rtl="0" algn="r">
+              <a:spcBef>
+                <a:spcPts val="0"/>
+              </a:spcBef>
+              <a:spcAft>
+                <a:spcPts val="0"/>
+              </a:spcAft>
+              <a:buNone/>
+            </a:pPr>
+            <a:fld id="{00000000-1234-1234-1234-123412341234}" type="slidenum">
+              <a:rPr lang="es"/>
+              <a:t>‹#›</a:t>
+            </a:fld>
+            <a:endParaRPr/>
+          </a:p>
+        </p:txBody>
+      </p:sp>
+    </p:spTree>
+  </p:cSld>
+  <p:clrMapOvr>
+    <a:masterClrMapping/>
+  </p:clrMapOvr>
+</p:sldLayout>
+</file>
+
+<file path=ppt/slideLayouts/slideLayout13.xml><?xml version="1.0" encoding="utf-8"?>
+<p:sldLayout xmlns:a="http://schemas.openxmlformats.org/drawingml/2006/main" xmlns:r="http://schemas.openxmlformats.org/officeDocument/2006/relationships" xmlns:mc="http://schemas.openxmlformats.org/markup-compatibility/2006" xmlns:mv="urn:schemas-microsoft-com:mac:vml" xmlns:p="http://schemas.openxmlformats.org/presentationml/2006/main" xmlns:c="http://schemas.openxmlformats.org/drawingml/2006/chart" xmlns:dgm="http://schemas.openxmlformats.org/drawingml/2006/diagram" xmlns:o="urn:schemas-microsoft-com:office:office" xmlns:v="urn:schemas-microsoft-com:vml" xmlns:pvml="urn:schemas-microsoft-com:office:powerpoint" xmlns:com="http://schemas.openxmlformats.org/drawingml/2006/compatibility" xmlns:p14="http://schemas.microsoft.com/office/powerpoint/2010/main" xmlns:p15="http://schemas.microsoft.com/office/powerpoint/2012/main" xmlns:ahyp="http://schemas.microsoft.com/office/drawing/2018/hyperlinkcolor" matchingName="Section header" type="secHead">
+  <p:cSld name="SECTION_HEADER">
+    <p:spTree>
+      <p:nvGrpSpPr>
+        <p:cNvPr id="58" name="Shape 58"/>
+        <p:cNvGrpSpPr/>
+        <p:nvPr/>
+      </p:nvGrpSpPr>
+      <p:grpSpPr>
+        <a:xfrm>
+          <a:off x="0" y="0"/>
+          <a:ext cx="0" cy="0"/>
+          <a:chOff x="0" y="0"/>
+          <a:chExt cx="0" cy="0"/>
+        </a:xfrm>
+      </p:grpSpPr>
+      <p:sp>
+        <p:nvSpPr>
+          <p:cNvPr id="59" name="Google Shape;59;p15"/>
+          <p:cNvSpPr txBox="1"/>
+          <p:nvPr>
+            <p:ph type="title"/>
+          </p:nvPr>
+        </p:nvSpPr>
+        <p:spPr>
+          <a:xfrm>
+            <a:off x="311700" y="2150850"/>
+            <a:ext cx="8520600" cy="841800"/>
+          </a:xfrm>
+          <a:prstGeom prst="rect">
+            <a:avLst/>
+          </a:prstGeom>
+        </p:spPr>
+        <p:txBody>
+          <a:bodyPr anchorCtr="0" anchor="ctr" bIns="91425" lIns="91425" spcFirstLastPara="1" rIns="91425" wrap="square" tIns="91425">
+            <a:normAutofit/>
+          </a:bodyPr>
+          <a:lstStyle>
+            <a:lvl1pPr lvl="0" algn="ctr">
+              <a:spcBef>
+                <a:spcPts val="0"/>
+              </a:spcBef>
+              <a:spcAft>
+                <a:spcPts val="0"/>
+              </a:spcAft>
+              <a:buSzPts val="3600"/>
+              <a:buNone/>
+              <a:defRPr sz="3600"/>
+            </a:lvl1pPr>
+            <a:lvl2pPr lvl="1" algn="ctr">
+              <a:spcBef>
+                <a:spcPts val="0"/>
+              </a:spcBef>
+              <a:spcAft>
+                <a:spcPts val="0"/>
+              </a:spcAft>
+              <a:buSzPts val="3600"/>
+              <a:buNone/>
+              <a:defRPr sz="3600"/>
+            </a:lvl2pPr>
+            <a:lvl3pPr lvl="2" algn="ctr">
+              <a:spcBef>
+                <a:spcPts val="0"/>
+              </a:spcBef>
+              <a:spcAft>
+                <a:spcPts val="0"/>
+              </a:spcAft>
+              <a:buSzPts val="3600"/>
+              <a:buNone/>
+              <a:defRPr sz="3600"/>
+            </a:lvl3pPr>
+            <a:lvl4pPr lvl="3" algn="ctr">
+              <a:spcBef>
+                <a:spcPts val="0"/>
+              </a:spcBef>
+              <a:spcAft>
+                <a:spcPts val="0"/>
+              </a:spcAft>
+              <a:buSzPts val="3600"/>
+              <a:buNone/>
+              <a:defRPr sz="3600"/>
+            </a:lvl4pPr>
+            <a:lvl5pPr lvl="4" algn="ctr">
+              <a:spcBef>
+                <a:spcPts val="0"/>
+              </a:spcBef>
+              <a:spcAft>
+                <a:spcPts val="0"/>
+              </a:spcAft>
+              <a:buSzPts val="3600"/>
+              <a:buNone/>
+              <a:defRPr sz="3600"/>
+            </a:lvl5pPr>
+            <a:lvl6pPr lvl="5" algn="ctr">
+              <a:spcBef>
+                <a:spcPts val="0"/>
+              </a:spcBef>
+              <a:spcAft>
+                <a:spcPts val="0"/>
+              </a:spcAft>
+              <a:buSzPts val="3600"/>
+              <a:buNone/>
+              <a:defRPr sz="3600"/>
+            </a:lvl6pPr>
+            <a:lvl7pPr lvl="6" algn="ctr">
+              <a:spcBef>
+                <a:spcPts val="0"/>
+              </a:spcBef>
+              <a:spcAft>
+                <a:spcPts val="0"/>
+              </a:spcAft>
+              <a:buSzPts val="3600"/>
+              <a:buNone/>
+              <a:defRPr sz="3600"/>
+            </a:lvl7pPr>
+            <a:lvl8pPr lvl="7" algn="ctr">
+              <a:spcBef>
+                <a:spcPts val="0"/>
+              </a:spcBef>
+              <a:spcAft>
+                <a:spcPts val="0"/>
+              </a:spcAft>
+              <a:buSzPts val="3600"/>
+              <a:buNone/>
+              <a:defRPr sz="3600"/>
+            </a:lvl8pPr>
+            <a:lvl9pPr lvl="8" algn="ctr">
+              <a:spcBef>
+                <a:spcPts val="0"/>
+              </a:spcBef>
+              <a:spcAft>
+                <a:spcPts val="0"/>
+              </a:spcAft>
+              <a:buSzPts val="3600"/>
+              <a:buNone/>
+              <a:defRPr sz="3600"/>
+            </a:lvl9pPr>
+          </a:lstStyle>
+          <a:p/>
+        </p:txBody>
+      </p:sp>
+      <p:sp>
+        <p:nvSpPr>
+          <p:cNvPr id="60" name="Google Shape;60;p15"/>
+          <p:cNvSpPr txBox="1"/>
+          <p:nvPr>
+            <p:ph idx="12" type="sldNum"/>
+          </p:nvPr>
+        </p:nvSpPr>
+        <p:spPr>
+          <a:xfrm>
+            <a:off x="8472458" y="4663217"/>
+            <a:ext cx="548700" cy="393600"/>
+          </a:xfrm>
+          <a:prstGeom prst="rect">
+            <a:avLst/>
+          </a:prstGeom>
+        </p:spPr>
+        <p:txBody>
+          <a:bodyPr anchorCtr="0" anchor="ctr" bIns="91425" lIns="91425" spcFirstLastPara="1" rIns="91425" wrap="square" tIns="91425">
+            <a:normAutofit/>
+          </a:bodyPr>
+          <a:lstStyle>
+            <a:lvl1pPr lvl="0">
+              <a:buNone/>
+              <a:defRPr/>
+            </a:lvl1pPr>
+            <a:lvl2pPr lvl="1">
+              <a:buNone/>
+              <a:defRPr/>
+            </a:lvl2pPr>
+            <a:lvl3pPr lvl="2">
+              <a:buNone/>
+              <a:defRPr/>
+            </a:lvl3pPr>
+            <a:lvl4pPr lvl="3">
+              <a:buNone/>
+              <a:defRPr/>
+            </a:lvl4pPr>
+            <a:lvl5pPr lvl="4">
+              <a:buNone/>
+              <a:defRPr/>
+            </a:lvl5pPr>
+            <a:lvl6pPr lvl="5">
+              <a:buNone/>
+              <a:defRPr/>
+            </a:lvl6pPr>
+            <a:lvl7pPr lvl="6">
+              <a:buNone/>
+              <a:defRPr/>
+            </a:lvl7pPr>
+            <a:lvl8pPr lvl="7">
+              <a:buNone/>
+              <a:defRPr/>
+            </a:lvl8pPr>
+            <a:lvl9pPr lvl="8">
+              <a:buNone/>
+              <a:defRPr/>
+            </a:lvl9pPr>
+          </a:lstStyle>
+          <a:p>
+            <a:pPr indent="0" lvl="0" marL="0" rtl="0" algn="r">
+              <a:spcBef>
+                <a:spcPts val="0"/>
+              </a:spcBef>
+              <a:spcAft>
+                <a:spcPts val="0"/>
+              </a:spcAft>
+              <a:buNone/>
+            </a:pPr>
+            <a:fld id="{00000000-1234-1234-1234-123412341234}" type="slidenum">
+              <a:rPr lang="es"/>
+              <a:t>‹#›</a:t>
+            </a:fld>
+            <a:endParaRPr/>
+          </a:p>
+        </p:txBody>
+      </p:sp>
+    </p:spTree>
+  </p:cSld>
+  <p:clrMapOvr>
+    <a:masterClrMapping/>
+  </p:clrMapOvr>
+</p:sldLayout>
+</file>
+
+<file path=ppt/slideLayouts/slideLayout14.xml><?xml version="1.0" encoding="utf-8"?>
+<p:sldLayout xmlns:a="http://schemas.openxmlformats.org/drawingml/2006/main" xmlns:r="http://schemas.openxmlformats.org/officeDocument/2006/relationships" xmlns:mc="http://schemas.openxmlformats.org/markup-compatibility/2006" xmlns:mv="urn:schemas-microsoft-com:mac:vml" xmlns:p="http://schemas.openxmlformats.org/presentationml/2006/main" xmlns:c="http://schemas.openxmlformats.org/drawingml/2006/chart" xmlns:dgm="http://schemas.openxmlformats.org/drawingml/2006/diagram" xmlns:o="urn:schemas-microsoft-com:office:office" xmlns:v="urn:schemas-microsoft-com:vml" xmlns:pvml="urn:schemas-microsoft-com:office:powerpoint" xmlns:com="http://schemas.openxmlformats.org/drawingml/2006/compatibility" xmlns:p14="http://schemas.microsoft.com/office/powerpoint/2010/main" xmlns:p15="http://schemas.microsoft.com/office/powerpoint/2012/main" xmlns:ahyp="http://schemas.microsoft.com/office/drawing/2018/hyperlinkcolor" matchingName="Title and body" type="tx">
+  <p:cSld name="TITLE_AND_BODY">
+    <p:spTree>
+      <p:nvGrpSpPr>
+        <p:cNvPr id="61" name="Shape 61"/>
+        <p:cNvGrpSpPr/>
+        <p:nvPr/>
+      </p:nvGrpSpPr>
+      <p:grpSpPr>
+        <a:xfrm>
+          <a:off x="0" y="0"/>
+          <a:ext cx="0" cy="0"/>
+          <a:chOff x="0" y="0"/>
+          <a:chExt cx="0" cy="0"/>
+        </a:xfrm>
+      </p:grpSpPr>
+      <p:sp>
+        <p:nvSpPr>
+          <p:cNvPr id="62" name="Google Shape;62;p16"/>
+          <p:cNvSpPr txBox="1"/>
+          <p:nvPr>
+            <p:ph type="title"/>
+          </p:nvPr>
+        </p:nvSpPr>
+        <p:spPr>
+          <a:xfrm>
+            <a:off x="311700" y="445025"/>
+            <a:ext cx="8520600" cy="572700"/>
+          </a:xfrm>
+          <a:prstGeom prst="rect">
+            <a:avLst/>
+          </a:prstGeom>
+        </p:spPr>
+        <p:txBody>
+          <a:bodyPr anchorCtr="0" anchor="t" bIns="91425" lIns="91425" spcFirstLastPara="1" rIns="91425" wrap="square" tIns="91425">
+            <a:normAutofit/>
+          </a:bodyPr>
+          <a:lstStyle>
+            <a:lvl1pPr lvl="0">
+              <a:spcBef>
+                <a:spcPts val="0"/>
+              </a:spcBef>
+              <a:spcAft>
+                <a:spcPts val="0"/>
+              </a:spcAft>
+              <a:buSzPts val="2800"/>
+              <a:buNone/>
+              <a:defRPr/>
+            </a:lvl1pPr>
+            <a:lvl2pPr lvl="1">
+              <a:spcBef>
+                <a:spcPts val="0"/>
+              </a:spcBef>
+              <a:spcAft>
+                <a:spcPts val="0"/>
+              </a:spcAft>
+              <a:buSzPts val="2800"/>
+              <a:buNone/>
+              <a:defRPr/>
+            </a:lvl2pPr>
+            <a:lvl3pPr lvl="2">
+              <a:spcBef>
+                <a:spcPts val="0"/>
+              </a:spcBef>
+              <a:spcAft>
+                <a:spcPts val="0"/>
+              </a:spcAft>
+              <a:buSzPts val="2800"/>
+              <a:buNone/>
+              <a:defRPr/>
+            </a:lvl3pPr>
+            <a:lvl4pPr lvl="3">
+              <a:spcBef>
+                <a:spcPts val="0"/>
+              </a:spcBef>
+              <a:spcAft>
+                <a:spcPts val="0"/>
+              </a:spcAft>
+              <a:buSzPts val="2800"/>
+              <a:buNone/>
+              <a:defRPr/>
+            </a:lvl4pPr>
+            <a:lvl5pPr lvl="4">
+              <a:spcBef>
+                <a:spcPts val="0"/>
+              </a:spcBef>
+              <a:spcAft>
+                <a:spcPts val="0"/>
+              </a:spcAft>
+              <a:buSzPts val="2800"/>
+              <a:buNone/>
+              <a:defRPr/>
+            </a:lvl5pPr>
+            <a:lvl6pPr lvl="5">
+              <a:spcBef>
+                <a:spcPts val="0"/>
+              </a:spcBef>
+              <a:spcAft>
+                <a:spcPts val="0"/>
+              </a:spcAft>
+              <a:buSzPts val="2800"/>
+              <a:buNone/>
+              <a:defRPr/>
+            </a:lvl6pPr>
+            <a:lvl7pPr lvl="6">
+              <a:spcBef>
+                <a:spcPts val="0"/>
+              </a:spcBef>
+              <a:spcAft>
+                <a:spcPts val="0"/>
+              </a:spcAft>
+              <a:buSzPts val="2800"/>
+              <a:buNone/>
+              <a:defRPr/>
+            </a:lvl7pPr>
+            <a:lvl8pPr lvl="7">
+              <a:spcBef>
+                <a:spcPts val="0"/>
+              </a:spcBef>
+              <a:spcAft>
+                <a:spcPts val="0"/>
+              </a:spcAft>
+              <a:buSzPts val="2800"/>
+              <a:buNone/>
+              <a:defRPr/>
+            </a:lvl8pPr>
+            <a:lvl9pPr lvl="8">
+              <a:spcBef>
+                <a:spcPts val="0"/>
+              </a:spcBef>
+              <a:spcAft>
+                <a:spcPts val="0"/>
+              </a:spcAft>
+              <a:buSzPts val="2800"/>
+              <a:buNone/>
+              <a:defRPr/>
+            </a:lvl9pPr>
+          </a:lstStyle>
+          <a:p/>
+        </p:txBody>
+      </p:sp>
+      <p:sp>
+        <p:nvSpPr>
+          <p:cNvPr id="63" name="Google Shape;63;p16"/>
+          <p:cNvSpPr txBox="1"/>
+          <p:nvPr>
+            <p:ph idx="1" type="body"/>
+          </p:nvPr>
+        </p:nvSpPr>
+        <p:spPr>
+          <a:xfrm>
+            <a:off x="311700" y="1152475"/>
+            <a:ext cx="8520600" cy="3416400"/>
+          </a:xfrm>
+          <a:prstGeom prst="rect">
+            <a:avLst/>
+          </a:prstGeom>
+        </p:spPr>
+        <p:txBody>
+          <a:bodyPr anchorCtr="0" anchor="t" bIns="91425" lIns="91425" spcFirstLastPara="1" rIns="91425" wrap="square" tIns="91425">
+            <a:normAutofit/>
+          </a:bodyPr>
+          <a:lstStyle>
+            <a:lvl1pPr indent="-342900" lvl="0" marL="457200">
+              <a:spcBef>
+                <a:spcPts val="0"/>
+              </a:spcBef>
+              <a:spcAft>
+                <a:spcPts val="0"/>
+              </a:spcAft>
+              <a:buSzPts val="1800"/>
+              <a:buChar char="●"/>
+              <a:defRPr/>
+            </a:lvl1pPr>
+            <a:lvl2pPr indent="-317500" lvl="1" marL="914400">
+              <a:spcBef>
+                <a:spcPts val="0"/>
+              </a:spcBef>
+              <a:spcAft>
+                <a:spcPts val="0"/>
+              </a:spcAft>
+              <a:buSzPts val="1400"/>
+              <a:buChar char="○"/>
+              <a:defRPr/>
+            </a:lvl2pPr>
+            <a:lvl3pPr indent="-317500" lvl="2" marL="1371600">
+              <a:spcBef>
+                <a:spcPts val="0"/>
+              </a:spcBef>
+              <a:spcAft>
+                <a:spcPts val="0"/>
+              </a:spcAft>
+              <a:buSzPts val="1400"/>
+              <a:buChar char="■"/>
+              <a:defRPr/>
+            </a:lvl3pPr>
+            <a:lvl4pPr indent="-317500" lvl="3" marL="1828800">
+              <a:spcBef>
+                <a:spcPts val="0"/>
+              </a:spcBef>
+              <a:spcAft>
+                <a:spcPts val="0"/>
+              </a:spcAft>
+              <a:buSzPts val="1400"/>
+              <a:buChar char="●"/>
+              <a:defRPr/>
+            </a:lvl4pPr>
+            <a:lvl5pPr indent="-317500" lvl="4" marL="2286000">
+              <a:spcBef>
+                <a:spcPts val="0"/>
+              </a:spcBef>
+              <a:spcAft>
+                <a:spcPts val="0"/>
+              </a:spcAft>
+              <a:buSzPts val="1400"/>
+              <a:buChar char="○"/>
+              <a:defRPr/>
+            </a:lvl5pPr>
+            <a:lvl6pPr indent="-317500" lvl="5" marL="2743200">
+              <a:spcBef>
+                <a:spcPts val="0"/>
+              </a:spcBef>
+              <a:spcAft>
+                <a:spcPts val="0"/>
+              </a:spcAft>
+              <a:buSzPts val="1400"/>
+              <a:buChar char="■"/>
+              <a:defRPr/>
+            </a:lvl6pPr>
+            <a:lvl7pPr indent="-317500" lvl="6" marL="3200400">
+              <a:spcBef>
+                <a:spcPts val="0"/>
+              </a:spcBef>
+              <a:spcAft>
+                <a:spcPts val="0"/>
+              </a:spcAft>
+              <a:buSzPts val="1400"/>
+              <a:buChar char="●"/>
+              <a:defRPr/>
+            </a:lvl7pPr>
+            <a:lvl8pPr indent="-317500" lvl="7" marL="3657600">
+              <a:spcBef>
+                <a:spcPts val="0"/>
+              </a:spcBef>
+              <a:spcAft>
+                <a:spcPts val="0"/>
+              </a:spcAft>
+              <a:buSzPts val="1400"/>
+              <a:buChar char="○"/>
+              <a:defRPr/>
+            </a:lvl8pPr>
+            <a:lvl9pPr indent="-317500" lvl="8" marL="4114800">
+              <a:spcBef>
+                <a:spcPts val="0"/>
+              </a:spcBef>
+              <a:spcAft>
+                <a:spcPts val="0"/>
+              </a:spcAft>
+              <a:buSzPts val="1400"/>
+              <a:buChar char="■"/>
+              <a:defRPr/>
+            </a:lvl9pPr>
+          </a:lstStyle>
+          <a:p/>
+        </p:txBody>
+      </p:sp>
+      <p:sp>
+        <p:nvSpPr>
+          <p:cNvPr id="64" name="Google Shape;64;p16"/>
+          <p:cNvSpPr txBox="1"/>
+          <p:nvPr>
+            <p:ph idx="12" type="sldNum"/>
+          </p:nvPr>
+        </p:nvSpPr>
+        <p:spPr>
+          <a:xfrm>
+            <a:off x="8472458" y="4663217"/>
+            <a:ext cx="548700" cy="393600"/>
+          </a:xfrm>
+          <a:prstGeom prst="rect">
+            <a:avLst/>
+          </a:prstGeom>
+        </p:spPr>
+        <p:txBody>
+          <a:bodyPr anchorCtr="0" anchor="ctr" bIns="91425" lIns="91425" spcFirstLastPara="1" rIns="91425" wrap="square" tIns="91425">
+            <a:normAutofit/>
+          </a:bodyPr>
+          <a:lstStyle>
+            <a:lvl1pPr lvl="0">
+              <a:buNone/>
+              <a:defRPr/>
+            </a:lvl1pPr>
+            <a:lvl2pPr lvl="1">
+              <a:buNone/>
+              <a:defRPr/>
+            </a:lvl2pPr>
+            <a:lvl3pPr lvl="2">
+              <a:buNone/>
+              <a:defRPr/>
+            </a:lvl3pPr>
+            <a:lvl4pPr lvl="3">
+              <a:buNone/>
+              <a:defRPr/>
+            </a:lvl4pPr>
+            <a:lvl5pPr lvl="4">
+              <a:buNone/>
+              <a:defRPr/>
+            </a:lvl5pPr>
+            <a:lvl6pPr lvl="5">
+              <a:buNone/>
+              <a:defRPr/>
+            </a:lvl6pPr>
+            <a:lvl7pPr lvl="6">
+              <a:buNone/>
+              <a:defRPr/>
+            </a:lvl7pPr>
+            <a:lvl8pPr lvl="7">
+              <a:buNone/>
+              <a:defRPr/>
+            </a:lvl8pPr>
+            <a:lvl9pPr lvl="8">
+              <a:buNone/>
+              <a:defRPr/>
+            </a:lvl9pPr>
+          </a:lstStyle>
+          <a:p>
+            <a:pPr indent="0" lvl="0" marL="0" rtl="0" algn="r">
+              <a:spcBef>
+                <a:spcPts val="0"/>
+              </a:spcBef>
+              <a:spcAft>
+                <a:spcPts val="0"/>
+              </a:spcAft>
+              <a:buNone/>
+            </a:pPr>
+            <a:fld id="{00000000-1234-1234-1234-123412341234}" type="slidenum">
+              <a:rPr lang="es"/>
+              <a:t>‹#›</a:t>
+            </a:fld>
+            <a:endParaRPr/>
+          </a:p>
+        </p:txBody>
+      </p:sp>
+    </p:spTree>
+  </p:cSld>
+  <p:clrMapOvr>
+    <a:masterClrMapping/>
+  </p:clrMapOvr>
+</p:sldLayout>
+</file>
+
+<file path=ppt/slideLayouts/slideLayout15.xml><?xml version="1.0" encoding="utf-8"?>
+<p:sldLayout xmlns:a="http://schemas.openxmlformats.org/drawingml/2006/main" xmlns:r="http://schemas.openxmlformats.org/officeDocument/2006/relationships" xmlns:mc="http://schemas.openxmlformats.org/markup-compatibility/2006" xmlns:mv="urn:schemas-microsoft-com:mac:vml" xmlns:p="http://schemas.openxmlformats.org/presentationml/2006/main" xmlns:c="http://schemas.openxmlformats.org/drawingml/2006/chart" xmlns:dgm="http://schemas.openxmlformats.org/drawingml/2006/diagram" xmlns:o="urn:schemas-microsoft-com:office:office" xmlns:v="urn:schemas-microsoft-com:vml" xmlns:pvml="urn:schemas-microsoft-com:office:powerpoint" xmlns:com="http://schemas.openxmlformats.org/drawingml/2006/compatibility" xmlns:p14="http://schemas.microsoft.com/office/powerpoint/2010/main" xmlns:p15="http://schemas.microsoft.com/office/powerpoint/2012/main" xmlns:ahyp="http://schemas.microsoft.com/office/drawing/2018/hyperlinkcolor" matchingName="Title and two columns" type="twoColTx">
+  <p:cSld name="TITLE_AND_TWO_COLUMNS">
+    <p:spTree>
+      <p:nvGrpSpPr>
+        <p:cNvPr id="65" name="Shape 65"/>
+        <p:cNvGrpSpPr/>
+        <p:nvPr/>
+      </p:nvGrpSpPr>
+      <p:grpSpPr>
+        <a:xfrm>
+          <a:off x="0" y="0"/>
+          <a:ext cx="0" cy="0"/>
+          <a:chOff x="0" y="0"/>
+          <a:chExt cx="0" cy="0"/>
+        </a:xfrm>
+      </p:grpSpPr>
+      <p:sp>
+        <p:nvSpPr>
+          <p:cNvPr id="66" name="Google Shape;66;p17"/>
+          <p:cNvSpPr txBox="1"/>
+          <p:nvPr>
+            <p:ph type="title"/>
+          </p:nvPr>
+        </p:nvSpPr>
+        <p:spPr>
+          <a:xfrm>
+            <a:off x="311700" y="445025"/>
+            <a:ext cx="8520600" cy="572700"/>
+          </a:xfrm>
+          <a:prstGeom prst="rect">
+            <a:avLst/>
+          </a:prstGeom>
+        </p:spPr>
+        <p:txBody>
+          <a:bodyPr anchorCtr="0" anchor="t" bIns="91425" lIns="91425" spcFirstLastPara="1" rIns="91425" wrap="square" tIns="91425">
+            <a:normAutofit/>
+          </a:bodyPr>
+          <a:lstStyle>
+            <a:lvl1pPr lvl="0">
+              <a:spcBef>
+                <a:spcPts val="0"/>
+              </a:spcBef>
+              <a:spcAft>
+                <a:spcPts val="0"/>
+              </a:spcAft>
+              <a:buSzPts val="2800"/>
+              <a:buNone/>
+              <a:defRPr/>
+            </a:lvl1pPr>
+            <a:lvl2pPr lvl="1">
+              <a:spcBef>
+                <a:spcPts val="0"/>
+              </a:spcBef>
+              <a:spcAft>
+                <a:spcPts val="0"/>
+              </a:spcAft>
+              <a:buSzPts val="2800"/>
+              <a:buNone/>
+              <a:defRPr/>
+            </a:lvl2pPr>
+            <a:lvl3pPr lvl="2">
+              <a:spcBef>
+                <a:spcPts val="0"/>
+              </a:spcBef>
+              <a:spcAft>
+                <a:spcPts val="0"/>
+              </a:spcAft>
+              <a:buSzPts val="2800"/>
+              <a:buNone/>
+              <a:defRPr/>
+            </a:lvl3pPr>
+            <a:lvl4pPr lvl="3">
+              <a:spcBef>
+                <a:spcPts val="0"/>
+              </a:spcBef>
+              <a:spcAft>
+                <a:spcPts val="0"/>
+              </a:spcAft>
+              <a:buSzPts val="2800"/>
+              <a:buNone/>
+              <a:defRPr/>
+            </a:lvl4pPr>
+            <a:lvl5pPr lvl="4">
+              <a:spcBef>
+                <a:spcPts val="0"/>
+              </a:spcBef>
+              <a:spcAft>
+                <a:spcPts val="0"/>
+              </a:spcAft>
+              <a:buSzPts val="2800"/>
+              <a:buNone/>
+              <a:defRPr/>
+            </a:lvl5pPr>
+            <a:lvl6pPr lvl="5">
+              <a:spcBef>
+                <a:spcPts val="0"/>
+              </a:spcBef>
+              <a:spcAft>
+                <a:spcPts val="0"/>
+              </a:spcAft>
+              <a:buSzPts val="2800"/>
+              <a:buNone/>
+              <a:defRPr/>
+            </a:lvl6pPr>
+            <a:lvl7pPr lvl="6">
+              <a:spcBef>
+                <a:spcPts val="0"/>
+              </a:spcBef>
+              <a:spcAft>
+                <a:spcPts val="0"/>
+              </a:spcAft>
+              <a:buSzPts val="2800"/>
+              <a:buNone/>
+              <a:defRPr/>
+            </a:lvl7pPr>
+            <a:lvl8pPr lvl="7">
+              <a:spcBef>
+                <a:spcPts val="0"/>
+              </a:spcBef>
+              <a:spcAft>
+                <a:spcPts val="0"/>
+              </a:spcAft>
+              <a:buSzPts val="2800"/>
+              <a:buNone/>
+              <a:defRPr/>
+            </a:lvl8pPr>
+            <a:lvl9pPr lvl="8">
+              <a:spcBef>
+                <a:spcPts val="0"/>
+              </a:spcBef>
+              <a:spcAft>
+                <a:spcPts val="0"/>
+              </a:spcAft>
+              <a:buSzPts val="2800"/>
+              <a:buNone/>
+              <a:defRPr/>
+            </a:lvl9pPr>
+          </a:lstStyle>
+          <a:p/>
+        </p:txBody>
+      </p:sp>
+      <p:sp>
+        <p:nvSpPr>
+          <p:cNvPr id="67" name="Google Shape;67;p17"/>
+          <p:cNvSpPr txBox="1"/>
+          <p:nvPr>
+            <p:ph idx="1" type="body"/>
+          </p:nvPr>
+        </p:nvSpPr>
+        <p:spPr>
+          <a:xfrm>
+            <a:off x="311700" y="1152475"/>
+            <a:ext cx="3999900" cy="3416400"/>
+          </a:xfrm>
+          <a:prstGeom prst="rect">
+            <a:avLst/>
+          </a:prstGeom>
+        </p:spPr>
+        <p:txBody>
+          <a:bodyPr anchorCtr="0" anchor="t" bIns="91425" lIns="91425" spcFirstLastPara="1" rIns="91425" wrap="square" tIns="91425">
+            <a:normAutofit/>
+          </a:bodyPr>
+          <a:lstStyle>
+            <a:lvl1pPr indent="-317500" lvl="0" marL="457200">
+              <a:spcBef>
+                <a:spcPts val="0"/>
+              </a:spcBef>
+              <a:spcAft>
+                <a:spcPts val="0"/>
+              </a:spcAft>
+              <a:buSzPts val="1400"/>
+              <a:buChar char="●"/>
+              <a:defRPr sz="1400"/>
+            </a:lvl1pPr>
+            <a:lvl2pPr indent="-304800" lvl="1" marL="914400">
+              <a:spcBef>
+                <a:spcPts val="0"/>
+              </a:spcBef>
+              <a:spcAft>
+                <a:spcPts val="0"/>
+              </a:spcAft>
+              <a:buSzPts val="1200"/>
+              <a:buChar char="○"/>
+              <a:defRPr sz="1200"/>
+            </a:lvl2pPr>
+            <a:lvl3pPr indent="-304800" lvl="2" marL="1371600">
+              <a:spcBef>
+                <a:spcPts val="0"/>
+              </a:spcBef>
+              <a:spcAft>
+                <a:spcPts val="0"/>
+              </a:spcAft>
+              <a:buSzPts val="1200"/>
+              <a:buChar char="■"/>
+              <a:defRPr sz="1200"/>
+            </a:lvl3pPr>
+            <a:lvl4pPr indent="-304800" lvl="3" marL="1828800">
+              <a:spcBef>
+                <a:spcPts val="0"/>
+              </a:spcBef>
+              <a:spcAft>
+                <a:spcPts val="0"/>
+              </a:spcAft>
+              <a:buSzPts val="1200"/>
+              <a:buChar char="●"/>
+              <a:defRPr sz="1200"/>
+            </a:lvl4pPr>
+            <a:lvl5pPr indent="-304800" lvl="4" marL="2286000">
+              <a:spcBef>
+                <a:spcPts val="0"/>
+              </a:spcBef>
+              <a:spcAft>
+                <a:spcPts val="0"/>
+              </a:spcAft>
+              <a:buSzPts val="1200"/>
+              <a:buChar char="○"/>
+              <a:defRPr sz="1200"/>
+            </a:lvl5pPr>
+            <a:lvl6pPr indent="-304800" lvl="5" marL="2743200">
+              <a:spcBef>
+                <a:spcPts val="0"/>
+              </a:spcBef>
+              <a:spcAft>
+                <a:spcPts val="0"/>
+              </a:spcAft>
+              <a:buSzPts val="1200"/>
+              <a:buChar char="■"/>
+              <a:defRPr sz="1200"/>
+            </a:lvl6pPr>
+            <a:lvl7pPr indent="-304800" lvl="6" marL="3200400">
+              <a:spcBef>
+                <a:spcPts val="0"/>
+              </a:spcBef>
+              <a:spcAft>
+                <a:spcPts val="0"/>
+              </a:spcAft>
+              <a:buSzPts val="1200"/>
+              <a:buChar char="●"/>
+              <a:defRPr sz="1200"/>
+            </a:lvl7pPr>
+            <a:lvl8pPr indent="-304800" lvl="7" marL="3657600">
+              <a:spcBef>
+                <a:spcPts val="0"/>
+              </a:spcBef>
+              <a:spcAft>
+                <a:spcPts val="0"/>
+              </a:spcAft>
+              <a:buSzPts val="1200"/>
+              <a:buChar char="○"/>
+              <a:defRPr sz="1200"/>
+            </a:lvl8pPr>
+            <a:lvl9pPr indent="-304800" lvl="8" marL="4114800">
+              <a:spcBef>
+                <a:spcPts val="0"/>
+              </a:spcBef>
+              <a:spcAft>
+                <a:spcPts val="0"/>
+              </a:spcAft>
+              <a:buSzPts val="1200"/>
+              <a:buChar char="■"/>
+              <a:defRPr sz="1200"/>
+            </a:lvl9pPr>
+          </a:lstStyle>
+          <a:p/>
+        </p:txBody>
+      </p:sp>
+      <p:sp>
+        <p:nvSpPr>
+          <p:cNvPr id="68" name="Google Shape;68;p17"/>
+          <p:cNvSpPr txBox="1"/>
+          <p:nvPr>
+            <p:ph idx="2" type="body"/>
+          </p:nvPr>
+        </p:nvSpPr>
+        <p:spPr>
+          <a:xfrm>
+            <a:off x="4832400" y="1152475"/>
+            <a:ext cx="3999900" cy="3416400"/>
+          </a:xfrm>
+          <a:prstGeom prst="rect">
+            <a:avLst/>
+          </a:prstGeom>
+        </p:spPr>
+        <p:txBody>
+          <a:bodyPr anchorCtr="0" anchor="t" bIns="91425" lIns="91425" spcFirstLastPara="1" rIns="91425" wrap="square" tIns="91425">
+            <a:normAutofit/>
+          </a:bodyPr>
+          <a:lstStyle>
+            <a:lvl1pPr indent="-317500" lvl="0" marL="457200">
+              <a:spcBef>
+                <a:spcPts val="0"/>
+              </a:spcBef>
+              <a:spcAft>
+                <a:spcPts val="0"/>
+              </a:spcAft>
+              <a:buSzPts val="1400"/>
+              <a:buChar char="●"/>
+              <a:defRPr sz="1400"/>
+            </a:lvl1pPr>
+            <a:lvl2pPr indent="-304800" lvl="1" marL="914400">
+              <a:spcBef>
+                <a:spcPts val="0"/>
+              </a:spcBef>
+              <a:spcAft>
+                <a:spcPts val="0"/>
+              </a:spcAft>
+              <a:buSzPts val="1200"/>
+              <a:buChar char="○"/>
+              <a:defRPr sz="1200"/>
+            </a:lvl2pPr>
+            <a:lvl3pPr indent="-304800" lvl="2" marL="1371600">
+              <a:spcBef>
+                <a:spcPts val="0"/>
+              </a:spcBef>
+              <a:spcAft>
+                <a:spcPts val="0"/>
+              </a:spcAft>
+              <a:buSzPts val="1200"/>
+              <a:buChar char="■"/>
+              <a:defRPr sz="1200"/>
+            </a:lvl3pPr>
+            <a:lvl4pPr indent="-304800" lvl="3" marL="1828800">
+              <a:spcBef>
+                <a:spcPts val="0"/>
+              </a:spcBef>
+              <a:spcAft>
+                <a:spcPts val="0"/>
+              </a:spcAft>
+              <a:buSzPts val="1200"/>
+              <a:buChar char="●"/>
+              <a:defRPr sz="1200"/>
+            </a:lvl4pPr>
+            <a:lvl5pPr indent="-304800" lvl="4" marL="2286000">
+              <a:spcBef>
+                <a:spcPts val="0"/>
+              </a:spcBef>
+              <a:spcAft>
+                <a:spcPts val="0"/>
+              </a:spcAft>
+              <a:buSzPts val="1200"/>
+              <a:buChar char="○"/>
+              <a:defRPr sz="1200"/>
+            </a:lvl5pPr>
+            <a:lvl6pPr indent="-304800" lvl="5" marL="2743200">
+              <a:spcBef>
+                <a:spcPts val="0"/>
+              </a:spcBef>
+              <a:spcAft>
+                <a:spcPts val="0"/>
+              </a:spcAft>
+              <a:buSzPts val="1200"/>
+              <a:buChar char="■"/>
+              <a:defRPr sz="1200"/>
+            </a:lvl6pPr>
+            <a:lvl7pPr indent="-304800" lvl="6" marL="3200400">
+              <a:spcBef>
+                <a:spcPts val="0"/>
+              </a:spcBef>
+              <a:spcAft>
+                <a:spcPts val="0"/>
+              </a:spcAft>
+              <a:buSzPts val="1200"/>
+              <a:buChar char="●"/>
+              <a:defRPr sz="1200"/>
+            </a:lvl7pPr>
+            <a:lvl8pPr indent="-304800" lvl="7" marL="3657600">
+              <a:spcBef>
+                <a:spcPts val="0"/>
+              </a:spcBef>
+              <a:spcAft>
+                <a:spcPts val="0"/>
+              </a:spcAft>
+              <a:buSzPts val="1200"/>
+              <a:buChar char="○"/>
+              <a:defRPr sz="1200"/>
+            </a:lvl8pPr>
+            <a:lvl9pPr indent="-304800" lvl="8" marL="4114800">
+              <a:spcBef>
+                <a:spcPts val="0"/>
+              </a:spcBef>
+              <a:spcAft>
+                <a:spcPts val="0"/>
+              </a:spcAft>
+              <a:buSzPts val="1200"/>
+              <a:buChar char="■"/>
+              <a:defRPr sz="1200"/>
+            </a:lvl9pPr>
+          </a:lstStyle>
+          <a:p/>
+        </p:txBody>
+      </p:sp>
+      <p:sp>
+        <p:nvSpPr>
+          <p:cNvPr id="69" name="Google Shape;69;p17"/>
+          <p:cNvSpPr txBox="1"/>
+          <p:nvPr>
+            <p:ph idx="12" type="sldNum"/>
+          </p:nvPr>
+        </p:nvSpPr>
+        <p:spPr>
+          <a:xfrm>
+            <a:off x="8472458" y="4663217"/>
+            <a:ext cx="548700" cy="393600"/>
+          </a:xfrm>
+          <a:prstGeom prst="rect">
+            <a:avLst/>
+          </a:prstGeom>
+        </p:spPr>
+        <p:txBody>
+          <a:bodyPr anchorCtr="0" anchor="ctr" bIns="91425" lIns="91425" spcFirstLastPara="1" rIns="91425" wrap="square" tIns="91425">
+            <a:normAutofit/>
+          </a:bodyPr>
+          <a:lstStyle>
+            <a:lvl1pPr lvl="0">
+              <a:buNone/>
+              <a:defRPr/>
+            </a:lvl1pPr>
+            <a:lvl2pPr lvl="1">
+              <a:buNone/>
+              <a:defRPr/>
+            </a:lvl2pPr>
+            <a:lvl3pPr lvl="2">
+              <a:buNone/>
+              <a:defRPr/>
+            </a:lvl3pPr>
+            <a:lvl4pPr lvl="3">
+              <a:buNone/>
+              <a:defRPr/>
+            </a:lvl4pPr>
+            <a:lvl5pPr lvl="4">
+              <a:buNone/>
+              <a:defRPr/>
+            </a:lvl5pPr>
+            <a:lvl6pPr lvl="5">
+              <a:buNone/>
+              <a:defRPr/>
+            </a:lvl6pPr>
+            <a:lvl7pPr lvl="6">
+              <a:buNone/>
+              <a:defRPr/>
+            </a:lvl7pPr>
+            <a:lvl8pPr lvl="7">
+              <a:buNone/>
+              <a:defRPr/>
+            </a:lvl8pPr>
+            <a:lvl9pPr lvl="8">
+              <a:buNone/>
+              <a:defRPr/>
+            </a:lvl9pPr>
+          </a:lstStyle>
+          <a:p>
+            <a:pPr indent="0" lvl="0" marL="0" rtl="0" algn="r">
+              <a:spcBef>
+                <a:spcPts val="0"/>
+              </a:spcBef>
+              <a:spcAft>
+                <a:spcPts val="0"/>
+              </a:spcAft>
+              <a:buNone/>
+            </a:pPr>
+            <a:fld id="{00000000-1234-1234-1234-123412341234}" type="slidenum">
+              <a:rPr lang="es"/>
+              <a:t>‹#›</a:t>
+            </a:fld>
+            <a:endParaRPr/>
+          </a:p>
+        </p:txBody>
+      </p:sp>
+    </p:spTree>
+  </p:cSld>
+  <p:clrMapOvr>
+    <a:masterClrMapping/>
+  </p:clrMapOvr>
+</p:sldLayout>
+</file>
+
+<file path=ppt/slideLayouts/slideLayout16.xml><?xml version="1.0" encoding="utf-8"?>
+<p:sldLayout xmlns:a="http://schemas.openxmlformats.org/drawingml/2006/main" xmlns:r="http://schemas.openxmlformats.org/officeDocument/2006/relationships" xmlns:mc="http://schemas.openxmlformats.org/markup-compatibility/2006" xmlns:mv="urn:schemas-microsoft-com:mac:vml" xmlns:p="http://schemas.openxmlformats.org/presentationml/2006/main" xmlns:c="http://schemas.openxmlformats.org/drawingml/2006/chart" xmlns:dgm="http://schemas.openxmlformats.org/drawingml/2006/diagram" xmlns:o="urn:schemas-microsoft-com:office:office" xmlns:v="urn:schemas-microsoft-com:vml" xmlns:pvml="urn:schemas-microsoft-com:office:powerpoint" xmlns:com="http://schemas.openxmlformats.org/drawingml/2006/compatibility" xmlns:p14="http://schemas.microsoft.com/office/powerpoint/2010/main" xmlns:p15="http://schemas.microsoft.com/office/powerpoint/2012/main" xmlns:ahyp="http://schemas.microsoft.com/office/drawing/2018/hyperlinkcolor" matchingName="Title only" type="titleOnly">
+  <p:cSld name="TITLE_ONLY">
+    <p:spTree>
+      <p:nvGrpSpPr>
+        <p:cNvPr id="70" name="Shape 70"/>
+        <p:cNvGrpSpPr/>
+        <p:nvPr/>
+      </p:nvGrpSpPr>
+      <p:grpSpPr>
+        <a:xfrm>
+          <a:off x="0" y="0"/>
+          <a:ext cx="0" cy="0"/>
+          <a:chOff x="0" y="0"/>
+          <a:chExt cx="0" cy="0"/>
+        </a:xfrm>
+      </p:grpSpPr>
+      <p:sp>
+        <p:nvSpPr>
+          <p:cNvPr id="71" name="Google Shape;71;p18"/>
+          <p:cNvSpPr txBox="1"/>
+          <p:nvPr>
+            <p:ph type="title"/>
+          </p:nvPr>
+        </p:nvSpPr>
+        <p:spPr>
+          <a:xfrm>
+            <a:off x="311700" y="445025"/>
+            <a:ext cx="8520600" cy="572700"/>
+          </a:xfrm>
+          <a:prstGeom prst="rect">
+            <a:avLst/>
+          </a:prstGeom>
+        </p:spPr>
+        <p:txBody>
+          <a:bodyPr anchorCtr="0" anchor="t" bIns="91425" lIns="91425" spcFirstLastPara="1" rIns="91425" wrap="square" tIns="91425">
+            <a:normAutofit/>
+          </a:bodyPr>
+          <a:lstStyle>
+            <a:lvl1pPr lvl="0">
+              <a:spcBef>
+                <a:spcPts val="0"/>
+              </a:spcBef>
+              <a:spcAft>
+                <a:spcPts val="0"/>
+              </a:spcAft>
+              <a:buSzPts val="2800"/>
+              <a:buNone/>
+              <a:defRPr/>
+            </a:lvl1pPr>
+            <a:lvl2pPr lvl="1">
+              <a:spcBef>
+                <a:spcPts val="0"/>
+              </a:spcBef>
+              <a:spcAft>
+                <a:spcPts val="0"/>
+              </a:spcAft>
+              <a:buSzPts val="2800"/>
+              <a:buNone/>
+              <a:defRPr/>
+            </a:lvl2pPr>
+            <a:lvl3pPr lvl="2">
+              <a:spcBef>
+                <a:spcPts val="0"/>
+              </a:spcBef>
+              <a:spcAft>
+                <a:spcPts val="0"/>
+              </a:spcAft>
+              <a:buSzPts val="2800"/>
+              <a:buNone/>
+              <a:defRPr/>
+            </a:lvl3pPr>
+            <a:lvl4pPr lvl="3">
+              <a:spcBef>
+                <a:spcPts val="0"/>
+              </a:spcBef>
+              <a:spcAft>
+                <a:spcPts val="0"/>
+              </a:spcAft>
+              <a:buSzPts val="2800"/>
+              <a:buNone/>
+              <a:defRPr/>
+            </a:lvl4pPr>
+            <a:lvl5pPr lvl="4">
+              <a:spcBef>
+                <a:spcPts val="0"/>
+              </a:spcBef>
+              <a:spcAft>
+                <a:spcPts val="0"/>
+              </a:spcAft>
+              <a:buSzPts val="2800"/>
+              <a:buNone/>
+              <a:defRPr/>
+            </a:lvl5pPr>
+            <a:lvl6pPr lvl="5">
+              <a:spcBef>
+                <a:spcPts val="0"/>
+              </a:spcBef>
+              <a:spcAft>
+                <a:spcPts val="0"/>
+              </a:spcAft>
+              <a:buSzPts val="2800"/>
+              <a:buNone/>
+              <a:defRPr/>
+            </a:lvl6pPr>
+            <a:lvl7pPr lvl="6">
+              <a:spcBef>
+                <a:spcPts val="0"/>
+              </a:spcBef>
+              <a:spcAft>
+                <a:spcPts val="0"/>
+              </a:spcAft>
+              <a:buSzPts val="2800"/>
+              <a:buNone/>
+              <a:defRPr/>
+            </a:lvl7pPr>
+            <a:lvl8pPr lvl="7">
+              <a:spcBef>
+                <a:spcPts val="0"/>
+              </a:spcBef>
+              <a:spcAft>
+                <a:spcPts val="0"/>
+              </a:spcAft>
+              <a:buSzPts val="2800"/>
+              <a:buNone/>
+              <a:defRPr/>
+            </a:lvl8pPr>
+            <a:lvl9pPr lvl="8">
+              <a:spcBef>
+                <a:spcPts val="0"/>
+              </a:spcBef>
+              <a:spcAft>
+                <a:spcPts val="0"/>
+              </a:spcAft>
+              <a:buSzPts val="2800"/>
+              <a:buNone/>
+              <a:defRPr/>
+            </a:lvl9pPr>
+          </a:lstStyle>
+          <a:p/>
+        </p:txBody>
+      </p:sp>
+      <p:sp>
+        <p:nvSpPr>
+          <p:cNvPr id="72" name="Google Shape;72;p18"/>
+          <p:cNvSpPr txBox="1"/>
+          <p:nvPr>
+            <p:ph idx="12" type="sldNum"/>
+          </p:nvPr>
+        </p:nvSpPr>
+        <p:spPr>
+          <a:xfrm>
+            <a:off x="8472458" y="4663217"/>
+            <a:ext cx="548700" cy="393600"/>
+          </a:xfrm>
+          <a:prstGeom prst="rect">
+            <a:avLst/>
+          </a:prstGeom>
+        </p:spPr>
+        <p:txBody>
+          <a:bodyPr anchorCtr="0" anchor="ctr" bIns="91425" lIns="91425" spcFirstLastPara="1" rIns="91425" wrap="square" tIns="91425">
+            <a:normAutofit/>
+          </a:bodyPr>
+          <a:lstStyle>
+            <a:lvl1pPr lvl="0">
+              <a:buNone/>
+              <a:defRPr/>
+            </a:lvl1pPr>
+            <a:lvl2pPr lvl="1">
+              <a:buNone/>
+              <a:defRPr/>
+            </a:lvl2pPr>
+            <a:lvl3pPr lvl="2">
+              <a:buNone/>
+              <a:defRPr/>
+            </a:lvl3pPr>
+            <a:lvl4pPr lvl="3">
+              <a:buNone/>
+              <a:defRPr/>
+            </a:lvl4pPr>
+            <a:lvl5pPr lvl="4">
+              <a:buNone/>
+              <a:defRPr/>
+            </a:lvl5pPr>
+            <a:lvl6pPr lvl="5">
+              <a:buNone/>
+              <a:defRPr/>
+            </a:lvl6pPr>
+            <a:lvl7pPr lvl="6">
+              <a:buNone/>
+              <a:defRPr/>
+            </a:lvl7pPr>
+            <a:lvl8pPr lvl="7">
+              <a:buNone/>
+              <a:defRPr/>
+            </a:lvl8pPr>
+            <a:lvl9pPr lvl="8">
+              <a:buNone/>
+              <a:defRPr/>
+            </a:lvl9pPr>
+          </a:lstStyle>
+          <a:p>
+            <a:pPr indent="0" lvl="0" marL="0" rtl="0" algn="r">
+              <a:spcBef>
+                <a:spcPts val="0"/>
+              </a:spcBef>
+              <a:spcAft>
+                <a:spcPts val="0"/>
+              </a:spcAft>
+              <a:buNone/>
+            </a:pPr>
+            <a:fld id="{00000000-1234-1234-1234-123412341234}" type="slidenum">
+              <a:rPr lang="es"/>
+              <a:t>‹#›</a:t>
+            </a:fld>
+            <a:endParaRPr/>
+          </a:p>
+        </p:txBody>
+      </p:sp>
+    </p:spTree>
+  </p:cSld>
+  <p:clrMapOvr>
+    <a:masterClrMapping/>
+  </p:clrMapOvr>
+</p:sldLayout>
+</file>
+
+<file path=ppt/slideLayouts/slideLayout17.xml><?xml version="1.0" encoding="utf-8"?>
+<p:sldLayout xmlns:a="http://schemas.openxmlformats.org/drawingml/2006/main" xmlns:r="http://schemas.openxmlformats.org/officeDocument/2006/relationships" xmlns:mc="http://schemas.openxmlformats.org/markup-compatibility/2006" xmlns:mv="urn:schemas-microsoft-com:mac:vml" xmlns:p="http://schemas.openxmlformats.org/presentationml/2006/main" xmlns:c="http://schemas.openxmlformats.org/drawingml/2006/chart" xmlns:dgm="http://schemas.openxmlformats.org/drawingml/2006/diagram" xmlns:o="urn:schemas-microsoft-com:office:office" xmlns:v="urn:schemas-microsoft-com:vml" xmlns:pvml="urn:schemas-microsoft-com:office:powerpoint" xmlns:com="http://schemas.openxmlformats.org/drawingml/2006/compatibility" xmlns:p14="http://schemas.microsoft.com/office/powerpoint/2010/main" xmlns:p15="http://schemas.microsoft.com/office/powerpoint/2012/main" xmlns:ahyp="http://schemas.microsoft.com/office/drawing/2018/hyperlinkcolor" matchingName="One column text">
+  <p:cSld name="ONE_COLUMN_TEXT">
+    <p:spTree>
+      <p:nvGrpSpPr>
+        <p:cNvPr id="73" name="Shape 73"/>
+        <p:cNvGrpSpPr/>
+        <p:nvPr/>
+      </p:nvGrpSpPr>
+      <p:grpSpPr>
+        <a:xfrm>
+          <a:off x="0" y="0"/>
+          <a:ext cx="0" cy="0"/>
+          <a:chOff x="0" y="0"/>
+          <a:chExt cx="0" cy="0"/>
+        </a:xfrm>
+      </p:grpSpPr>
+      <p:sp>
+        <p:nvSpPr>
+          <p:cNvPr id="74" name="Google Shape;74;p19"/>
+          <p:cNvSpPr txBox="1"/>
+          <p:nvPr>
+            <p:ph type="title"/>
+          </p:nvPr>
+        </p:nvSpPr>
+        <p:spPr>
+          <a:xfrm>
+            <a:off x="311700" y="555600"/>
+            <a:ext cx="2808000" cy="755700"/>
+          </a:xfrm>
+          <a:prstGeom prst="rect">
+            <a:avLst/>
+          </a:prstGeom>
+        </p:spPr>
+        <p:txBody>
+          <a:bodyPr anchorCtr="0" anchor="b" bIns="91425" lIns="91425" spcFirstLastPara="1" rIns="91425" wrap="square" tIns="91425">
+            <a:normAutofit/>
+          </a:bodyPr>
+          <a:lstStyle>
+            <a:lvl1pPr lvl="0">
+              <a:spcBef>
+                <a:spcPts val="0"/>
+              </a:spcBef>
+              <a:spcAft>
+                <a:spcPts val="0"/>
+              </a:spcAft>
+              <a:buSzPts val="2400"/>
+              <a:buNone/>
+              <a:defRPr sz="2400"/>
+            </a:lvl1pPr>
+            <a:lvl2pPr lvl="1">
+              <a:spcBef>
+                <a:spcPts val="0"/>
+              </a:spcBef>
+              <a:spcAft>
+                <a:spcPts val="0"/>
+              </a:spcAft>
+              <a:buSzPts val="2400"/>
+              <a:buNone/>
+              <a:defRPr sz="2400"/>
+            </a:lvl2pPr>
+            <a:lvl3pPr lvl="2">
+              <a:spcBef>
+                <a:spcPts val="0"/>
+              </a:spcBef>
+              <a:spcAft>
+                <a:spcPts val="0"/>
+              </a:spcAft>
+              <a:buSzPts val="2400"/>
+              <a:buNone/>
+              <a:defRPr sz="2400"/>
+            </a:lvl3pPr>
+            <a:lvl4pPr lvl="3">
+              <a:spcBef>
+                <a:spcPts val="0"/>
+              </a:spcBef>
+              <a:spcAft>
+                <a:spcPts val="0"/>
+              </a:spcAft>
+              <a:buSzPts val="2400"/>
+              <a:buNone/>
+              <a:defRPr sz="2400"/>
+            </a:lvl4pPr>
+            <a:lvl5pPr lvl="4">
+              <a:spcBef>
+                <a:spcPts val="0"/>
+              </a:spcBef>
+              <a:spcAft>
+                <a:spcPts val="0"/>
+              </a:spcAft>
+              <a:buSzPts val="2400"/>
+              <a:buNone/>
+              <a:defRPr sz="2400"/>
+            </a:lvl5pPr>
+            <a:lvl6pPr lvl="5">
+              <a:spcBef>
+                <a:spcPts val="0"/>
+              </a:spcBef>
+              <a:spcAft>
+                <a:spcPts val="0"/>
+              </a:spcAft>
+              <a:buSzPts val="2400"/>
+              <a:buNone/>
+              <a:defRPr sz="2400"/>
+            </a:lvl6pPr>
+            <a:lvl7pPr lvl="6">
+              <a:spcBef>
+                <a:spcPts val="0"/>
+              </a:spcBef>
+              <a:spcAft>
+                <a:spcPts val="0"/>
+              </a:spcAft>
+              <a:buSzPts val="2400"/>
+              <a:buNone/>
+              <a:defRPr sz="2400"/>
+            </a:lvl7pPr>
+            <a:lvl8pPr lvl="7">
+              <a:spcBef>
+                <a:spcPts val="0"/>
+              </a:spcBef>
+              <a:spcAft>
+                <a:spcPts val="0"/>
+              </a:spcAft>
+              <a:buSzPts val="2400"/>
+              <a:buNone/>
+              <a:defRPr sz="2400"/>
+            </a:lvl8pPr>
+            <a:lvl9pPr lvl="8">
+              <a:spcBef>
+                <a:spcPts val="0"/>
+              </a:spcBef>
+              <a:spcAft>
+                <a:spcPts val="0"/>
+              </a:spcAft>
+              <a:buSzPts val="2400"/>
+              <a:buNone/>
+              <a:defRPr sz="2400"/>
+            </a:lvl9pPr>
+          </a:lstStyle>
+          <a:p/>
+        </p:txBody>
+      </p:sp>
+      <p:sp>
+        <p:nvSpPr>
+          <p:cNvPr id="75" name="Google Shape;75;p19"/>
+          <p:cNvSpPr txBox="1"/>
+          <p:nvPr>
+            <p:ph idx="1" type="body"/>
+          </p:nvPr>
+        </p:nvSpPr>
+        <p:spPr>
+          <a:xfrm>
+            <a:off x="311700" y="1389600"/>
+            <a:ext cx="2808000" cy="3179400"/>
+          </a:xfrm>
+          <a:prstGeom prst="rect">
+            <a:avLst/>
+          </a:prstGeom>
+        </p:spPr>
+        <p:txBody>
+          <a:bodyPr anchorCtr="0" anchor="t" bIns="91425" lIns="91425" spcFirstLastPara="1" rIns="91425" wrap="square" tIns="91425">
+            <a:normAutofit/>
+          </a:bodyPr>
+          <a:lstStyle>
+            <a:lvl1pPr indent="-304800" lvl="0" marL="457200">
+              <a:spcBef>
+                <a:spcPts val="0"/>
+              </a:spcBef>
+              <a:spcAft>
+                <a:spcPts val="0"/>
+              </a:spcAft>
+              <a:buSzPts val="1200"/>
+              <a:buChar char="●"/>
+              <a:defRPr sz="1200"/>
+            </a:lvl1pPr>
+            <a:lvl2pPr indent="-304800" lvl="1" marL="914400">
+              <a:spcBef>
+                <a:spcPts val="0"/>
+              </a:spcBef>
+              <a:spcAft>
+                <a:spcPts val="0"/>
+              </a:spcAft>
+              <a:buSzPts val="1200"/>
+              <a:buChar char="○"/>
+              <a:defRPr sz="1200"/>
+            </a:lvl2pPr>
+            <a:lvl3pPr indent="-304800" lvl="2" marL="1371600">
+              <a:spcBef>
+                <a:spcPts val="0"/>
+              </a:spcBef>
+              <a:spcAft>
+                <a:spcPts val="0"/>
+              </a:spcAft>
+              <a:buSzPts val="1200"/>
+              <a:buChar char="■"/>
+              <a:defRPr sz="1200"/>
+            </a:lvl3pPr>
+            <a:lvl4pPr indent="-304800" lvl="3" marL="1828800">
+              <a:spcBef>
+                <a:spcPts val="0"/>
+              </a:spcBef>
+              <a:spcAft>
+                <a:spcPts val="0"/>
+              </a:spcAft>
+              <a:buSzPts val="1200"/>
+              <a:buChar char="●"/>
+              <a:defRPr sz="1200"/>
+            </a:lvl4pPr>
+            <a:lvl5pPr indent="-304800" lvl="4" marL="2286000">
+              <a:spcBef>
+                <a:spcPts val="0"/>
+              </a:spcBef>
+              <a:spcAft>
+                <a:spcPts val="0"/>
+              </a:spcAft>
+              <a:buSzPts val="1200"/>
+              <a:buChar char="○"/>
+              <a:defRPr sz="1200"/>
+            </a:lvl5pPr>
+            <a:lvl6pPr indent="-304800" lvl="5" marL="2743200">
+              <a:spcBef>
+                <a:spcPts val="0"/>
+              </a:spcBef>
+              <a:spcAft>
+                <a:spcPts val="0"/>
+              </a:spcAft>
+              <a:buSzPts val="1200"/>
+              <a:buChar char="■"/>
+              <a:defRPr sz="1200"/>
+            </a:lvl6pPr>
+            <a:lvl7pPr indent="-304800" lvl="6" marL="3200400">
+              <a:spcBef>
+                <a:spcPts val="0"/>
+              </a:spcBef>
+              <a:spcAft>
+                <a:spcPts val="0"/>
+              </a:spcAft>
+              <a:buSzPts val="1200"/>
+              <a:buChar char="●"/>
+              <a:defRPr sz="1200"/>
+            </a:lvl7pPr>
+            <a:lvl8pPr indent="-304800" lvl="7" marL="3657600">
+              <a:spcBef>
+                <a:spcPts val="0"/>
+              </a:spcBef>
+              <a:spcAft>
+                <a:spcPts val="0"/>
+              </a:spcAft>
+              <a:buSzPts val="1200"/>
+              <a:buChar char="○"/>
+              <a:defRPr sz="1200"/>
+            </a:lvl8pPr>
+            <a:lvl9pPr indent="-304800" lvl="8" marL="4114800">
+              <a:spcBef>
+                <a:spcPts val="0"/>
+              </a:spcBef>
+              <a:spcAft>
+                <a:spcPts val="0"/>
+              </a:spcAft>
+              <a:buSzPts val="1200"/>
+              <a:buChar char="■"/>
+              <a:defRPr sz="1200"/>
+            </a:lvl9pPr>
+          </a:lstStyle>
+          <a:p/>
+        </p:txBody>
+      </p:sp>
+      <p:sp>
+        <p:nvSpPr>
+          <p:cNvPr id="76" name="Google Shape;76;p19"/>
+          <p:cNvSpPr txBox="1"/>
+          <p:nvPr>
+            <p:ph idx="12" type="sldNum"/>
+          </p:nvPr>
+        </p:nvSpPr>
+        <p:spPr>
+          <a:xfrm>
+            <a:off x="8472458" y="4663217"/>
+            <a:ext cx="548700" cy="393600"/>
+          </a:xfrm>
+          <a:prstGeom prst="rect">
+            <a:avLst/>
+          </a:prstGeom>
+        </p:spPr>
+        <p:txBody>
+          <a:bodyPr anchorCtr="0" anchor="ctr" bIns="91425" lIns="91425" spcFirstLastPara="1" rIns="91425" wrap="square" tIns="91425">
+            <a:normAutofit/>
+          </a:bodyPr>
+          <a:lstStyle>
+            <a:lvl1pPr lvl="0">
+              <a:buNone/>
+              <a:defRPr/>
+            </a:lvl1pPr>
+            <a:lvl2pPr lvl="1">
+              <a:buNone/>
+              <a:defRPr/>
+            </a:lvl2pPr>
+            <a:lvl3pPr lvl="2">
+              <a:buNone/>
+              <a:defRPr/>
+            </a:lvl3pPr>
+            <a:lvl4pPr lvl="3">
+              <a:buNone/>
+              <a:defRPr/>
+            </a:lvl4pPr>
+            <a:lvl5pPr lvl="4">
+              <a:buNone/>
+              <a:defRPr/>
+            </a:lvl5pPr>
+            <a:lvl6pPr lvl="5">
+              <a:buNone/>
+              <a:defRPr/>
+            </a:lvl6pPr>
+            <a:lvl7pPr lvl="6">
+              <a:buNone/>
+              <a:defRPr/>
+            </a:lvl7pPr>
+            <a:lvl8pPr lvl="7">
+              <a:buNone/>
+              <a:defRPr/>
+            </a:lvl8pPr>
+            <a:lvl9pPr lvl="8">
+              <a:buNone/>
+              <a:defRPr/>
+            </a:lvl9pPr>
+          </a:lstStyle>
+          <a:p>
+            <a:pPr indent="0" lvl="0" marL="0" rtl="0" algn="r">
+              <a:spcBef>
+                <a:spcPts val="0"/>
+              </a:spcBef>
+              <a:spcAft>
+                <a:spcPts val="0"/>
+              </a:spcAft>
+              <a:buNone/>
+            </a:pPr>
+            <a:fld id="{00000000-1234-1234-1234-123412341234}" type="slidenum">
+              <a:rPr lang="es"/>
+              <a:t>‹#›</a:t>
+            </a:fld>
+            <a:endParaRPr/>
+          </a:p>
+        </p:txBody>
+      </p:sp>
+    </p:spTree>
+  </p:cSld>
+  <p:clrMapOvr>
+    <a:masterClrMapping/>
+  </p:clrMapOvr>
+</p:sldLayout>
+</file>
+
+<file path=ppt/slideLayouts/slideLayout18.xml><?xml version="1.0" encoding="utf-8"?>
+<p:sldLayout xmlns:a="http://schemas.openxmlformats.org/drawingml/2006/main" xmlns:r="http://schemas.openxmlformats.org/officeDocument/2006/relationships" xmlns:mc="http://schemas.openxmlformats.org/markup-compatibility/2006" xmlns:mv="urn:schemas-microsoft-com:mac:vml" xmlns:p="http://schemas.openxmlformats.org/presentationml/2006/main" xmlns:c="http://schemas.openxmlformats.org/drawingml/2006/chart" xmlns:dgm="http://schemas.openxmlformats.org/drawingml/2006/diagram" xmlns:o="urn:schemas-microsoft-com:office:office" xmlns:v="urn:schemas-microsoft-com:vml" xmlns:pvml="urn:schemas-microsoft-com:office:powerpoint" xmlns:com="http://schemas.openxmlformats.org/drawingml/2006/compatibility" xmlns:p14="http://schemas.microsoft.com/office/powerpoint/2010/main" xmlns:p15="http://schemas.microsoft.com/office/powerpoint/2012/main" xmlns:ahyp="http://schemas.microsoft.com/office/drawing/2018/hyperlinkcolor" matchingName="Main point">
+  <p:cSld name="MAIN_POINT">
+    <p:spTree>
+      <p:nvGrpSpPr>
+        <p:cNvPr id="77" name="Shape 77"/>
+        <p:cNvGrpSpPr/>
+        <p:nvPr/>
+      </p:nvGrpSpPr>
+      <p:grpSpPr>
+        <a:xfrm>
+          <a:off x="0" y="0"/>
+          <a:ext cx="0" cy="0"/>
+          <a:chOff x="0" y="0"/>
+          <a:chExt cx="0" cy="0"/>
+        </a:xfrm>
+      </p:grpSpPr>
+      <p:sp>
+        <p:nvSpPr>
+          <p:cNvPr id="78" name="Google Shape;78;p20"/>
+          <p:cNvSpPr txBox="1"/>
+          <p:nvPr>
+            <p:ph type="title"/>
+          </p:nvPr>
+        </p:nvSpPr>
+        <p:spPr>
+          <a:xfrm>
+            <a:off x="490250" y="450150"/>
+            <a:ext cx="6367800" cy="4090800"/>
+          </a:xfrm>
+          <a:prstGeom prst="rect">
+            <a:avLst/>
+          </a:prstGeom>
+        </p:spPr>
+        <p:txBody>
+          <a:bodyPr anchorCtr="0" anchor="ctr" bIns="91425" lIns="91425" spcFirstLastPara="1" rIns="91425" wrap="square" tIns="91425">
+            <a:normAutofit/>
+          </a:bodyPr>
+          <a:lstStyle>
+            <a:lvl1pPr lvl="0">
+              <a:spcBef>
+                <a:spcPts val="0"/>
+              </a:spcBef>
+              <a:spcAft>
+                <a:spcPts val="0"/>
+              </a:spcAft>
+              <a:buSzPts val="4800"/>
+              <a:buNone/>
+              <a:defRPr sz="4800"/>
+            </a:lvl1pPr>
+            <a:lvl2pPr lvl="1">
+              <a:spcBef>
+                <a:spcPts val="0"/>
+              </a:spcBef>
+              <a:spcAft>
+                <a:spcPts val="0"/>
+              </a:spcAft>
+              <a:buSzPts val="4800"/>
+              <a:buNone/>
+              <a:defRPr sz="4800"/>
+            </a:lvl2pPr>
+            <a:lvl3pPr lvl="2">
+              <a:spcBef>
+                <a:spcPts val="0"/>
+              </a:spcBef>
+              <a:spcAft>
+                <a:spcPts val="0"/>
+              </a:spcAft>
+              <a:buSzPts val="4800"/>
+              <a:buNone/>
+              <a:defRPr sz="4800"/>
+            </a:lvl3pPr>
+            <a:lvl4pPr lvl="3">
+              <a:spcBef>
+                <a:spcPts val="0"/>
+              </a:spcBef>
+              <a:spcAft>
+                <a:spcPts val="0"/>
+              </a:spcAft>
+              <a:buSzPts val="4800"/>
+              <a:buNone/>
+              <a:defRPr sz="4800"/>
+            </a:lvl4pPr>
+            <a:lvl5pPr lvl="4">
+              <a:spcBef>
+                <a:spcPts val="0"/>
+              </a:spcBef>
+              <a:spcAft>
+                <a:spcPts val="0"/>
+              </a:spcAft>
+              <a:buSzPts val="4800"/>
+              <a:buNone/>
+              <a:defRPr sz="4800"/>
+            </a:lvl5pPr>
+            <a:lvl6pPr lvl="5">
+              <a:spcBef>
+                <a:spcPts val="0"/>
+              </a:spcBef>
+              <a:spcAft>
+                <a:spcPts val="0"/>
+              </a:spcAft>
+              <a:buSzPts val="4800"/>
+              <a:buNone/>
+              <a:defRPr sz="4800"/>
+            </a:lvl6pPr>
+            <a:lvl7pPr lvl="6">
+              <a:spcBef>
+                <a:spcPts val="0"/>
+              </a:spcBef>
+              <a:spcAft>
+                <a:spcPts val="0"/>
+              </a:spcAft>
+              <a:buSzPts val="4800"/>
+              <a:buNone/>
+              <a:defRPr sz="4800"/>
+            </a:lvl7pPr>
+            <a:lvl8pPr lvl="7">
+              <a:spcBef>
+                <a:spcPts val="0"/>
+              </a:spcBef>
+              <a:spcAft>
+                <a:spcPts val="0"/>
+              </a:spcAft>
+              <a:buSzPts val="4800"/>
+              <a:buNone/>
+              <a:defRPr sz="4800"/>
+            </a:lvl8pPr>
+            <a:lvl9pPr lvl="8">
+              <a:spcBef>
+                <a:spcPts val="0"/>
+              </a:spcBef>
+              <a:spcAft>
+                <a:spcPts val="0"/>
+              </a:spcAft>
+              <a:buSzPts val="4800"/>
+              <a:buNone/>
+              <a:defRPr sz="4800"/>
+            </a:lvl9pPr>
+          </a:lstStyle>
+          <a:p/>
+        </p:txBody>
+      </p:sp>
+      <p:sp>
+        <p:nvSpPr>
+          <p:cNvPr id="79" name="Google Shape;79;p20"/>
+          <p:cNvSpPr txBox="1"/>
+          <p:nvPr>
+            <p:ph idx="12" type="sldNum"/>
+          </p:nvPr>
+        </p:nvSpPr>
+        <p:spPr>
+          <a:xfrm>
+            <a:off x="8472458" y="4663217"/>
+            <a:ext cx="548700" cy="393600"/>
+          </a:xfrm>
+          <a:prstGeom prst="rect">
+            <a:avLst/>
+          </a:prstGeom>
+        </p:spPr>
+        <p:txBody>
+          <a:bodyPr anchorCtr="0" anchor="ctr" bIns="91425" lIns="91425" spcFirstLastPara="1" rIns="91425" wrap="square" tIns="91425">
+            <a:normAutofit/>
+          </a:bodyPr>
+          <a:lstStyle>
+            <a:lvl1pPr lvl="0">
+              <a:buNone/>
+              <a:defRPr/>
+            </a:lvl1pPr>
+            <a:lvl2pPr lvl="1">
+              <a:buNone/>
+              <a:defRPr/>
+            </a:lvl2pPr>
+            <a:lvl3pPr lvl="2">
+              <a:buNone/>
+              <a:defRPr/>
+            </a:lvl3pPr>
+            <a:lvl4pPr lvl="3">
+              <a:buNone/>
+              <a:defRPr/>
+            </a:lvl4pPr>
+            <a:lvl5pPr lvl="4">
+              <a:buNone/>
+              <a:defRPr/>
+            </a:lvl5pPr>
+            <a:lvl6pPr lvl="5">
+              <a:buNone/>
+              <a:defRPr/>
+            </a:lvl6pPr>
+            <a:lvl7pPr lvl="6">
+              <a:buNone/>
+              <a:defRPr/>
+            </a:lvl7pPr>
+            <a:lvl8pPr lvl="7">
+              <a:buNone/>
+              <a:defRPr/>
+            </a:lvl8pPr>
+            <a:lvl9pPr lvl="8">
+              <a:buNone/>
+              <a:defRPr/>
+            </a:lvl9pPr>
+          </a:lstStyle>
+          <a:p>
+            <a:pPr indent="0" lvl="0" marL="0" rtl="0" algn="r">
+              <a:spcBef>
+                <a:spcPts val="0"/>
+              </a:spcBef>
+              <a:spcAft>
+                <a:spcPts val="0"/>
+              </a:spcAft>
+              <a:buNone/>
+            </a:pPr>
+            <a:fld id="{00000000-1234-1234-1234-123412341234}" type="slidenum">
+              <a:rPr lang="es"/>
+              <a:t>‹#›</a:t>
+            </a:fld>
+            <a:endParaRPr/>
+          </a:p>
+        </p:txBody>
+      </p:sp>
+    </p:spTree>
+  </p:cSld>
+  <p:clrMapOvr>
+    <a:masterClrMapping/>
+  </p:clrMapOvr>
+</p:sldLayout>
+</file>
+
+<file path=ppt/slideLayouts/slideLayout19.xml><?xml version="1.0" encoding="utf-8"?>
+<p:sldLayout xmlns:a="http://schemas.openxmlformats.org/drawingml/2006/main" xmlns:r="http://schemas.openxmlformats.org/officeDocument/2006/relationships" xmlns:mc="http://schemas.openxmlformats.org/markup-compatibility/2006" xmlns:mv="urn:schemas-microsoft-com:mac:vml" xmlns:p="http://schemas.openxmlformats.org/presentationml/2006/main" xmlns:c="http://schemas.openxmlformats.org/drawingml/2006/chart" xmlns:dgm="http://schemas.openxmlformats.org/drawingml/2006/diagram" xmlns:o="urn:schemas-microsoft-com:office:office" xmlns:v="urn:schemas-microsoft-com:vml" xmlns:pvml="urn:schemas-microsoft-com:office:powerpoint" xmlns:com="http://schemas.openxmlformats.org/drawingml/2006/compatibility" xmlns:p14="http://schemas.microsoft.com/office/powerpoint/2010/main" xmlns:p15="http://schemas.microsoft.com/office/powerpoint/2012/main" xmlns:ahyp="http://schemas.microsoft.com/office/drawing/2018/hyperlinkcolor" matchingName="Section title and description">
+  <p:cSld name="SECTION_TITLE_AND_DESCRIPTION">
+    <p:spTree>
+      <p:nvGrpSpPr>
+        <p:cNvPr id="80" name="Shape 80"/>
+        <p:cNvGrpSpPr/>
+        <p:nvPr/>
+      </p:nvGrpSpPr>
+      <p:grpSpPr>
+        <a:xfrm>
+          <a:off x="0" y="0"/>
+          <a:ext cx="0" cy="0"/>
+          <a:chOff x="0" y="0"/>
+          <a:chExt cx="0" cy="0"/>
+        </a:xfrm>
+      </p:grpSpPr>
+      <p:sp>
+        <p:nvSpPr>
+          <p:cNvPr id="81" name="Google Shape;81;p21"/>
+          <p:cNvSpPr/>
+          <p:nvPr/>
+        </p:nvSpPr>
+        <p:spPr>
+          <a:xfrm>
+            <a:off x="4572000" y="-125"/>
+            <a:ext cx="4572000" cy="5143500"/>
+          </a:xfrm>
+          <a:prstGeom prst="rect">
+            <a:avLst/>
+          </a:prstGeom>
+          <a:solidFill>
+            <a:schemeClr val="lt2"/>
+          </a:solidFill>
+          <a:ln>
+            <a:noFill/>
+          </a:ln>
+        </p:spPr>
+        <p:txBody>
+          <a:bodyPr anchorCtr="0" anchor="ctr" bIns="91425" lIns="91425" spcFirstLastPara="1" rIns="91425" wrap="square" tIns="91425">
+            <a:noAutofit/>
+          </a:bodyPr>
+          <a:lstStyle/>
+          <a:p>
+            <a:pPr indent="0" lvl="0" marL="0" rtl="0" algn="l">
+              <a:spcBef>
+                <a:spcPts val="0"/>
+              </a:spcBef>
+              <a:spcAft>
+                <a:spcPts val="0"/>
+              </a:spcAft>
+              <a:buNone/>
+            </a:pPr>
+            <a:r>
+              <a:t/>
+            </a:r>
+            <a:endParaRPr/>
+          </a:p>
+        </p:txBody>
+      </p:sp>
+      <p:sp>
+        <p:nvSpPr>
+          <p:cNvPr id="82" name="Google Shape;82;p21"/>
+          <p:cNvSpPr txBox="1"/>
+          <p:nvPr>
+            <p:ph type="title"/>
+          </p:nvPr>
+        </p:nvSpPr>
+        <p:spPr>
+          <a:xfrm>
+            <a:off x="265500" y="1233175"/>
+            <a:ext cx="4045200" cy="1482300"/>
+          </a:xfrm>
+          <a:prstGeom prst="rect">
+            <a:avLst/>
+          </a:prstGeom>
+        </p:spPr>
+        <p:txBody>
+          <a:bodyPr anchorCtr="0" anchor="b" bIns="91425" lIns="91425" spcFirstLastPara="1" rIns="91425" wrap="square" tIns="91425">
+            <a:normAutofit/>
+          </a:bodyPr>
+          <a:lstStyle>
+            <a:lvl1pPr lvl="0" algn="ctr">
+              <a:spcBef>
+                <a:spcPts val="0"/>
+              </a:spcBef>
+              <a:spcAft>
+                <a:spcPts val="0"/>
+              </a:spcAft>
+              <a:buSzPts val="4200"/>
+              <a:buNone/>
+              <a:defRPr sz="4200"/>
+            </a:lvl1pPr>
+            <a:lvl2pPr lvl="1" algn="ctr">
+              <a:spcBef>
+                <a:spcPts val="0"/>
+              </a:spcBef>
+              <a:spcAft>
+                <a:spcPts val="0"/>
+              </a:spcAft>
+              <a:buSzPts val="4200"/>
+              <a:buNone/>
+              <a:defRPr sz="4200"/>
+            </a:lvl2pPr>
+            <a:lvl3pPr lvl="2" algn="ctr">
+              <a:spcBef>
+                <a:spcPts val="0"/>
+              </a:spcBef>
+              <a:spcAft>
+                <a:spcPts val="0"/>
+              </a:spcAft>
+              <a:buSzPts val="4200"/>
+              <a:buNone/>
+              <a:defRPr sz="4200"/>
+            </a:lvl3pPr>
+            <a:lvl4pPr lvl="3" algn="ctr">
+              <a:spcBef>
+                <a:spcPts val="0"/>
+              </a:spcBef>
+              <a:spcAft>
+                <a:spcPts val="0"/>
+              </a:spcAft>
+              <a:buSzPts val="4200"/>
+              <a:buNone/>
+              <a:defRPr sz="4200"/>
+            </a:lvl4pPr>
+            <a:lvl5pPr lvl="4" algn="ctr">
+              <a:spcBef>
+                <a:spcPts val="0"/>
+              </a:spcBef>
+              <a:spcAft>
+                <a:spcPts val="0"/>
+              </a:spcAft>
+              <a:buSzPts val="4200"/>
+              <a:buNone/>
+              <a:defRPr sz="4200"/>
+            </a:lvl5pPr>
+            <a:lvl6pPr lvl="5" algn="ctr">
+              <a:spcBef>
+                <a:spcPts val="0"/>
+              </a:spcBef>
+              <a:spcAft>
+                <a:spcPts val="0"/>
+              </a:spcAft>
+              <a:buSzPts val="4200"/>
+              <a:buNone/>
+              <a:defRPr sz="4200"/>
+            </a:lvl6pPr>
+            <a:lvl7pPr lvl="6" algn="ctr">
+              <a:spcBef>
+                <a:spcPts val="0"/>
+              </a:spcBef>
+              <a:spcAft>
+                <a:spcPts val="0"/>
+              </a:spcAft>
+              <a:buSzPts val="4200"/>
+              <a:buNone/>
+              <a:defRPr sz="4200"/>
+            </a:lvl7pPr>
+            <a:lvl8pPr lvl="7" algn="ctr">
+              <a:spcBef>
+                <a:spcPts val="0"/>
+              </a:spcBef>
+              <a:spcAft>
+                <a:spcPts val="0"/>
+              </a:spcAft>
+              <a:buSzPts val="4200"/>
+              <a:buNone/>
+              <a:defRPr sz="4200"/>
+            </a:lvl8pPr>
+            <a:lvl9pPr lvl="8" algn="ctr">
+              <a:spcBef>
+                <a:spcPts val="0"/>
+              </a:spcBef>
+              <a:spcAft>
+                <a:spcPts val="0"/>
+              </a:spcAft>
+              <a:buSzPts val="4200"/>
+              <a:buNone/>
+              <a:defRPr sz="4200"/>
+            </a:lvl9pPr>
+          </a:lstStyle>
+          <a:p/>
+        </p:txBody>
+      </p:sp>
+      <p:sp>
+        <p:nvSpPr>
+          <p:cNvPr id="83" name="Google Shape;83;p21"/>
+          <p:cNvSpPr txBox="1"/>
+          <p:nvPr>
+            <p:ph idx="1" type="subTitle"/>
+          </p:nvPr>
+        </p:nvSpPr>
+        <p:spPr>
+          <a:xfrm>
+            <a:off x="265500" y="2803075"/>
+            <a:ext cx="4045200" cy="1235100"/>
+          </a:xfrm>
+          <a:prstGeom prst="rect">
+            <a:avLst/>
+          </a:prstGeom>
+        </p:spPr>
+        <p:txBody>
+          <a:bodyPr anchorCtr="0" anchor="t" bIns="91425" lIns="91425" spcFirstLastPara="1" rIns="91425" wrap="square" tIns="91425">
+            <a:normAutofit/>
+          </a:bodyPr>
+          <a:lstStyle>
+            <a:lvl1pPr lvl="0" algn="ctr">
+              <a:lnSpc>
+                <a:spcPct val="100000"/>
+              </a:lnSpc>
+              <a:spcBef>
+                <a:spcPts val="0"/>
+              </a:spcBef>
+              <a:spcAft>
+                <a:spcPts val="0"/>
+              </a:spcAft>
+              <a:buSzPts val="2100"/>
+              <a:buNone/>
+              <a:defRPr sz="2100"/>
+            </a:lvl1pPr>
+            <a:lvl2pPr lvl="1" algn="ctr">
+              <a:lnSpc>
+                <a:spcPct val="100000"/>
+              </a:lnSpc>
+              <a:spcBef>
+                <a:spcPts val="0"/>
+              </a:spcBef>
+              <a:spcAft>
+                <a:spcPts val="0"/>
+              </a:spcAft>
+              <a:buSzPts val="2100"/>
+              <a:buNone/>
+              <a:defRPr sz="2100"/>
+            </a:lvl2pPr>
+            <a:lvl3pPr lvl="2" algn="ctr">
+              <a:lnSpc>
+                <a:spcPct val="100000"/>
+              </a:lnSpc>
+              <a:spcBef>
+                <a:spcPts val="0"/>
+              </a:spcBef>
+              <a:spcAft>
+                <a:spcPts val="0"/>
+              </a:spcAft>
+              <a:buSzPts val="2100"/>
+              <a:buNone/>
+              <a:defRPr sz="2100"/>
+            </a:lvl3pPr>
+            <a:lvl4pPr lvl="3" algn="ctr">
+              <a:lnSpc>
+                <a:spcPct val="100000"/>
+              </a:lnSpc>
+              <a:spcBef>
+                <a:spcPts val="0"/>
+              </a:spcBef>
+              <a:spcAft>
+                <a:spcPts val="0"/>
+              </a:spcAft>
+              <a:buSzPts val="2100"/>
+              <a:buNone/>
+              <a:defRPr sz="2100"/>
+            </a:lvl4pPr>
+            <a:lvl5pPr lvl="4" algn="ctr">
+              <a:lnSpc>
+                <a:spcPct val="100000"/>
+              </a:lnSpc>
+              <a:spcBef>
+                <a:spcPts val="0"/>
+              </a:spcBef>
+              <a:spcAft>
+                <a:spcPts val="0"/>
+              </a:spcAft>
+              <a:buSzPts val="2100"/>
+              <a:buNone/>
+              <a:defRPr sz="2100"/>
+            </a:lvl5pPr>
+            <a:lvl6pPr lvl="5" algn="ctr">
+              <a:lnSpc>
+                <a:spcPct val="100000"/>
+              </a:lnSpc>
+              <a:spcBef>
+                <a:spcPts val="0"/>
+              </a:spcBef>
+              <a:spcAft>
+                <a:spcPts val="0"/>
+              </a:spcAft>
+              <a:buSzPts val="2100"/>
+              <a:buNone/>
+              <a:defRPr sz="2100"/>
+            </a:lvl6pPr>
+            <a:lvl7pPr lvl="6" algn="ctr">
+              <a:lnSpc>
+                <a:spcPct val="100000"/>
+              </a:lnSpc>
+              <a:spcBef>
+                <a:spcPts val="0"/>
+              </a:spcBef>
+              <a:spcAft>
+                <a:spcPts val="0"/>
+              </a:spcAft>
+              <a:buSzPts val="2100"/>
+              <a:buNone/>
+              <a:defRPr sz="2100"/>
+            </a:lvl7pPr>
+            <a:lvl8pPr lvl="7" algn="ctr">
+              <a:lnSpc>
+                <a:spcPct val="100000"/>
+              </a:lnSpc>
+              <a:spcBef>
+                <a:spcPts val="0"/>
+              </a:spcBef>
+              <a:spcAft>
+                <a:spcPts val="0"/>
+              </a:spcAft>
+              <a:buSzPts val="2100"/>
+              <a:buNone/>
+              <a:defRPr sz="2100"/>
+            </a:lvl8pPr>
+            <a:lvl9pPr lvl="8" algn="ctr">
+              <a:lnSpc>
+                <a:spcPct val="100000"/>
+              </a:lnSpc>
+              <a:spcBef>
+                <a:spcPts val="0"/>
+              </a:spcBef>
+              <a:spcAft>
+                <a:spcPts val="0"/>
+              </a:spcAft>
+              <a:buSzPts val="2100"/>
+              <a:buNone/>
+              <a:defRPr sz="2100"/>
+            </a:lvl9pPr>
+          </a:lstStyle>
+          <a:p/>
+        </p:txBody>
+      </p:sp>
+      <p:sp>
+        <p:nvSpPr>
+          <p:cNvPr id="84" name="Google Shape;84;p21"/>
+          <p:cNvSpPr txBox="1"/>
+          <p:nvPr>
+            <p:ph idx="2" type="body"/>
+          </p:nvPr>
+        </p:nvSpPr>
+        <p:spPr>
+          <a:xfrm>
+            <a:off x="4939500" y="724075"/>
+            <a:ext cx="3837000" cy="3695100"/>
+          </a:xfrm>
+          <a:prstGeom prst="rect">
+            <a:avLst/>
+          </a:prstGeom>
+        </p:spPr>
+        <p:txBody>
+          <a:bodyPr anchorCtr="0" anchor="ctr" bIns="91425" lIns="91425" spcFirstLastPara="1" rIns="91425" wrap="square" tIns="91425">
+            <a:normAutofit/>
+          </a:bodyPr>
+          <a:lstStyle>
+            <a:lvl1pPr indent="-342900" lvl="0" marL="457200">
+              <a:spcBef>
+                <a:spcPts val="0"/>
+              </a:spcBef>
+              <a:spcAft>
+                <a:spcPts val="0"/>
+              </a:spcAft>
+              <a:buSzPts val="1800"/>
+              <a:buChar char="●"/>
+              <a:defRPr/>
+            </a:lvl1pPr>
+            <a:lvl2pPr indent="-317500" lvl="1" marL="914400">
+              <a:spcBef>
+                <a:spcPts val="0"/>
+              </a:spcBef>
+              <a:spcAft>
+                <a:spcPts val="0"/>
+              </a:spcAft>
+              <a:buSzPts val="1400"/>
+              <a:buChar char="○"/>
+              <a:defRPr/>
+            </a:lvl2pPr>
+            <a:lvl3pPr indent="-317500" lvl="2" marL="1371600">
+              <a:spcBef>
+                <a:spcPts val="0"/>
+              </a:spcBef>
+              <a:spcAft>
+                <a:spcPts val="0"/>
+              </a:spcAft>
+              <a:buSzPts val="1400"/>
+              <a:buChar char="■"/>
+              <a:defRPr/>
+            </a:lvl3pPr>
+            <a:lvl4pPr indent="-317500" lvl="3" marL="1828800">
+              <a:spcBef>
+                <a:spcPts val="0"/>
+              </a:spcBef>
+              <a:spcAft>
+                <a:spcPts val="0"/>
+              </a:spcAft>
+              <a:buSzPts val="1400"/>
+              <a:buChar char="●"/>
+              <a:defRPr/>
+            </a:lvl4pPr>
+            <a:lvl5pPr indent="-317500" lvl="4" marL="2286000">
+              <a:spcBef>
+                <a:spcPts val="0"/>
+              </a:spcBef>
+              <a:spcAft>
+                <a:spcPts val="0"/>
+              </a:spcAft>
+              <a:buSzPts val="1400"/>
+              <a:buChar char="○"/>
+              <a:defRPr/>
+            </a:lvl5pPr>
+            <a:lvl6pPr indent="-317500" lvl="5" marL="2743200">
+              <a:spcBef>
+                <a:spcPts val="0"/>
+              </a:spcBef>
+              <a:spcAft>
+                <a:spcPts val="0"/>
+              </a:spcAft>
+              <a:buSzPts val="1400"/>
+              <a:buChar char="■"/>
+              <a:defRPr/>
+            </a:lvl6pPr>
+            <a:lvl7pPr indent="-317500" lvl="6" marL="3200400">
+              <a:spcBef>
+                <a:spcPts val="0"/>
+              </a:spcBef>
+              <a:spcAft>
+                <a:spcPts val="0"/>
+              </a:spcAft>
+              <a:buSzPts val="1400"/>
+              <a:buChar char="●"/>
+              <a:defRPr/>
+            </a:lvl7pPr>
+            <a:lvl8pPr indent="-317500" lvl="7" marL="3657600">
+              <a:spcBef>
+                <a:spcPts val="0"/>
+              </a:spcBef>
+              <a:spcAft>
+                <a:spcPts val="0"/>
+              </a:spcAft>
+              <a:buSzPts val="1400"/>
+              <a:buChar char="○"/>
+              <a:defRPr/>
+            </a:lvl8pPr>
+            <a:lvl9pPr indent="-317500" lvl="8" marL="4114800">
+              <a:spcBef>
+                <a:spcPts val="0"/>
+              </a:spcBef>
+              <a:spcAft>
+                <a:spcPts val="0"/>
+              </a:spcAft>
+              <a:buSzPts val="1400"/>
+              <a:buChar char="■"/>
+              <a:defRPr/>
+            </a:lvl9pPr>
+          </a:lstStyle>
+          <a:p/>
+        </p:txBody>
+      </p:sp>
+      <p:sp>
+        <p:nvSpPr>
+          <p:cNvPr id="85" name="Google Shape;85;p21"/>
+          <p:cNvSpPr txBox="1"/>
+          <p:nvPr>
+            <p:ph idx="12" type="sldNum"/>
+          </p:nvPr>
+        </p:nvSpPr>
+        <p:spPr>
+          <a:xfrm>
+            <a:off x="8472458" y="4663217"/>
+            <a:ext cx="548700" cy="393600"/>
+          </a:xfrm>
+          <a:prstGeom prst="rect">
+            <a:avLst/>
+          </a:prstGeom>
+        </p:spPr>
+        <p:txBody>
+          <a:bodyPr anchorCtr="0" anchor="ctr" bIns="91425" lIns="91425" spcFirstLastPara="1" rIns="91425" wrap="square" tIns="91425">
+            <a:normAutofit/>
+          </a:bodyPr>
+          <a:lstStyle>
+            <a:lvl1pPr lvl="0">
+              <a:buNone/>
+              <a:defRPr/>
+            </a:lvl1pPr>
+            <a:lvl2pPr lvl="1">
+              <a:buNone/>
+              <a:defRPr/>
+            </a:lvl2pPr>
+            <a:lvl3pPr lvl="2">
+              <a:buNone/>
+              <a:defRPr/>
+            </a:lvl3pPr>
+            <a:lvl4pPr lvl="3">
+              <a:buNone/>
+              <a:defRPr/>
+            </a:lvl4pPr>
+            <a:lvl5pPr lvl="4">
+              <a:buNone/>
+              <a:defRPr/>
+            </a:lvl5pPr>
+            <a:lvl6pPr lvl="5">
+              <a:buNone/>
+              <a:defRPr/>
+            </a:lvl6pPr>
+            <a:lvl7pPr lvl="6">
+              <a:buNone/>
+              <a:defRPr/>
+            </a:lvl7pPr>
+            <a:lvl8pPr lvl="7">
+              <a:buNone/>
+              <a:defRPr/>
+            </a:lvl8pPr>
+            <a:lvl9pPr lvl="8">
+              <a:buNone/>
+              <a:defRPr/>
+            </a:lvl9pPr>
+          </a:lstStyle>
+          <a:p>
+            <a:pPr indent="0" lvl="0" marL="0" rtl="0" algn="r">
+              <a:spcBef>
+                <a:spcPts val="0"/>
+              </a:spcBef>
+              <a:spcAft>
+                <a:spcPts val="0"/>
+              </a:spcAft>
+              <a:buNone/>
+            </a:pPr>
+            <a:fld id="{00000000-1234-1234-1234-123412341234}" type="slidenum">
+              <a:rPr lang="es"/>
+              <a:t>‹#›</a:t>
+            </a:fld>
+            <a:endParaRPr/>
+          </a:p>
+        </p:txBody>
+      </p:sp>
+    </p:spTree>
+  </p:cSld>
+  <p:clrMapOvr>
+    <a:masterClrMapping/>
+  </p:clrMapOvr>
+</p:sldLayout>
+</file>
+
 <file path=ppt/slideLayouts/slideLayout2.xml><?xml version="1.0" encoding="utf-8"?>
 <p:sldLayout xmlns:a="http://schemas.openxmlformats.org/drawingml/2006/main" xmlns:r="http://schemas.openxmlformats.org/officeDocument/2006/relationships" xmlns:mc="http://schemas.openxmlformats.org/markup-compatibility/2006" xmlns:mv="urn:schemas-microsoft-com:mac:vml" xmlns:p="http://schemas.openxmlformats.org/presentationml/2006/main" xmlns:c="http://schemas.openxmlformats.org/drawingml/2006/chart" xmlns:dgm="http://schemas.openxmlformats.org/drawingml/2006/diagram" xmlns:o="urn:schemas-microsoft-com:office:office" xmlns:v="urn:schemas-microsoft-com:vml" xmlns:pvml="urn:schemas-microsoft-com:office:powerpoint" xmlns:com="http://schemas.openxmlformats.org/drawingml/2006/compatibility" xmlns:p14="http://schemas.microsoft.com/office/powerpoint/2010/main" xmlns:p15="http://schemas.microsoft.com/office/powerpoint/2012/main" xmlns:ahyp="http://schemas.microsoft.com/office/drawing/2018/hyperlinkcolor" matchingName="Section header" type="secHead">
   <p:cSld name="SECTION_HEADER">
@@ -4576,6 +7365,606 @@
       <p:sp>
         <p:nvSpPr>
           <p:cNvPr id="15" name="Google Shape;15;p3"/>
+          <p:cNvSpPr txBox="1"/>
+          <p:nvPr>
+            <p:ph idx="12" type="sldNum"/>
+          </p:nvPr>
+        </p:nvSpPr>
+        <p:spPr>
+          <a:xfrm>
+            <a:off x="8472458" y="4663217"/>
+            <a:ext cx="548700" cy="393600"/>
+          </a:xfrm>
+          <a:prstGeom prst="rect">
+            <a:avLst/>
+          </a:prstGeom>
+        </p:spPr>
+        <p:txBody>
+          <a:bodyPr anchorCtr="0" anchor="ctr" bIns="91425" lIns="91425" spcFirstLastPara="1" rIns="91425" wrap="square" tIns="91425">
+            <a:normAutofit/>
+          </a:bodyPr>
+          <a:lstStyle>
+            <a:lvl1pPr lvl="0">
+              <a:buNone/>
+              <a:defRPr/>
+            </a:lvl1pPr>
+            <a:lvl2pPr lvl="1">
+              <a:buNone/>
+              <a:defRPr/>
+            </a:lvl2pPr>
+            <a:lvl3pPr lvl="2">
+              <a:buNone/>
+              <a:defRPr/>
+            </a:lvl3pPr>
+            <a:lvl4pPr lvl="3">
+              <a:buNone/>
+              <a:defRPr/>
+            </a:lvl4pPr>
+            <a:lvl5pPr lvl="4">
+              <a:buNone/>
+              <a:defRPr/>
+            </a:lvl5pPr>
+            <a:lvl6pPr lvl="5">
+              <a:buNone/>
+              <a:defRPr/>
+            </a:lvl6pPr>
+            <a:lvl7pPr lvl="6">
+              <a:buNone/>
+              <a:defRPr/>
+            </a:lvl7pPr>
+            <a:lvl8pPr lvl="7">
+              <a:buNone/>
+              <a:defRPr/>
+            </a:lvl8pPr>
+            <a:lvl9pPr lvl="8">
+              <a:buNone/>
+              <a:defRPr/>
+            </a:lvl9pPr>
+          </a:lstStyle>
+          <a:p>
+            <a:pPr indent="0" lvl="0" marL="0" rtl="0" algn="r">
+              <a:spcBef>
+                <a:spcPts val="0"/>
+              </a:spcBef>
+              <a:spcAft>
+                <a:spcPts val="0"/>
+              </a:spcAft>
+              <a:buNone/>
+            </a:pPr>
+            <a:fld id="{00000000-1234-1234-1234-123412341234}" type="slidenum">
+              <a:rPr lang="es"/>
+              <a:t>‹#›</a:t>
+            </a:fld>
+            <a:endParaRPr/>
+          </a:p>
+        </p:txBody>
+      </p:sp>
+    </p:spTree>
+  </p:cSld>
+  <p:clrMapOvr>
+    <a:masterClrMapping/>
+  </p:clrMapOvr>
+</p:sldLayout>
+</file>
+
+<file path=ppt/slideLayouts/slideLayout20.xml><?xml version="1.0" encoding="utf-8"?>
+<p:sldLayout xmlns:a="http://schemas.openxmlformats.org/drawingml/2006/main" xmlns:r="http://schemas.openxmlformats.org/officeDocument/2006/relationships" xmlns:mc="http://schemas.openxmlformats.org/markup-compatibility/2006" xmlns:mv="urn:schemas-microsoft-com:mac:vml" xmlns:p="http://schemas.openxmlformats.org/presentationml/2006/main" xmlns:c="http://schemas.openxmlformats.org/drawingml/2006/chart" xmlns:dgm="http://schemas.openxmlformats.org/drawingml/2006/diagram" xmlns:o="urn:schemas-microsoft-com:office:office" xmlns:v="urn:schemas-microsoft-com:vml" xmlns:pvml="urn:schemas-microsoft-com:office:powerpoint" xmlns:com="http://schemas.openxmlformats.org/drawingml/2006/compatibility" xmlns:p14="http://schemas.microsoft.com/office/powerpoint/2010/main" xmlns:p15="http://schemas.microsoft.com/office/powerpoint/2012/main" xmlns:ahyp="http://schemas.microsoft.com/office/drawing/2018/hyperlinkcolor" matchingName="Caption">
+  <p:cSld name="CAPTION_ONLY">
+    <p:spTree>
+      <p:nvGrpSpPr>
+        <p:cNvPr id="86" name="Shape 86"/>
+        <p:cNvGrpSpPr/>
+        <p:nvPr/>
+      </p:nvGrpSpPr>
+      <p:grpSpPr>
+        <a:xfrm>
+          <a:off x="0" y="0"/>
+          <a:ext cx="0" cy="0"/>
+          <a:chOff x="0" y="0"/>
+          <a:chExt cx="0" cy="0"/>
+        </a:xfrm>
+      </p:grpSpPr>
+      <p:sp>
+        <p:nvSpPr>
+          <p:cNvPr id="87" name="Google Shape;87;p22"/>
+          <p:cNvSpPr txBox="1"/>
+          <p:nvPr>
+            <p:ph idx="1" type="body"/>
+          </p:nvPr>
+        </p:nvSpPr>
+        <p:spPr>
+          <a:xfrm>
+            <a:off x="311700" y="4230575"/>
+            <a:ext cx="5998800" cy="605100"/>
+          </a:xfrm>
+          <a:prstGeom prst="rect">
+            <a:avLst/>
+          </a:prstGeom>
+        </p:spPr>
+        <p:txBody>
+          <a:bodyPr anchorCtr="0" anchor="ctr" bIns="91425" lIns="91425" spcFirstLastPara="1" rIns="91425" wrap="square" tIns="91425">
+            <a:normAutofit/>
+          </a:bodyPr>
+          <a:lstStyle>
+            <a:lvl1pPr indent="-228600" lvl="0" marL="457200">
+              <a:lnSpc>
+                <a:spcPct val="100000"/>
+              </a:lnSpc>
+              <a:spcBef>
+                <a:spcPts val="0"/>
+              </a:spcBef>
+              <a:spcAft>
+                <a:spcPts val="0"/>
+              </a:spcAft>
+              <a:buSzPts val="1800"/>
+              <a:buNone/>
+              <a:defRPr/>
+            </a:lvl1pPr>
+          </a:lstStyle>
+          <a:p/>
+        </p:txBody>
+      </p:sp>
+      <p:sp>
+        <p:nvSpPr>
+          <p:cNvPr id="88" name="Google Shape;88;p22"/>
+          <p:cNvSpPr txBox="1"/>
+          <p:nvPr>
+            <p:ph idx="12" type="sldNum"/>
+          </p:nvPr>
+        </p:nvSpPr>
+        <p:spPr>
+          <a:xfrm>
+            <a:off x="8472458" y="4663217"/>
+            <a:ext cx="548700" cy="393600"/>
+          </a:xfrm>
+          <a:prstGeom prst="rect">
+            <a:avLst/>
+          </a:prstGeom>
+        </p:spPr>
+        <p:txBody>
+          <a:bodyPr anchorCtr="0" anchor="ctr" bIns="91425" lIns="91425" spcFirstLastPara="1" rIns="91425" wrap="square" tIns="91425">
+            <a:normAutofit/>
+          </a:bodyPr>
+          <a:lstStyle>
+            <a:lvl1pPr lvl="0">
+              <a:buNone/>
+              <a:defRPr/>
+            </a:lvl1pPr>
+            <a:lvl2pPr lvl="1">
+              <a:buNone/>
+              <a:defRPr/>
+            </a:lvl2pPr>
+            <a:lvl3pPr lvl="2">
+              <a:buNone/>
+              <a:defRPr/>
+            </a:lvl3pPr>
+            <a:lvl4pPr lvl="3">
+              <a:buNone/>
+              <a:defRPr/>
+            </a:lvl4pPr>
+            <a:lvl5pPr lvl="4">
+              <a:buNone/>
+              <a:defRPr/>
+            </a:lvl5pPr>
+            <a:lvl6pPr lvl="5">
+              <a:buNone/>
+              <a:defRPr/>
+            </a:lvl6pPr>
+            <a:lvl7pPr lvl="6">
+              <a:buNone/>
+              <a:defRPr/>
+            </a:lvl7pPr>
+            <a:lvl8pPr lvl="7">
+              <a:buNone/>
+              <a:defRPr/>
+            </a:lvl8pPr>
+            <a:lvl9pPr lvl="8">
+              <a:buNone/>
+              <a:defRPr/>
+            </a:lvl9pPr>
+          </a:lstStyle>
+          <a:p>
+            <a:pPr indent="0" lvl="0" marL="0" rtl="0" algn="r">
+              <a:spcBef>
+                <a:spcPts val="0"/>
+              </a:spcBef>
+              <a:spcAft>
+                <a:spcPts val="0"/>
+              </a:spcAft>
+              <a:buNone/>
+            </a:pPr>
+            <a:fld id="{00000000-1234-1234-1234-123412341234}" type="slidenum">
+              <a:rPr lang="es"/>
+              <a:t>‹#›</a:t>
+            </a:fld>
+            <a:endParaRPr/>
+          </a:p>
+        </p:txBody>
+      </p:sp>
+    </p:spTree>
+  </p:cSld>
+  <p:clrMapOvr>
+    <a:masterClrMapping/>
+  </p:clrMapOvr>
+</p:sldLayout>
+</file>
+
+<file path=ppt/slideLayouts/slideLayout21.xml><?xml version="1.0" encoding="utf-8"?>
+<p:sldLayout xmlns:a="http://schemas.openxmlformats.org/drawingml/2006/main" xmlns:r="http://schemas.openxmlformats.org/officeDocument/2006/relationships" xmlns:mc="http://schemas.openxmlformats.org/markup-compatibility/2006" xmlns:mv="urn:schemas-microsoft-com:mac:vml" xmlns:p="http://schemas.openxmlformats.org/presentationml/2006/main" xmlns:c="http://schemas.openxmlformats.org/drawingml/2006/chart" xmlns:dgm="http://schemas.openxmlformats.org/drawingml/2006/diagram" xmlns:o="urn:schemas-microsoft-com:office:office" xmlns:v="urn:schemas-microsoft-com:vml" xmlns:pvml="urn:schemas-microsoft-com:office:powerpoint" xmlns:com="http://schemas.openxmlformats.org/drawingml/2006/compatibility" xmlns:p14="http://schemas.microsoft.com/office/powerpoint/2010/main" xmlns:p15="http://schemas.microsoft.com/office/powerpoint/2012/main" xmlns:ahyp="http://schemas.microsoft.com/office/drawing/2018/hyperlinkcolor" matchingName="Big number">
+  <p:cSld name="BIG_NUMBER">
+    <p:spTree>
+      <p:nvGrpSpPr>
+        <p:cNvPr id="89" name="Shape 89"/>
+        <p:cNvGrpSpPr/>
+        <p:nvPr/>
+      </p:nvGrpSpPr>
+      <p:grpSpPr>
+        <a:xfrm>
+          <a:off x="0" y="0"/>
+          <a:ext cx="0" cy="0"/>
+          <a:chOff x="0" y="0"/>
+          <a:chExt cx="0" cy="0"/>
+        </a:xfrm>
+      </p:grpSpPr>
+      <p:sp>
+        <p:nvSpPr>
+          <p:cNvPr id="90" name="Google Shape;90;p23"/>
+          <p:cNvSpPr txBox="1"/>
+          <p:nvPr>
+            <p:ph hasCustomPrompt="1" type="title"/>
+          </p:nvPr>
+        </p:nvSpPr>
+        <p:spPr>
+          <a:xfrm>
+            <a:off x="311700" y="1106125"/>
+            <a:ext cx="8520600" cy="1963500"/>
+          </a:xfrm>
+          <a:prstGeom prst="rect">
+            <a:avLst/>
+          </a:prstGeom>
+        </p:spPr>
+        <p:txBody>
+          <a:bodyPr anchorCtr="0" anchor="b" bIns="91425" lIns="91425" spcFirstLastPara="1" rIns="91425" wrap="square" tIns="91425">
+            <a:normAutofit/>
+          </a:bodyPr>
+          <a:lstStyle>
+            <a:lvl1pPr lvl="0" algn="ctr">
+              <a:spcBef>
+                <a:spcPts val="0"/>
+              </a:spcBef>
+              <a:spcAft>
+                <a:spcPts val="0"/>
+              </a:spcAft>
+              <a:buSzPts val="12000"/>
+              <a:buNone/>
+              <a:defRPr sz="12000"/>
+            </a:lvl1pPr>
+            <a:lvl2pPr lvl="1" algn="ctr">
+              <a:spcBef>
+                <a:spcPts val="0"/>
+              </a:spcBef>
+              <a:spcAft>
+                <a:spcPts val="0"/>
+              </a:spcAft>
+              <a:buSzPts val="12000"/>
+              <a:buNone/>
+              <a:defRPr sz="12000"/>
+            </a:lvl2pPr>
+            <a:lvl3pPr lvl="2" algn="ctr">
+              <a:spcBef>
+                <a:spcPts val="0"/>
+              </a:spcBef>
+              <a:spcAft>
+                <a:spcPts val="0"/>
+              </a:spcAft>
+              <a:buSzPts val="12000"/>
+              <a:buNone/>
+              <a:defRPr sz="12000"/>
+            </a:lvl3pPr>
+            <a:lvl4pPr lvl="3" algn="ctr">
+              <a:spcBef>
+                <a:spcPts val="0"/>
+              </a:spcBef>
+              <a:spcAft>
+                <a:spcPts val="0"/>
+              </a:spcAft>
+              <a:buSzPts val="12000"/>
+              <a:buNone/>
+              <a:defRPr sz="12000"/>
+            </a:lvl4pPr>
+            <a:lvl5pPr lvl="4" algn="ctr">
+              <a:spcBef>
+                <a:spcPts val="0"/>
+              </a:spcBef>
+              <a:spcAft>
+                <a:spcPts val="0"/>
+              </a:spcAft>
+              <a:buSzPts val="12000"/>
+              <a:buNone/>
+              <a:defRPr sz="12000"/>
+            </a:lvl5pPr>
+            <a:lvl6pPr lvl="5" algn="ctr">
+              <a:spcBef>
+                <a:spcPts val="0"/>
+              </a:spcBef>
+              <a:spcAft>
+                <a:spcPts val="0"/>
+              </a:spcAft>
+              <a:buSzPts val="12000"/>
+              <a:buNone/>
+              <a:defRPr sz="12000"/>
+            </a:lvl6pPr>
+            <a:lvl7pPr lvl="6" algn="ctr">
+              <a:spcBef>
+                <a:spcPts val="0"/>
+              </a:spcBef>
+              <a:spcAft>
+                <a:spcPts val="0"/>
+              </a:spcAft>
+              <a:buSzPts val="12000"/>
+              <a:buNone/>
+              <a:defRPr sz="12000"/>
+            </a:lvl7pPr>
+            <a:lvl8pPr lvl="7" algn="ctr">
+              <a:spcBef>
+                <a:spcPts val="0"/>
+              </a:spcBef>
+              <a:spcAft>
+                <a:spcPts val="0"/>
+              </a:spcAft>
+              <a:buSzPts val="12000"/>
+              <a:buNone/>
+              <a:defRPr sz="12000"/>
+            </a:lvl8pPr>
+            <a:lvl9pPr lvl="8" algn="ctr">
+              <a:spcBef>
+                <a:spcPts val="0"/>
+              </a:spcBef>
+              <a:spcAft>
+                <a:spcPts val="0"/>
+              </a:spcAft>
+              <a:buSzPts val="12000"/>
+              <a:buNone/>
+              <a:defRPr sz="12000"/>
+            </a:lvl9pPr>
+          </a:lstStyle>
+          <a:p>
+            <a:r>
+              <a:t>xx%</a:t>
+            </a:r>
+          </a:p>
+        </p:txBody>
+      </p:sp>
+      <p:sp>
+        <p:nvSpPr>
+          <p:cNvPr id="91" name="Google Shape;91;p23"/>
+          <p:cNvSpPr txBox="1"/>
+          <p:nvPr>
+            <p:ph idx="1" type="body"/>
+          </p:nvPr>
+        </p:nvSpPr>
+        <p:spPr>
+          <a:xfrm>
+            <a:off x="311700" y="3152225"/>
+            <a:ext cx="8520600" cy="1300800"/>
+          </a:xfrm>
+          <a:prstGeom prst="rect">
+            <a:avLst/>
+          </a:prstGeom>
+        </p:spPr>
+        <p:txBody>
+          <a:bodyPr anchorCtr="0" anchor="t" bIns="91425" lIns="91425" spcFirstLastPara="1" rIns="91425" wrap="square" tIns="91425">
+            <a:normAutofit/>
+          </a:bodyPr>
+          <a:lstStyle>
+            <a:lvl1pPr indent="-342900" lvl="0" marL="457200" algn="ctr">
+              <a:spcBef>
+                <a:spcPts val="0"/>
+              </a:spcBef>
+              <a:spcAft>
+                <a:spcPts val="0"/>
+              </a:spcAft>
+              <a:buSzPts val="1800"/>
+              <a:buChar char="●"/>
+              <a:defRPr/>
+            </a:lvl1pPr>
+            <a:lvl2pPr indent="-317500" lvl="1" marL="914400" algn="ctr">
+              <a:spcBef>
+                <a:spcPts val="0"/>
+              </a:spcBef>
+              <a:spcAft>
+                <a:spcPts val="0"/>
+              </a:spcAft>
+              <a:buSzPts val="1400"/>
+              <a:buChar char="○"/>
+              <a:defRPr/>
+            </a:lvl2pPr>
+            <a:lvl3pPr indent="-317500" lvl="2" marL="1371600" algn="ctr">
+              <a:spcBef>
+                <a:spcPts val="0"/>
+              </a:spcBef>
+              <a:spcAft>
+                <a:spcPts val="0"/>
+              </a:spcAft>
+              <a:buSzPts val="1400"/>
+              <a:buChar char="■"/>
+              <a:defRPr/>
+            </a:lvl3pPr>
+            <a:lvl4pPr indent="-317500" lvl="3" marL="1828800" algn="ctr">
+              <a:spcBef>
+                <a:spcPts val="0"/>
+              </a:spcBef>
+              <a:spcAft>
+                <a:spcPts val="0"/>
+              </a:spcAft>
+              <a:buSzPts val="1400"/>
+              <a:buChar char="●"/>
+              <a:defRPr/>
+            </a:lvl4pPr>
+            <a:lvl5pPr indent="-317500" lvl="4" marL="2286000" algn="ctr">
+              <a:spcBef>
+                <a:spcPts val="0"/>
+              </a:spcBef>
+              <a:spcAft>
+                <a:spcPts val="0"/>
+              </a:spcAft>
+              <a:buSzPts val="1400"/>
+              <a:buChar char="○"/>
+              <a:defRPr/>
+            </a:lvl5pPr>
+            <a:lvl6pPr indent="-317500" lvl="5" marL="2743200" algn="ctr">
+              <a:spcBef>
+                <a:spcPts val="0"/>
+              </a:spcBef>
+              <a:spcAft>
+                <a:spcPts val="0"/>
+              </a:spcAft>
+              <a:buSzPts val="1400"/>
+              <a:buChar char="■"/>
+              <a:defRPr/>
+            </a:lvl6pPr>
+            <a:lvl7pPr indent="-317500" lvl="6" marL="3200400" algn="ctr">
+              <a:spcBef>
+                <a:spcPts val="0"/>
+              </a:spcBef>
+              <a:spcAft>
+                <a:spcPts val="0"/>
+              </a:spcAft>
+              <a:buSzPts val="1400"/>
+              <a:buChar char="●"/>
+              <a:defRPr/>
+            </a:lvl7pPr>
+            <a:lvl8pPr indent="-317500" lvl="7" marL="3657600" algn="ctr">
+              <a:spcBef>
+                <a:spcPts val="0"/>
+              </a:spcBef>
+              <a:spcAft>
+                <a:spcPts val="0"/>
+              </a:spcAft>
+              <a:buSzPts val="1400"/>
+              <a:buChar char="○"/>
+              <a:defRPr/>
+            </a:lvl8pPr>
+            <a:lvl9pPr indent="-317500" lvl="8" marL="4114800" algn="ctr">
+              <a:spcBef>
+                <a:spcPts val="0"/>
+              </a:spcBef>
+              <a:spcAft>
+                <a:spcPts val="0"/>
+              </a:spcAft>
+              <a:buSzPts val="1400"/>
+              <a:buChar char="■"/>
+              <a:defRPr/>
+            </a:lvl9pPr>
+          </a:lstStyle>
+          <a:p/>
+        </p:txBody>
+      </p:sp>
+      <p:sp>
+        <p:nvSpPr>
+          <p:cNvPr id="92" name="Google Shape;92;p23"/>
+          <p:cNvSpPr txBox="1"/>
+          <p:nvPr>
+            <p:ph idx="12" type="sldNum"/>
+          </p:nvPr>
+        </p:nvSpPr>
+        <p:spPr>
+          <a:xfrm>
+            <a:off x="8472458" y="4663217"/>
+            <a:ext cx="548700" cy="393600"/>
+          </a:xfrm>
+          <a:prstGeom prst="rect">
+            <a:avLst/>
+          </a:prstGeom>
+        </p:spPr>
+        <p:txBody>
+          <a:bodyPr anchorCtr="0" anchor="ctr" bIns="91425" lIns="91425" spcFirstLastPara="1" rIns="91425" wrap="square" tIns="91425">
+            <a:normAutofit/>
+          </a:bodyPr>
+          <a:lstStyle>
+            <a:lvl1pPr lvl="0">
+              <a:buNone/>
+              <a:defRPr/>
+            </a:lvl1pPr>
+            <a:lvl2pPr lvl="1">
+              <a:buNone/>
+              <a:defRPr/>
+            </a:lvl2pPr>
+            <a:lvl3pPr lvl="2">
+              <a:buNone/>
+              <a:defRPr/>
+            </a:lvl3pPr>
+            <a:lvl4pPr lvl="3">
+              <a:buNone/>
+              <a:defRPr/>
+            </a:lvl4pPr>
+            <a:lvl5pPr lvl="4">
+              <a:buNone/>
+              <a:defRPr/>
+            </a:lvl5pPr>
+            <a:lvl6pPr lvl="5">
+              <a:buNone/>
+              <a:defRPr/>
+            </a:lvl6pPr>
+            <a:lvl7pPr lvl="6">
+              <a:buNone/>
+              <a:defRPr/>
+            </a:lvl7pPr>
+            <a:lvl8pPr lvl="7">
+              <a:buNone/>
+              <a:defRPr/>
+            </a:lvl8pPr>
+            <a:lvl9pPr lvl="8">
+              <a:buNone/>
+              <a:defRPr/>
+            </a:lvl9pPr>
+          </a:lstStyle>
+          <a:p>
+            <a:pPr indent="0" lvl="0" marL="0" rtl="0" algn="r">
+              <a:spcBef>
+                <a:spcPts val="0"/>
+              </a:spcBef>
+              <a:spcAft>
+                <a:spcPts val="0"/>
+              </a:spcAft>
+              <a:buNone/>
+            </a:pPr>
+            <a:fld id="{00000000-1234-1234-1234-123412341234}" type="slidenum">
+              <a:rPr lang="es"/>
+              <a:t>‹#›</a:t>
+            </a:fld>
+            <a:endParaRPr/>
+          </a:p>
+        </p:txBody>
+      </p:sp>
+    </p:spTree>
+  </p:cSld>
+  <p:clrMapOvr>
+    <a:masterClrMapping/>
+  </p:clrMapOvr>
+</p:sldLayout>
+</file>
+
+<file path=ppt/slideLayouts/slideLayout22.xml><?xml version="1.0" encoding="utf-8"?>
+<p:sldLayout xmlns:a="http://schemas.openxmlformats.org/drawingml/2006/main" xmlns:r="http://schemas.openxmlformats.org/officeDocument/2006/relationships" xmlns:mc="http://schemas.openxmlformats.org/markup-compatibility/2006" xmlns:mv="urn:schemas-microsoft-com:mac:vml" xmlns:p="http://schemas.openxmlformats.org/presentationml/2006/main" xmlns:c="http://schemas.openxmlformats.org/drawingml/2006/chart" xmlns:dgm="http://schemas.openxmlformats.org/drawingml/2006/diagram" xmlns:o="urn:schemas-microsoft-com:office:office" xmlns:v="urn:schemas-microsoft-com:vml" xmlns:pvml="urn:schemas-microsoft-com:office:powerpoint" xmlns:com="http://schemas.openxmlformats.org/drawingml/2006/compatibility" xmlns:p14="http://schemas.microsoft.com/office/powerpoint/2010/main" xmlns:p15="http://schemas.microsoft.com/office/powerpoint/2012/main" xmlns:ahyp="http://schemas.microsoft.com/office/drawing/2018/hyperlinkcolor" matchingName="Blank" type="blank">
+  <p:cSld name="BLANK">
+    <p:spTree>
+      <p:nvGrpSpPr>
+        <p:cNvPr id="93" name="Shape 93"/>
+        <p:cNvGrpSpPr/>
+        <p:nvPr/>
+      </p:nvGrpSpPr>
+      <p:grpSpPr>
+        <a:xfrm>
+          <a:off x="0" y="0"/>
+          <a:ext cx="0" cy="0"/>
+          <a:chOff x="0" y="0"/>
+          <a:chExt cx="0" cy="0"/>
+        </a:xfrm>
+      </p:grpSpPr>
+      <p:sp>
+        <p:nvSpPr>
+          <p:cNvPr id="94" name="Google Shape;94;p24"/>
           <p:cNvSpPr txBox="1"/>
           <p:nvPr>
             <p:ph idx="12" type="sldNum"/>
@@ -8353,12 +11742,19 @@
 </p:sldMaster>
 </file>
 
-<file path=ppt/slides/slide1.xml><?xml version="1.0" encoding="utf-8"?>
-<p:sld xmlns:a="http://schemas.openxmlformats.org/drawingml/2006/main" xmlns:r="http://schemas.openxmlformats.org/officeDocument/2006/relationships" xmlns:mc="http://schemas.openxmlformats.org/markup-compatibility/2006" xmlns:mv="urn:schemas-microsoft-com:mac:vml" xmlns:p="http://schemas.openxmlformats.org/presentationml/2006/main" xmlns:c="http://schemas.openxmlformats.org/drawingml/2006/chart" xmlns:dgm="http://schemas.openxmlformats.org/drawingml/2006/diagram" xmlns:o="urn:schemas-microsoft-com:office:office" xmlns:v="urn:schemas-microsoft-com:vml" xmlns:pvml="urn:schemas-microsoft-com:office:powerpoint" xmlns:com="http://schemas.openxmlformats.org/drawingml/2006/compatibility" xmlns:p14="http://schemas.microsoft.com/office/powerpoint/2010/main" xmlns:p15="http://schemas.microsoft.com/office/powerpoint/2012/main" xmlns:ahyp="http://schemas.microsoft.com/office/drawing/2018/hyperlinkcolor">
-  <p:cSld>
+<file path=ppt/slideMasters/slideMaster2.xml><?xml version="1.0" encoding="utf-8"?>
+<p:sldMaster xmlns:a="http://schemas.openxmlformats.org/drawingml/2006/main" xmlns:r="http://schemas.openxmlformats.org/officeDocument/2006/relationships" xmlns:mc="http://schemas.openxmlformats.org/markup-compatibility/2006" xmlns:mv="urn:schemas-microsoft-com:mac:vml" xmlns:p="http://schemas.openxmlformats.org/presentationml/2006/main" xmlns:c="http://schemas.openxmlformats.org/drawingml/2006/chart" xmlns:dgm="http://schemas.openxmlformats.org/drawingml/2006/diagram" xmlns:o="urn:schemas-microsoft-com:office:office" xmlns:v="urn:schemas-microsoft-com:vml" xmlns:pvml="urn:schemas-microsoft-com:office:powerpoint" xmlns:com="http://schemas.openxmlformats.org/drawingml/2006/compatibility" xmlns:p14="http://schemas.microsoft.com/office/powerpoint/2010/main" xmlns:p15="http://schemas.microsoft.com/office/powerpoint/2012/main" xmlns:ahyp="http://schemas.microsoft.com/office/drawing/2018/hyperlinkcolor">
+  <p:cSld name="simple-light-2">
+    <p:bg>
+      <p:bgPr>
+        <a:solidFill>
+          <a:schemeClr val="lt1"/>
+        </a:solidFill>
+      </p:bgPr>
+    </p:bg>
     <p:spTree>
       <p:nvGrpSpPr>
-        <p:cNvPr id="53" name="Shape 53"/>
+        <p:cNvPr id="50" name="Shape 50"/>
         <p:cNvGrpSpPr/>
         <p:nvPr/>
       </p:nvGrpSpPr>
@@ -8372,7 +11768,1261 @@
       </p:grpSpPr>
       <p:sp>
         <p:nvSpPr>
-          <p:cNvPr id="54" name="Google Shape;54;p13"/>
+          <p:cNvPr id="51" name="Google Shape;51;p13"/>
+          <p:cNvSpPr txBox="1"/>
+          <p:nvPr>
+            <p:ph type="title"/>
+          </p:nvPr>
+        </p:nvSpPr>
+        <p:spPr>
+          <a:xfrm>
+            <a:off x="311700" y="445025"/>
+            <a:ext cx="8520600" cy="572700"/>
+          </a:xfrm>
+          <a:prstGeom prst="rect">
+            <a:avLst/>
+          </a:prstGeom>
+          <a:noFill/>
+          <a:ln>
+            <a:noFill/>
+          </a:ln>
+        </p:spPr>
+        <p:txBody>
+          <a:bodyPr anchorCtr="0" anchor="t" bIns="91425" lIns="91425" spcFirstLastPara="1" rIns="91425" wrap="square" tIns="91425">
+            <a:normAutofit/>
+          </a:bodyPr>
+          <a:lstStyle>
+            <a:lvl1pPr lvl="0">
+              <a:spcBef>
+                <a:spcPts val="0"/>
+              </a:spcBef>
+              <a:spcAft>
+                <a:spcPts val="0"/>
+              </a:spcAft>
+              <a:buClr>
+                <a:schemeClr val="dk1"/>
+              </a:buClr>
+              <a:buSzPts val="2800"/>
+              <a:buNone/>
+              <a:defRPr sz="2800">
+                <a:solidFill>
+                  <a:schemeClr val="dk1"/>
+                </a:solidFill>
+              </a:defRPr>
+            </a:lvl1pPr>
+            <a:lvl2pPr lvl="1">
+              <a:spcBef>
+                <a:spcPts val="0"/>
+              </a:spcBef>
+              <a:spcAft>
+                <a:spcPts val="0"/>
+              </a:spcAft>
+              <a:buClr>
+                <a:schemeClr val="dk1"/>
+              </a:buClr>
+              <a:buSzPts val="2800"/>
+              <a:buNone/>
+              <a:defRPr sz="2800">
+                <a:solidFill>
+                  <a:schemeClr val="dk1"/>
+                </a:solidFill>
+              </a:defRPr>
+            </a:lvl2pPr>
+            <a:lvl3pPr lvl="2">
+              <a:spcBef>
+                <a:spcPts val="0"/>
+              </a:spcBef>
+              <a:spcAft>
+                <a:spcPts val="0"/>
+              </a:spcAft>
+              <a:buClr>
+                <a:schemeClr val="dk1"/>
+              </a:buClr>
+              <a:buSzPts val="2800"/>
+              <a:buNone/>
+              <a:defRPr sz="2800">
+                <a:solidFill>
+                  <a:schemeClr val="dk1"/>
+                </a:solidFill>
+              </a:defRPr>
+            </a:lvl3pPr>
+            <a:lvl4pPr lvl="3">
+              <a:spcBef>
+                <a:spcPts val="0"/>
+              </a:spcBef>
+              <a:spcAft>
+                <a:spcPts val="0"/>
+              </a:spcAft>
+              <a:buClr>
+                <a:schemeClr val="dk1"/>
+              </a:buClr>
+              <a:buSzPts val="2800"/>
+              <a:buNone/>
+              <a:defRPr sz="2800">
+                <a:solidFill>
+                  <a:schemeClr val="dk1"/>
+                </a:solidFill>
+              </a:defRPr>
+            </a:lvl4pPr>
+            <a:lvl5pPr lvl="4">
+              <a:spcBef>
+                <a:spcPts val="0"/>
+              </a:spcBef>
+              <a:spcAft>
+                <a:spcPts val="0"/>
+              </a:spcAft>
+              <a:buClr>
+                <a:schemeClr val="dk1"/>
+              </a:buClr>
+              <a:buSzPts val="2800"/>
+              <a:buNone/>
+              <a:defRPr sz="2800">
+                <a:solidFill>
+                  <a:schemeClr val="dk1"/>
+                </a:solidFill>
+              </a:defRPr>
+            </a:lvl5pPr>
+            <a:lvl6pPr lvl="5">
+              <a:spcBef>
+                <a:spcPts val="0"/>
+              </a:spcBef>
+              <a:spcAft>
+                <a:spcPts val="0"/>
+              </a:spcAft>
+              <a:buClr>
+                <a:schemeClr val="dk1"/>
+              </a:buClr>
+              <a:buSzPts val="2800"/>
+              <a:buNone/>
+              <a:defRPr sz="2800">
+                <a:solidFill>
+                  <a:schemeClr val="dk1"/>
+                </a:solidFill>
+              </a:defRPr>
+            </a:lvl6pPr>
+            <a:lvl7pPr lvl="6">
+              <a:spcBef>
+                <a:spcPts val="0"/>
+              </a:spcBef>
+              <a:spcAft>
+                <a:spcPts val="0"/>
+              </a:spcAft>
+              <a:buClr>
+                <a:schemeClr val="dk1"/>
+              </a:buClr>
+              <a:buSzPts val="2800"/>
+              <a:buNone/>
+              <a:defRPr sz="2800">
+                <a:solidFill>
+                  <a:schemeClr val="dk1"/>
+                </a:solidFill>
+              </a:defRPr>
+            </a:lvl7pPr>
+            <a:lvl8pPr lvl="7">
+              <a:spcBef>
+                <a:spcPts val="0"/>
+              </a:spcBef>
+              <a:spcAft>
+                <a:spcPts val="0"/>
+              </a:spcAft>
+              <a:buClr>
+                <a:schemeClr val="dk1"/>
+              </a:buClr>
+              <a:buSzPts val="2800"/>
+              <a:buNone/>
+              <a:defRPr sz="2800">
+                <a:solidFill>
+                  <a:schemeClr val="dk1"/>
+                </a:solidFill>
+              </a:defRPr>
+            </a:lvl8pPr>
+            <a:lvl9pPr lvl="8">
+              <a:spcBef>
+                <a:spcPts val="0"/>
+              </a:spcBef>
+              <a:spcAft>
+                <a:spcPts val="0"/>
+              </a:spcAft>
+              <a:buClr>
+                <a:schemeClr val="dk1"/>
+              </a:buClr>
+              <a:buSzPts val="2800"/>
+              <a:buNone/>
+              <a:defRPr sz="2800">
+                <a:solidFill>
+                  <a:schemeClr val="dk1"/>
+                </a:solidFill>
+              </a:defRPr>
+            </a:lvl9pPr>
+          </a:lstStyle>
+          <a:p/>
+        </p:txBody>
+      </p:sp>
+      <p:sp>
+        <p:nvSpPr>
+          <p:cNvPr id="52" name="Google Shape;52;p13"/>
+          <p:cNvSpPr txBox="1"/>
+          <p:nvPr>
+            <p:ph idx="1" type="body"/>
+          </p:nvPr>
+        </p:nvSpPr>
+        <p:spPr>
+          <a:xfrm>
+            <a:off x="311700" y="1152475"/>
+            <a:ext cx="8520600" cy="3416400"/>
+          </a:xfrm>
+          <a:prstGeom prst="rect">
+            <a:avLst/>
+          </a:prstGeom>
+          <a:noFill/>
+          <a:ln>
+            <a:noFill/>
+          </a:ln>
+        </p:spPr>
+        <p:txBody>
+          <a:bodyPr anchorCtr="0" anchor="t" bIns="91425" lIns="91425" spcFirstLastPara="1" rIns="91425" wrap="square" tIns="91425">
+            <a:normAutofit/>
+          </a:bodyPr>
+          <a:lstStyle>
+            <a:lvl1pPr indent="-342900" lvl="0" marL="457200">
+              <a:lnSpc>
+                <a:spcPct val="115000"/>
+              </a:lnSpc>
+              <a:spcBef>
+                <a:spcPts val="0"/>
+              </a:spcBef>
+              <a:spcAft>
+                <a:spcPts val="0"/>
+              </a:spcAft>
+              <a:buClr>
+                <a:schemeClr val="dk2"/>
+              </a:buClr>
+              <a:buSzPts val="1800"/>
+              <a:buChar char="●"/>
+              <a:defRPr sz="1800">
+                <a:solidFill>
+                  <a:schemeClr val="dk2"/>
+                </a:solidFill>
+              </a:defRPr>
+            </a:lvl1pPr>
+            <a:lvl2pPr indent="-317500" lvl="1" marL="914400">
+              <a:lnSpc>
+                <a:spcPct val="115000"/>
+              </a:lnSpc>
+              <a:spcBef>
+                <a:spcPts val="0"/>
+              </a:spcBef>
+              <a:spcAft>
+                <a:spcPts val="0"/>
+              </a:spcAft>
+              <a:buClr>
+                <a:schemeClr val="dk2"/>
+              </a:buClr>
+              <a:buSzPts val="1400"/>
+              <a:buChar char="○"/>
+              <a:defRPr>
+                <a:solidFill>
+                  <a:schemeClr val="dk2"/>
+                </a:solidFill>
+              </a:defRPr>
+            </a:lvl2pPr>
+            <a:lvl3pPr indent="-317500" lvl="2" marL="1371600">
+              <a:lnSpc>
+                <a:spcPct val="115000"/>
+              </a:lnSpc>
+              <a:spcBef>
+                <a:spcPts val="0"/>
+              </a:spcBef>
+              <a:spcAft>
+                <a:spcPts val="0"/>
+              </a:spcAft>
+              <a:buClr>
+                <a:schemeClr val="dk2"/>
+              </a:buClr>
+              <a:buSzPts val="1400"/>
+              <a:buChar char="■"/>
+              <a:defRPr>
+                <a:solidFill>
+                  <a:schemeClr val="dk2"/>
+                </a:solidFill>
+              </a:defRPr>
+            </a:lvl3pPr>
+            <a:lvl4pPr indent="-317500" lvl="3" marL="1828800">
+              <a:lnSpc>
+                <a:spcPct val="115000"/>
+              </a:lnSpc>
+              <a:spcBef>
+                <a:spcPts val="0"/>
+              </a:spcBef>
+              <a:spcAft>
+                <a:spcPts val="0"/>
+              </a:spcAft>
+              <a:buClr>
+                <a:schemeClr val="dk2"/>
+              </a:buClr>
+              <a:buSzPts val="1400"/>
+              <a:buChar char="●"/>
+              <a:defRPr>
+                <a:solidFill>
+                  <a:schemeClr val="dk2"/>
+                </a:solidFill>
+              </a:defRPr>
+            </a:lvl4pPr>
+            <a:lvl5pPr indent="-317500" lvl="4" marL="2286000">
+              <a:lnSpc>
+                <a:spcPct val="115000"/>
+              </a:lnSpc>
+              <a:spcBef>
+                <a:spcPts val="0"/>
+              </a:spcBef>
+              <a:spcAft>
+                <a:spcPts val="0"/>
+              </a:spcAft>
+              <a:buClr>
+                <a:schemeClr val="dk2"/>
+              </a:buClr>
+              <a:buSzPts val="1400"/>
+              <a:buChar char="○"/>
+              <a:defRPr>
+                <a:solidFill>
+                  <a:schemeClr val="dk2"/>
+                </a:solidFill>
+              </a:defRPr>
+            </a:lvl5pPr>
+            <a:lvl6pPr indent="-317500" lvl="5" marL="2743200">
+              <a:lnSpc>
+                <a:spcPct val="115000"/>
+              </a:lnSpc>
+              <a:spcBef>
+                <a:spcPts val="0"/>
+              </a:spcBef>
+              <a:spcAft>
+                <a:spcPts val="0"/>
+              </a:spcAft>
+              <a:buClr>
+                <a:schemeClr val="dk2"/>
+              </a:buClr>
+              <a:buSzPts val="1400"/>
+              <a:buChar char="■"/>
+              <a:defRPr>
+                <a:solidFill>
+                  <a:schemeClr val="dk2"/>
+                </a:solidFill>
+              </a:defRPr>
+            </a:lvl6pPr>
+            <a:lvl7pPr indent="-317500" lvl="6" marL="3200400">
+              <a:lnSpc>
+                <a:spcPct val="115000"/>
+              </a:lnSpc>
+              <a:spcBef>
+                <a:spcPts val="0"/>
+              </a:spcBef>
+              <a:spcAft>
+                <a:spcPts val="0"/>
+              </a:spcAft>
+              <a:buClr>
+                <a:schemeClr val="dk2"/>
+              </a:buClr>
+              <a:buSzPts val="1400"/>
+              <a:buChar char="●"/>
+              <a:defRPr>
+                <a:solidFill>
+                  <a:schemeClr val="dk2"/>
+                </a:solidFill>
+              </a:defRPr>
+            </a:lvl7pPr>
+            <a:lvl8pPr indent="-317500" lvl="7" marL="3657600">
+              <a:lnSpc>
+                <a:spcPct val="115000"/>
+              </a:lnSpc>
+              <a:spcBef>
+                <a:spcPts val="0"/>
+              </a:spcBef>
+              <a:spcAft>
+                <a:spcPts val="0"/>
+              </a:spcAft>
+              <a:buClr>
+                <a:schemeClr val="dk2"/>
+              </a:buClr>
+              <a:buSzPts val="1400"/>
+              <a:buChar char="○"/>
+              <a:defRPr>
+                <a:solidFill>
+                  <a:schemeClr val="dk2"/>
+                </a:solidFill>
+              </a:defRPr>
+            </a:lvl8pPr>
+            <a:lvl9pPr indent="-317500" lvl="8" marL="4114800">
+              <a:lnSpc>
+                <a:spcPct val="115000"/>
+              </a:lnSpc>
+              <a:spcBef>
+                <a:spcPts val="0"/>
+              </a:spcBef>
+              <a:spcAft>
+                <a:spcPts val="0"/>
+              </a:spcAft>
+              <a:buClr>
+                <a:schemeClr val="dk2"/>
+              </a:buClr>
+              <a:buSzPts val="1400"/>
+              <a:buChar char="■"/>
+              <a:defRPr>
+                <a:solidFill>
+                  <a:schemeClr val="dk2"/>
+                </a:solidFill>
+              </a:defRPr>
+            </a:lvl9pPr>
+          </a:lstStyle>
+          <a:p/>
+        </p:txBody>
+      </p:sp>
+      <p:sp>
+        <p:nvSpPr>
+          <p:cNvPr id="53" name="Google Shape;53;p13"/>
+          <p:cNvSpPr txBox="1"/>
+          <p:nvPr>
+            <p:ph idx="12" type="sldNum"/>
+          </p:nvPr>
+        </p:nvSpPr>
+        <p:spPr>
+          <a:xfrm>
+            <a:off x="8472458" y="4663217"/>
+            <a:ext cx="548700" cy="393600"/>
+          </a:xfrm>
+          <a:prstGeom prst="rect">
+            <a:avLst/>
+          </a:prstGeom>
+          <a:noFill/>
+          <a:ln>
+            <a:noFill/>
+          </a:ln>
+        </p:spPr>
+        <p:txBody>
+          <a:bodyPr anchorCtr="0" anchor="ctr" bIns="91425" lIns="91425" spcFirstLastPara="1" rIns="91425" wrap="square" tIns="91425">
+            <a:normAutofit/>
+          </a:bodyPr>
+          <a:lstStyle>
+            <a:lvl1pPr lvl="0" algn="r">
+              <a:buNone/>
+              <a:defRPr sz="1000">
+                <a:solidFill>
+                  <a:schemeClr val="dk2"/>
+                </a:solidFill>
+              </a:defRPr>
+            </a:lvl1pPr>
+            <a:lvl2pPr lvl="1" algn="r">
+              <a:buNone/>
+              <a:defRPr sz="1000">
+                <a:solidFill>
+                  <a:schemeClr val="dk2"/>
+                </a:solidFill>
+              </a:defRPr>
+            </a:lvl2pPr>
+            <a:lvl3pPr lvl="2" algn="r">
+              <a:buNone/>
+              <a:defRPr sz="1000">
+                <a:solidFill>
+                  <a:schemeClr val="dk2"/>
+                </a:solidFill>
+              </a:defRPr>
+            </a:lvl3pPr>
+            <a:lvl4pPr lvl="3" algn="r">
+              <a:buNone/>
+              <a:defRPr sz="1000">
+                <a:solidFill>
+                  <a:schemeClr val="dk2"/>
+                </a:solidFill>
+              </a:defRPr>
+            </a:lvl4pPr>
+            <a:lvl5pPr lvl="4" algn="r">
+              <a:buNone/>
+              <a:defRPr sz="1000">
+                <a:solidFill>
+                  <a:schemeClr val="dk2"/>
+                </a:solidFill>
+              </a:defRPr>
+            </a:lvl5pPr>
+            <a:lvl6pPr lvl="5" algn="r">
+              <a:buNone/>
+              <a:defRPr sz="1000">
+                <a:solidFill>
+                  <a:schemeClr val="dk2"/>
+                </a:solidFill>
+              </a:defRPr>
+            </a:lvl6pPr>
+            <a:lvl7pPr lvl="6" algn="r">
+              <a:buNone/>
+              <a:defRPr sz="1000">
+                <a:solidFill>
+                  <a:schemeClr val="dk2"/>
+                </a:solidFill>
+              </a:defRPr>
+            </a:lvl7pPr>
+            <a:lvl8pPr lvl="7" algn="r">
+              <a:buNone/>
+              <a:defRPr sz="1000">
+                <a:solidFill>
+                  <a:schemeClr val="dk2"/>
+                </a:solidFill>
+              </a:defRPr>
+            </a:lvl8pPr>
+            <a:lvl9pPr lvl="8" algn="r">
+              <a:buNone/>
+              <a:defRPr sz="1000">
+                <a:solidFill>
+                  <a:schemeClr val="dk2"/>
+                </a:solidFill>
+              </a:defRPr>
+            </a:lvl9pPr>
+          </a:lstStyle>
+          <a:p>
+            <a:pPr indent="0" lvl="0" marL="0" rtl="0" algn="r">
+              <a:spcBef>
+                <a:spcPts val="0"/>
+              </a:spcBef>
+              <a:spcAft>
+                <a:spcPts val="0"/>
+              </a:spcAft>
+              <a:buNone/>
+            </a:pPr>
+            <a:fld id="{00000000-1234-1234-1234-123412341234}" type="slidenum">
+              <a:rPr lang="es"/>
+              <a:t>‹#›</a:t>
+            </a:fld>
+            <a:endParaRPr/>
+          </a:p>
+        </p:txBody>
+      </p:sp>
+    </p:spTree>
+  </p:cSld>
+  <p:clrMap accent1="accent1" accent2="accent2" accent3="accent3" accent4="accent4" accent5="accent5" accent6="accent6" bg1="lt1" bg2="dk2" tx1="dk1" tx2="lt2" folHlink="folHlink" hlink="hlink"/>
+  <p:sldLayoutIdLst>
+    <p:sldLayoutId id="2147483659" r:id="rId1"/>
+    <p:sldLayoutId id="2147483660" r:id="rId2"/>
+    <p:sldLayoutId id="2147483661" r:id="rId3"/>
+    <p:sldLayoutId id="2147483662" r:id="rId4"/>
+    <p:sldLayoutId id="2147483663" r:id="rId5"/>
+    <p:sldLayoutId id="2147483664" r:id="rId6"/>
+    <p:sldLayoutId id="2147483665" r:id="rId7"/>
+    <p:sldLayoutId id="2147483666" r:id="rId8"/>
+    <p:sldLayoutId id="2147483667" r:id="rId9"/>
+    <p:sldLayoutId id="2147483668" r:id="rId10"/>
+    <p:sldLayoutId id="2147483669" r:id="rId11"/>
+  </p:sldLayoutIdLst>
+  <p:hf dt="0" ftr="0" hdr="0"/>
+  <p:txStyles>
+    <p:titleStyle>
+      <a:defPPr lvl="0" marR="0" rtl="0" algn="l">
+        <a:lnSpc>
+          <a:spcPct val="100000"/>
+        </a:lnSpc>
+        <a:spcBef>
+          <a:spcPts val="0"/>
+        </a:spcBef>
+        <a:spcAft>
+          <a:spcPts val="0"/>
+        </a:spcAft>
+      </a:defPPr>
+      <a:lvl1pPr lvl="0" marR="0" rtl="0" algn="l">
+        <a:lnSpc>
+          <a:spcPct val="100000"/>
+        </a:lnSpc>
+        <a:spcBef>
+          <a:spcPts val="0"/>
+        </a:spcBef>
+        <a:spcAft>
+          <a:spcPts val="0"/>
+        </a:spcAft>
+        <a:buClr>
+          <a:srgbClr val="000000"/>
+        </a:buClr>
+        <a:buFont typeface="Arial"/>
+        <a:defRPr b="0" i="0" spc="0" sz="1400" u="none" cap="none" strike="noStrike">
+          <a:solidFill>
+            <a:srgbClr val="000000"/>
+          </a:solidFill>
+          <a:latin typeface="Arial"/>
+          <a:ea typeface="Arial"/>
+          <a:cs typeface="Arial"/>
+          <a:sym typeface="Arial"/>
+        </a:defRPr>
+      </a:lvl1pPr>
+      <a:lvl2pPr lvl="1" marR="0" rtl="0" algn="l">
+        <a:lnSpc>
+          <a:spcPct val="100000"/>
+        </a:lnSpc>
+        <a:spcBef>
+          <a:spcPts val="0"/>
+        </a:spcBef>
+        <a:spcAft>
+          <a:spcPts val="0"/>
+        </a:spcAft>
+        <a:buClr>
+          <a:srgbClr val="000000"/>
+        </a:buClr>
+        <a:buFont typeface="Arial"/>
+        <a:defRPr b="0" i="0" spc="0" sz="1400" u="none" cap="none" strike="noStrike">
+          <a:solidFill>
+            <a:srgbClr val="000000"/>
+          </a:solidFill>
+          <a:latin typeface="Arial"/>
+          <a:ea typeface="Arial"/>
+          <a:cs typeface="Arial"/>
+          <a:sym typeface="Arial"/>
+        </a:defRPr>
+      </a:lvl2pPr>
+      <a:lvl3pPr lvl="2" marR="0" rtl="0" algn="l">
+        <a:lnSpc>
+          <a:spcPct val="100000"/>
+        </a:lnSpc>
+        <a:spcBef>
+          <a:spcPts val="0"/>
+        </a:spcBef>
+        <a:spcAft>
+          <a:spcPts val="0"/>
+        </a:spcAft>
+        <a:buClr>
+          <a:srgbClr val="000000"/>
+        </a:buClr>
+        <a:buFont typeface="Arial"/>
+        <a:defRPr b="0" i="0" spc="0" sz="1400" u="none" cap="none" strike="noStrike">
+          <a:solidFill>
+            <a:srgbClr val="000000"/>
+          </a:solidFill>
+          <a:latin typeface="Arial"/>
+          <a:ea typeface="Arial"/>
+          <a:cs typeface="Arial"/>
+          <a:sym typeface="Arial"/>
+        </a:defRPr>
+      </a:lvl3pPr>
+      <a:lvl4pPr lvl="3" marR="0" rtl="0" algn="l">
+        <a:lnSpc>
+          <a:spcPct val="100000"/>
+        </a:lnSpc>
+        <a:spcBef>
+          <a:spcPts val="0"/>
+        </a:spcBef>
+        <a:spcAft>
+          <a:spcPts val="0"/>
+        </a:spcAft>
+        <a:buClr>
+          <a:srgbClr val="000000"/>
+        </a:buClr>
+        <a:buFont typeface="Arial"/>
+        <a:defRPr b="0" i="0" spc="0" sz="1400" u="none" cap="none" strike="noStrike">
+          <a:solidFill>
+            <a:srgbClr val="000000"/>
+          </a:solidFill>
+          <a:latin typeface="Arial"/>
+          <a:ea typeface="Arial"/>
+          <a:cs typeface="Arial"/>
+          <a:sym typeface="Arial"/>
+        </a:defRPr>
+      </a:lvl4pPr>
+      <a:lvl5pPr lvl="4" marR="0" rtl="0" algn="l">
+        <a:lnSpc>
+          <a:spcPct val="100000"/>
+        </a:lnSpc>
+        <a:spcBef>
+          <a:spcPts val="0"/>
+        </a:spcBef>
+        <a:spcAft>
+          <a:spcPts val="0"/>
+        </a:spcAft>
+        <a:buClr>
+          <a:srgbClr val="000000"/>
+        </a:buClr>
+        <a:buFont typeface="Arial"/>
+        <a:defRPr b="0" i="0" spc="0" sz="1400" u="none" cap="none" strike="noStrike">
+          <a:solidFill>
+            <a:srgbClr val="000000"/>
+          </a:solidFill>
+          <a:latin typeface="Arial"/>
+          <a:ea typeface="Arial"/>
+          <a:cs typeface="Arial"/>
+          <a:sym typeface="Arial"/>
+        </a:defRPr>
+      </a:lvl5pPr>
+      <a:lvl6pPr lvl="5" marR="0" rtl="0" algn="l">
+        <a:lnSpc>
+          <a:spcPct val="100000"/>
+        </a:lnSpc>
+        <a:spcBef>
+          <a:spcPts val="0"/>
+        </a:spcBef>
+        <a:spcAft>
+          <a:spcPts val="0"/>
+        </a:spcAft>
+        <a:buClr>
+          <a:srgbClr val="000000"/>
+        </a:buClr>
+        <a:buFont typeface="Arial"/>
+        <a:defRPr b="0" i="0" spc="0" sz="1400" u="none" cap="none" strike="noStrike">
+          <a:solidFill>
+            <a:srgbClr val="000000"/>
+          </a:solidFill>
+          <a:latin typeface="Arial"/>
+          <a:ea typeface="Arial"/>
+          <a:cs typeface="Arial"/>
+          <a:sym typeface="Arial"/>
+        </a:defRPr>
+      </a:lvl6pPr>
+      <a:lvl7pPr lvl="6" marR="0" rtl="0" algn="l">
+        <a:lnSpc>
+          <a:spcPct val="100000"/>
+        </a:lnSpc>
+        <a:spcBef>
+          <a:spcPts val="0"/>
+        </a:spcBef>
+        <a:spcAft>
+          <a:spcPts val="0"/>
+        </a:spcAft>
+        <a:buClr>
+          <a:srgbClr val="000000"/>
+        </a:buClr>
+        <a:buFont typeface="Arial"/>
+        <a:defRPr b="0" i="0" spc="0" sz="1400" u="none" cap="none" strike="noStrike">
+          <a:solidFill>
+            <a:srgbClr val="000000"/>
+          </a:solidFill>
+          <a:latin typeface="Arial"/>
+          <a:ea typeface="Arial"/>
+          <a:cs typeface="Arial"/>
+          <a:sym typeface="Arial"/>
+        </a:defRPr>
+      </a:lvl7pPr>
+      <a:lvl8pPr lvl="7" marR="0" rtl="0" algn="l">
+        <a:lnSpc>
+          <a:spcPct val="100000"/>
+        </a:lnSpc>
+        <a:spcBef>
+          <a:spcPts val="0"/>
+        </a:spcBef>
+        <a:spcAft>
+          <a:spcPts val="0"/>
+        </a:spcAft>
+        <a:buClr>
+          <a:srgbClr val="000000"/>
+        </a:buClr>
+        <a:buFont typeface="Arial"/>
+        <a:defRPr b="0" i="0" spc="0" sz="1400" u="none" cap="none" strike="noStrike">
+          <a:solidFill>
+            <a:srgbClr val="000000"/>
+          </a:solidFill>
+          <a:latin typeface="Arial"/>
+          <a:ea typeface="Arial"/>
+          <a:cs typeface="Arial"/>
+          <a:sym typeface="Arial"/>
+        </a:defRPr>
+      </a:lvl8pPr>
+      <a:lvl9pPr lvl="8" marR="0" rtl="0" algn="l">
+        <a:lnSpc>
+          <a:spcPct val="100000"/>
+        </a:lnSpc>
+        <a:spcBef>
+          <a:spcPts val="0"/>
+        </a:spcBef>
+        <a:spcAft>
+          <a:spcPts val="0"/>
+        </a:spcAft>
+        <a:buClr>
+          <a:srgbClr val="000000"/>
+        </a:buClr>
+        <a:buFont typeface="Arial"/>
+        <a:defRPr b="0" i="0" spc="0" sz="1400" u="none" cap="none" strike="noStrike">
+          <a:solidFill>
+            <a:srgbClr val="000000"/>
+          </a:solidFill>
+          <a:latin typeface="Arial"/>
+          <a:ea typeface="Arial"/>
+          <a:cs typeface="Arial"/>
+          <a:sym typeface="Arial"/>
+        </a:defRPr>
+      </a:lvl9pPr>
+    </p:titleStyle>
+    <p:bodyStyle>
+      <a:defPPr lvl="0" marR="0" rtl="0" algn="l">
+        <a:lnSpc>
+          <a:spcPct val="100000"/>
+        </a:lnSpc>
+        <a:spcBef>
+          <a:spcPts val="0"/>
+        </a:spcBef>
+        <a:spcAft>
+          <a:spcPts val="0"/>
+        </a:spcAft>
+      </a:defPPr>
+      <a:lvl1pPr lvl="0" marR="0" rtl="0" algn="l">
+        <a:lnSpc>
+          <a:spcPct val="100000"/>
+        </a:lnSpc>
+        <a:spcBef>
+          <a:spcPts val="0"/>
+        </a:spcBef>
+        <a:spcAft>
+          <a:spcPts val="0"/>
+        </a:spcAft>
+        <a:buClr>
+          <a:srgbClr val="000000"/>
+        </a:buClr>
+        <a:buFont typeface="Arial"/>
+        <a:defRPr b="0" i="0" spc="0" sz="1400" u="none" cap="none" strike="noStrike">
+          <a:solidFill>
+            <a:srgbClr val="000000"/>
+          </a:solidFill>
+          <a:latin typeface="Arial"/>
+          <a:ea typeface="Arial"/>
+          <a:cs typeface="Arial"/>
+          <a:sym typeface="Arial"/>
+        </a:defRPr>
+      </a:lvl1pPr>
+      <a:lvl2pPr lvl="1" marR="0" rtl="0" algn="l">
+        <a:lnSpc>
+          <a:spcPct val="100000"/>
+        </a:lnSpc>
+        <a:spcBef>
+          <a:spcPts val="0"/>
+        </a:spcBef>
+        <a:spcAft>
+          <a:spcPts val="0"/>
+        </a:spcAft>
+        <a:buClr>
+          <a:srgbClr val="000000"/>
+        </a:buClr>
+        <a:buFont typeface="Arial"/>
+        <a:defRPr b="0" i="0" spc="0" sz="1400" u="none" cap="none" strike="noStrike">
+          <a:solidFill>
+            <a:srgbClr val="000000"/>
+          </a:solidFill>
+          <a:latin typeface="Arial"/>
+          <a:ea typeface="Arial"/>
+          <a:cs typeface="Arial"/>
+          <a:sym typeface="Arial"/>
+        </a:defRPr>
+      </a:lvl2pPr>
+      <a:lvl3pPr lvl="2" marR="0" rtl="0" algn="l">
+        <a:lnSpc>
+          <a:spcPct val="100000"/>
+        </a:lnSpc>
+        <a:spcBef>
+          <a:spcPts val="0"/>
+        </a:spcBef>
+        <a:spcAft>
+          <a:spcPts val="0"/>
+        </a:spcAft>
+        <a:buClr>
+          <a:srgbClr val="000000"/>
+        </a:buClr>
+        <a:buFont typeface="Arial"/>
+        <a:defRPr b="0" i="0" spc="0" sz="1400" u="none" cap="none" strike="noStrike">
+          <a:solidFill>
+            <a:srgbClr val="000000"/>
+          </a:solidFill>
+          <a:latin typeface="Arial"/>
+          <a:ea typeface="Arial"/>
+          <a:cs typeface="Arial"/>
+          <a:sym typeface="Arial"/>
+        </a:defRPr>
+      </a:lvl3pPr>
+      <a:lvl4pPr lvl="3" marR="0" rtl="0" algn="l">
+        <a:lnSpc>
+          <a:spcPct val="100000"/>
+        </a:lnSpc>
+        <a:spcBef>
+          <a:spcPts val="0"/>
+        </a:spcBef>
+        <a:spcAft>
+          <a:spcPts val="0"/>
+        </a:spcAft>
+        <a:buClr>
+          <a:srgbClr val="000000"/>
+        </a:buClr>
+        <a:buFont typeface="Arial"/>
+        <a:defRPr b="0" i="0" spc="0" sz="1400" u="none" cap="none" strike="noStrike">
+          <a:solidFill>
+            <a:srgbClr val="000000"/>
+          </a:solidFill>
+          <a:latin typeface="Arial"/>
+          <a:ea typeface="Arial"/>
+          <a:cs typeface="Arial"/>
+          <a:sym typeface="Arial"/>
+        </a:defRPr>
+      </a:lvl4pPr>
+      <a:lvl5pPr lvl="4" marR="0" rtl="0" algn="l">
+        <a:lnSpc>
+          <a:spcPct val="100000"/>
+        </a:lnSpc>
+        <a:spcBef>
+          <a:spcPts val="0"/>
+        </a:spcBef>
+        <a:spcAft>
+          <a:spcPts val="0"/>
+        </a:spcAft>
+        <a:buClr>
+          <a:srgbClr val="000000"/>
+        </a:buClr>
+        <a:buFont typeface="Arial"/>
+        <a:defRPr b="0" i="0" spc="0" sz="1400" u="none" cap="none" strike="noStrike">
+          <a:solidFill>
+            <a:srgbClr val="000000"/>
+          </a:solidFill>
+          <a:latin typeface="Arial"/>
+          <a:ea typeface="Arial"/>
+          <a:cs typeface="Arial"/>
+          <a:sym typeface="Arial"/>
+        </a:defRPr>
+      </a:lvl5pPr>
+      <a:lvl6pPr lvl="5" marR="0" rtl="0" algn="l">
+        <a:lnSpc>
+          <a:spcPct val="100000"/>
+        </a:lnSpc>
+        <a:spcBef>
+          <a:spcPts val="0"/>
+        </a:spcBef>
+        <a:spcAft>
+          <a:spcPts val="0"/>
+        </a:spcAft>
+        <a:buClr>
+          <a:srgbClr val="000000"/>
+        </a:buClr>
+        <a:buFont typeface="Arial"/>
+        <a:defRPr b="0" i="0" spc="0" sz="1400" u="none" cap="none" strike="noStrike">
+          <a:solidFill>
+            <a:srgbClr val="000000"/>
+          </a:solidFill>
+          <a:latin typeface="Arial"/>
+          <a:ea typeface="Arial"/>
+          <a:cs typeface="Arial"/>
+          <a:sym typeface="Arial"/>
+        </a:defRPr>
+      </a:lvl6pPr>
+      <a:lvl7pPr lvl="6" marR="0" rtl="0" algn="l">
+        <a:lnSpc>
+          <a:spcPct val="100000"/>
+        </a:lnSpc>
+        <a:spcBef>
+          <a:spcPts val="0"/>
+        </a:spcBef>
+        <a:spcAft>
+          <a:spcPts val="0"/>
+        </a:spcAft>
+        <a:buClr>
+          <a:srgbClr val="000000"/>
+        </a:buClr>
+        <a:buFont typeface="Arial"/>
+        <a:defRPr b="0" i="0" spc="0" sz="1400" u="none" cap="none" strike="noStrike">
+          <a:solidFill>
+            <a:srgbClr val="000000"/>
+          </a:solidFill>
+          <a:latin typeface="Arial"/>
+          <a:ea typeface="Arial"/>
+          <a:cs typeface="Arial"/>
+          <a:sym typeface="Arial"/>
+        </a:defRPr>
+      </a:lvl7pPr>
+      <a:lvl8pPr lvl="7" marR="0" rtl="0" algn="l">
+        <a:lnSpc>
+          <a:spcPct val="100000"/>
+        </a:lnSpc>
+        <a:spcBef>
+          <a:spcPts val="0"/>
+        </a:spcBef>
+        <a:spcAft>
+          <a:spcPts val="0"/>
+        </a:spcAft>
+        <a:buClr>
+          <a:srgbClr val="000000"/>
+        </a:buClr>
+        <a:buFont typeface="Arial"/>
+        <a:defRPr b="0" i="0" spc="0" sz="1400" u="none" cap="none" strike="noStrike">
+          <a:solidFill>
+            <a:srgbClr val="000000"/>
+          </a:solidFill>
+          <a:latin typeface="Arial"/>
+          <a:ea typeface="Arial"/>
+          <a:cs typeface="Arial"/>
+          <a:sym typeface="Arial"/>
+        </a:defRPr>
+      </a:lvl8pPr>
+      <a:lvl9pPr lvl="8" marR="0" rtl="0" algn="l">
+        <a:lnSpc>
+          <a:spcPct val="100000"/>
+        </a:lnSpc>
+        <a:spcBef>
+          <a:spcPts val="0"/>
+        </a:spcBef>
+        <a:spcAft>
+          <a:spcPts val="0"/>
+        </a:spcAft>
+        <a:buClr>
+          <a:srgbClr val="000000"/>
+        </a:buClr>
+        <a:buFont typeface="Arial"/>
+        <a:defRPr b="0" i="0" spc="0" sz="1400" u="none" cap="none" strike="noStrike">
+          <a:solidFill>
+            <a:srgbClr val="000000"/>
+          </a:solidFill>
+          <a:latin typeface="Arial"/>
+          <a:ea typeface="Arial"/>
+          <a:cs typeface="Arial"/>
+          <a:sym typeface="Arial"/>
+        </a:defRPr>
+      </a:lvl9pPr>
+    </p:bodyStyle>
+    <p:otherStyle>
+      <a:defPPr lvl="0" marR="0" rtl="0" algn="l">
+        <a:lnSpc>
+          <a:spcPct val="100000"/>
+        </a:lnSpc>
+        <a:spcBef>
+          <a:spcPts val="0"/>
+        </a:spcBef>
+        <a:spcAft>
+          <a:spcPts val="0"/>
+        </a:spcAft>
+      </a:defPPr>
+      <a:lvl1pPr lvl="0" marR="0" rtl="0" algn="l">
+        <a:lnSpc>
+          <a:spcPct val="100000"/>
+        </a:lnSpc>
+        <a:spcBef>
+          <a:spcPts val="0"/>
+        </a:spcBef>
+        <a:spcAft>
+          <a:spcPts val="0"/>
+        </a:spcAft>
+        <a:buClr>
+          <a:srgbClr val="000000"/>
+        </a:buClr>
+        <a:buFont typeface="Arial"/>
+        <a:defRPr b="0" i="0" spc="0" sz="1400" u="none" cap="none" strike="noStrike">
+          <a:solidFill>
+            <a:srgbClr val="000000"/>
+          </a:solidFill>
+          <a:latin typeface="Arial"/>
+          <a:ea typeface="Arial"/>
+          <a:cs typeface="Arial"/>
+          <a:sym typeface="Arial"/>
+        </a:defRPr>
+      </a:lvl1pPr>
+      <a:lvl2pPr lvl="1" marR="0" rtl="0" algn="l">
+        <a:lnSpc>
+          <a:spcPct val="100000"/>
+        </a:lnSpc>
+        <a:spcBef>
+          <a:spcPts val="0"/>
+        </a:spcBef>
+        <a:spcAft>
+          <a:spcPts val="0"/>
+        </a:spcAft>
+        <a:buClr>
+          <a:srgbClr val="000000"/>
+        </a:buClr>
+        <a:buFont typeface="Arial"/>
+        <a:defRPr b="0" i="0" spc="0" sz="1400" u="none" cap="none" strike="noStrike">
+          <a:solidFill>
+            <a:srgbClr val="000000"/>
+          </a:solidFill>
+          <a:latin typeface="Arial"/>
+          <a:ea typeface="Arial"/>
+          <a:cs typeface="Arial"/>
+          <a:sym typeface="Arial"/>
+        </a:defRPr>
+      </a:lvl2pPr>
+      <a:lvl3pPr lvl="2" marR="0" rtl="0" algn="l">
+        <a:lnSpc>
+          <a:spcPct val="100000"/>
+        </a:lnSpc>
+        <a:spcBef>
+          <a:spcPts val="0"/>
+        </a:spcBef>
+        <a:spcAft>
+          <a:spcPts val="0"/>
+        </a:spcAft>
+        <a:buClr>
+          <a:srgbClr val="000000"/>
+        </a:buClr>
+        <a:buFont typeface="Arial"/>
+        <a:defRPr b="0" i="0" spc="0" sz="1400" u="none" cap="none" strike="noStrike">
+          <a:solidFill>
+            <a:srgbClr val="000000"/>
+          </a:solidFill>
+          <a:latin typeface="Arial"/>
+          <a:ea typeface="Arial"/>
+          <a:cs typeface="Arial"/>
+          <a:sym typeface="Arial"/>
+        </a:defRPr>
+      </a:lvl3pPr>
+      <a:lvl4pPr lvl="3" marR="0" rtl="0" algn="l">
+        <a:lnSpc>
+          <a:spcPct val="100000"/>
+        </a:lnSpc>
+        <a:spcBef>
+          <a:spcPts val="0"/>
+        </a:spcBef>
+        <a:spcAft>
+          <a:spcPts val="0"/>
+        </a:spcAft>
+        <a:buClr>
+          <a:srgbClr val="000000"/>
+        </a:buClr>
+        <a:buFont typeface="Arial"/>
+        <a:defRPr b="0" i="0" spc="0" sz="1400" u="none" cap="none" strike="noStrike">
+          <a:solidFill>
+            <a:srgbClr val="000000"/>
+          </a:solidFill>
+          <a:latin typeface="Arial"/>
+          <a:ea typeface="Arial"/>
+          <a:cs typeface="Arial"/>
+          <a:sym typeface="Arial"/>
+        </a:defRPr>
+      </a:lvl4pPr>
+      <a:lvl5pPr lvl="4" marR="0" rtl="0" algn="l">
+        <a:lnSpc>
+          <a:spcPct val="100000"/>
+        </a:lnSpc>
+        <a:spcBef>
+          <a:spcPts val="0"/>
+        </a:spcBef>
+        <a:spcAft>
+          <a:spcPts val="0"/>
+        </a:spcAft>
+        <a:buClr>
+          <a:srgbClr val="000000"/>
+        </a:buClr>
+        <a:buFont typeface="Arial"/>
+        <a:defRPr b="0" i="0" spc="0" sz="1400" u="none" cap="none" strike="noStrike">
+          <a:solidFill>
+            <a:srgbClr val="000000"/>
+          </a:solidFill>
+          <a:latin typeface="Arial"/>
+          <a:ea typeface="Arial"/>
+          <a:cs typeface="Arial"/>
+          <a:sym typeface="Arial"/>
+        </a:defRPr>
+      </a:lvl5pPr>
+      <a:lvl6pPr lvl="5" marR="0" rtl="0" algn="l">
+        <a:lnSpc>
+          <a:spcPct val="100000"/>
+        </a:lnSpc>
+        <a:spcBef>
+          <a:spcPts val="0"/>
+        </a:spcBef>
+        <a:spcAft>
+          <a:spcPts val="0"/>
+        </a:spcAft>
+        <a:buClr>
+          <a:srgbClr val="000000"/>
+        </a:buClr>
+        <a:buFont typeface="Arial"/>
+        <a:defRPr b="0" i="0" spc="0" sz="1400" u="none" cap="none" strike="noStrike">
+          <a:solidFill>
+            <a:srgbClr val="000000"/>
+          </a:solidFill>
+          <a:latin typeface="Arial"/>
+          <a:ea typeface="Arial"/>
+          <a:cs typeface="Arial"/>
+          <a:sym typeface="Arial"/>
+        </a:defRPr>
+      </a:lvl6pPr>
+      <a:lvl7pPr lvl="6" marR="0" rtl="0" algn="l">
+        <a:lnSpc>
+          <a:spcPct val="100000"/>
+        </a:lnSpc>
+        <a:spcBef>
+          <a:spcPts val="0"/>
+        </a:spcBef>
+        <a:spcAft>
+          <a:spcPts val="0"/>
+        </a:spcAft>
+        <a:buClr>
+          <a:srgbClr val="000000"/>
+        </a:buClr>
+        <a:buFont typeface="Arial"/>
+        <a:defRPr b="0" i="0" spc="0" sz="1400" u="none" cap="none" strike="noStrike">
+          <a:solidFill>
+            <a:srgbClr val="000000"/>
+          </a:solidFill>
+          <a:latin typeface="Arial"/>
+          <a:ea typeface="Arial"/>
+          <a:cs typeface="Arial"/>
+          <a:sym typeface="Arial"/>
+        </a:defRPr>
+      </a:lvl7pPr>
+      <a:lvl8pPr lvl="7" marR="0" rtl="0" algn="l">
+        <a:lnSpc>
+          <a:spcPct val="100000"/>
+        </a:lnSpc>
+        <a:spcBef>
+          <a:spcPts val="0"/>
+        </a:spcBef>
+        <a:spcAft>
+          <a:spcPts val="0"/>
+        </a:spcAft>
+        <a:buClr>
+          <a:srgbClr val="000000"/>
+        </a:buClr>
+        <a:buFont typeface="Arial"/>
+        <a:defRPr b="0" i="0" spc="0" sz="1400" u="none" cap="none" strike="noStrike">
+          <a:solidFill>
+            <a:srgbClr val="000000"/>
+          </a:solidFill>
+          <a:latin typeface="Arial"/>
+          <a:ea typeface="Arial"/>
+          <a:cs typeface="Arial"/>
+          <a:sym typeface="Arial"/>
+        </a:defRPr>
+      </a:lvl8pPr>
+      <a:lvl9pPr lvl="8" marR="0" rtl="0" algn="l">
+        <a:lnSpc>
+          <a:spcPct val="100000"/>
+        </a:lnSpc>
+        <a:spcBef>
+          <a:spcPts val="0"/>
+        </a:spcBef>
+        <a:spcAft>
+          <a:spcPts val="0"/>
+        </a:spcAft>
+        <a:buClr>
+          <a:srgbClr val="000000"/>
+        </a:buClr>
+        <a:buFont typeface="Arial"/>
+        <a:defRPr b="0" i="0" spc="0" sz="1400" u="none" cap="none" strike="noStrike">
+          <a:solidFill>
+            <a:srgbClr val="000000"/>
+          </a:solidFill>
+          <a:latin typeface="Arial"/>
+          <a:ea typeface="Arial"/>
+          <a:cs typeface="Arial"/>
+          <a:sym typeface="Arial"/>
+        </a:defRPr>
+      </a:lvl9pPr>
+    </p:otherStyle>
+  </p:txStyles>
+</p:sldMaster>
+</file>
+
+<file path=ppt/slides/slide1.xml><?xml version="1.0" encoding="utf-8"?>
+<p:sld xmlns:a="http://schemas.openxmlformats.org/drawingml/2006/main" xmlns:r="http://schemas.openxmlformats.org/officeDocument/2006/relationships" xmlns:mc="http://schemas.openxmlformats.org/markup-compatibility/2006" xmlns:mv="urn:schemas-microsoft-com:mac:vml" xmlns:p="http://schemas.openxmlformats.org/presentationml/2006/main" xmlns:c="http://schemas.openxmlformats.org/drawingml/2006/chart" xmlns:dgm="http://schemas.openxmlformats.org/drawingml/2006/diagram" xmlns:o="urn:schemas-microsoft-com:office:office" xmlns:v="urn:schemas-microsoft-com:vml" xmlns:pvml="urn:schemas-microsoft-com:office:powerpoint" xmlns:com="http://schemas.openxmlformats.org/drawingml/2006/compatibility" xmlns:p14="http://schemas.microsoft.com/office/powerpoint/2010/main" xmlns:p15="http://schemas.microsoft.com/office/powerpoint/2012/main" xmlns:ahyp="http://schemas.microsoft.com/office/drawing/2018/hyperlinkcolor">
+  <p:cSld>
+    <p:spTree>
+      <p:nvGrpSpPr>
+        <p:cNvPr id="98" name="Shape 98"/>
+        <p:cNvGrpSpPr/>
+        <p:nvPr/>
+      </p:nvGrpSpPr>
+      <p:grpSpPr>
+        <a:xfrm>
+          <a:off x="0" y="0"/>
+          <a:ext cx="0" cy="0"/>
+          <a:chOff x="0" y="0"/>
+          <a:chExt cx="0" cy="0"/>
+        </a:xfrm>
+      </p:grpSpPr>
+      <p:sp>
+        <p:nvSpPr>
+          <p:cNvPr id="99" name="Google Shape;99;p25"/>
           <p:cNvSpPr txBox="1"/>
           <p:nvPr>
             <p:ph type="ctrTitle"/>
@@ -8422,7 +13072,7 @@
       </p:sp>
       <p:sp>
         <p:nvSpPr>
-          <p:cNvPr id="55" name="Google Shape;55;p13"/>
+          <p:cNvPr id="100" name="Google Shape;100;p25"/>
           <p:cNvSpPr txBox="1"/>
           <p:nvPr>
             <p:ph idx="1" type="subTitle"/>
@@ -8459,16 +13109,7 @@
                 <a:cs typeface="EB Garamond"/>
                 <a:sym typeface="EB Garamond"/>
               </a:rPr>
-              <a:t>Clase 04: Unidad II. </a:t>
-            </a:r>
-            <a:r>
-              <a:rPr lang="es" sz="2600">
-                <a:latin typeface="EB Garamond"/>
-                <a:ea typeface="EB Garamond"/>
-                <a:cs typeface="EB Garamond"/>
-                <a:sym typeface="EB Garamond"/>
-              </a:rPr>
-              <a:t>La estadística en el contexto de la investigación social</a:t>
+              <a:t>Clase 04: Unidad II. La estadística en el contexto de la investigación social</a:t>
             </a:r>
             <a:endParaRPr sz="2600">
               <a:latin typeface="EB Garamond"/>
@@ -8481,7 +13122,7 @@
       </p:sp>
       <p:sp>
         <p:nvSpPr>
-          <p:cNvPr id="56" name="Google Shape;56;p13"/>
+          <p:cNvPr id="101" name="Google Shape;101;p25"/>
           <p:cNvSpPr txBox="1"/>
           <p:nvPr>
             <p:ph idx="1" type="subTitle"/>
@@ -8597,7 +13238,7 @@
       </p:sp>
       <p:sp>
         <p:nvSpPr>
-          <p:cNvPr id="57" name="Google Shape;57;p13"/>
+          <p:cNvPr id="102" name="Google Shape;102;p25"/>
           <p:cNvSpPr txBox="1"/>
           <p:nvPr>
             <p:ph idx="1" type="subTitle"/>
@@ -8614,7 +13255,7 @@
         </p:spPr>
         <p:txBody>
           <a:bodyPr anchorCtr="0" anchor="t" bIns="91425" lIns="91425" spcFirstLastPara="1" rIns="91425" wrap="square" tIns="91425">
-            <a:normAutofit lnSpcReduction="10000"/>
+            <a:normAutofit/>
           </a:bodyPr>
           <a:lstStyle/>
           <a:p>
@@ -8628,11 +13269,7 @@
               <a:spcAft>
                 <a:spcPts val="0"/>
               </a:spcAft>
-              <a:buClr>
-                <a:schemeClr val="dk1"/>
-              </a:buClr>
               <a:buSzPts val="1018"/>
-              <a:buFont typeface="Arial"/>
               <a:buNone/>
             </a:pPr>
             <a:r>
@@ -8662,11 +13299,7 @@
               <a:spcAft>
                 <a:spcPts val="0"/>
               </a:spcAft>
-              <a:buClr>
-                <a:schemeClr val="dk1"/>
-              </a:buClr>
               <a:buSzPts val="1018"/>
-              <a:buFont typeface="Arial"/>
               <a:buNone/>
             </a:pPr>
             <a:r>
@@ -8676,7 +13309,7 @@
                 <a:cs typeface="EB Garamond"/>
                 <a:sym typeface="EB Garamond"/>
               </a:rPr>
-              <a:t>Ayudante: María Fernanda Núñez</a:t>
+              <a:t>Ayudante: Katherine Aravena Herrera</a:t>
             </a:r>
             <a:endParaRPr sz="1405">
               <a:latin typeface="EB Garamond"/>
@@ -8696,11 +13329,7 @@
               <a:spcAft>
                 <a:spcPts val="0"/>
               </a:spcAft>
-              <a:buClr>
-                <a:schemeClr val="dk1"/>
-              </a:buClr>
               <a:buSzPts val="1018"/>
-              <a:buFont typeface="Arial"/>
               <a:buNone/>
             </a:pPr>
             <a:r>
@@ -8710,31 +13339,7 @@
                 <a:cs typeface="EB Garamond"/>
                 <a:sym typeface="EB Garamond"/>
               </a:rPr>
-              <a:t>2do semestre 2025</a:t>
-            </a:r>
-            <a:endParaRPr sz="1405">
-              <a:latin typeface="EB Garamond"/>
-              <a:ea typeface="EB Garamond"/>
-              <a:cs typeface="EB Garamond"/>
-              <a:sym typeface="EB Garamond"/>
-            </a:endParaRPr>
-          </a:p>
-          <a:p>
-            <a:pPr indent="0" lvl="0" marL="0" rtl="0" algn="r">
-              <a:lnSpc>
-                <a:spcPct val="80000"/>
-              </a:lnSpc>
-              <a:spcBef>
-                <a:spcPts val="0"/>
-              </a:spcBef>
-              <a:spcAft>
-                <a:spcPts val="0"/>
-              </a:spcAft>
-              <a:buSzPts val="1018"/>
-              <a:buNone/>
-            </a:pPr>
-            <a:r>
-              <a:t/>
+              <a:t>2do semestre 2026</a:t>
             </a:r>
             <a:endParaRPr sz="1405">
               <a:latin typeface="EB Garamond"/>
@@ -8747,7 +13352,7 @@
       </p:sp>
       <p:pic>
         <p:nvPicPr>
-          <p:cNvPr id="58" name="Google Shape;58;p13" title="UDP_LogoRGB_2lineas_Color_SinFondo.png"/>
+          <p:cNvPr id="103" name="Google Shape;103;p25" title="UDP_LogoRGB_2lineas_Color_SinFondo.png"/>
           <p:cNvPicPr preferRelativeResize="0"/>
           <p:nvPr/>
         </p:nvPicPr>
@@ -8786,7 +13391,7 @@
   <p:cSld>
     <p:spTree>
       <p:nvGrpSpPr>
-        <p:cNvPr id="148" name="Shape 148"/>
+        <p:cNvPr id="193" name="Shape 193"/>
         <p:cNvGrpSpPr/>
         <p:nvPr/>
       </p:nvGrpSpPr>
@@ -8800,7 +13405,7 @@
       </p:grpSpPr>
       <p:sp>
         <p:nvSpPr>
-          <p:cNvPr id="149" name="Google Shape;149;p22"/>
+          <p:cNvPr id="194" name="Google Shape;194;p34"/>
           <p:cNvSpPr txBox="1"/>
           <p:nvPr>
             <p:ph type="title"/>
@@ -8859,7 +13464,7 @@
       </p:sp>
       <p:sp>
         <p:nvSpPr>
-          <p:cNvPr id="150" name="Google Shape;150;p22"/>
+          <p:cNvPr id="195" name="Google Shape;195;p34"/>
           <p:cNvSpPr txBox="1"/>
           <p:nvPr>
             <p:ph idx="12" type="sldNum"/>
@@ -8899,7 +13504,7 @@
       </p:sp>
       <p:grpSp>
         <p:nvGrpSpPr>
-          <p:cNvPr id="151" name="Google Shape;151;p22"/>
+          <p:cNvPr id="196" name="Google Shape;196;p34"/>
           <p:cNvGrpSpPr/>
           <p:nvPr/>
         </p:nvGrpSpPr>
@@ -8913,7 +13518,7 @@
         </p:grpSpPr>
         <p:sp>
           <p:nvSpPr>
-            <p:cNvPr id="152" name="Google Shape;152;p22"/>
+            <p:cNvPr id="197" name="Google Shape;197;p34"/>
             <p:cNvSpPr/>
             <p:nvPr/>
           </p:nvSpPr>
@@ -8966,7 +13571,7 @@
         </p:sp>
         <p:sp>
           <p:nvSpPr>
-            <p:cNvPr id="153" name="Google Shape;153;p22"/>
+            <p:cNvPr id="198" name="Google Shape;198;p34"/>
             <p:cNvSpPr/>
             <p:nvPr/>
           </p:nvSpPr>
@@ -9017,7 +13622,7 @@
         </p:sp>
         <p:sp>
           <p:nvSpPr>
-            <p:cNvPr id="154" name="Google Shape;154;p22"/>
+            <p:cNvPr id="199" name="Google Shape;199;p34"/>
             <p:cNvSpPr txBox="1"/>
             <p:nvPr/>
           </p:nvSpPr>
@@ -9078,7 +13683,7 @@
         </p:sp>
         <p:sp>
           <p:nvSpPr>
-            <p:cNvPr id="155" name="Google Shape;155;p22"/>
+            <p:cNvPr id="200" name="Google Shape;200;p34"/>
             <p:cNvSpPr/>
             <p:nvPr/>
           </p:nvSpPr>
@@ -9131,7 +13736,7 @@
         </p:sp>
         <p:sp>
           <p:nvSpPr>
-            <p:cNvPr id="156" name="Google Shape;156;p22"/>
+            <p:cNvPr id="201" name="Google Shape;201;p34"/>
             <p:cNvSpPr/>
             <p:nvPr/>
           </p:nvSpPr>
@@ -9182,7 +13787,7 @@
         </p:sp>
         <p:sp>
           <p:nvSpPr>
-            <p:cNvPr id="157" name="Google Shape;157;p22"/>
+            <p:cNvPr id="202" name="Google Shape;202;p34"/>
             <p:cNvSpPr txBox="1"/>
             <p:nvPr/>
           </p:nvSpPr>
@@ -9243,7 +13848,7 @@
         </p:sp>
         <p:sp>
           <p:nvSpPr>
-            <p:cNvPr id="158" name="Google Shape;158;p22"/>
+            <p:cNvPr id="203" name="Google Shape;203;p34"/>
             <p:cNvSpPr/>
             <p:nvPr/>
           </p:nvSpPr>
@@ -9294,7 +13899,7 @@
         </p:sp>
         <p:sp>
           <p:nvSpPr>
-            <p:cNvPr id="159" name="Google Shape;159;p22"/>
+            <p:cNvPr id="204" name="Google Shape;204;p34"/>
             <p:cNvSpPr txBox="1"/>
             <p:nvPr/>
           </p:nvSpPr>
@@ -9367,7 +13972,7 @@
   <p:cSld>
     <p:spTree>
       <p:nvGrpSpPr>
-        <p:cNvPr id="163" name="Shape 163"/>
+        <p:cNvPr id="208" name="Shape 208"/>
         <p:cNvGrpSpPr/>
         <p:nvPr/>
       </p:nvGrpSpPr>
@@ -9381,7 +13986,7 @@
       </p:grpSpPr>
       <p:sp>
         <p:nvSpPr>
-          <p:cNvPr id="164" name="Google Shape;164;p23"/>
+          <p:cNvPr id="209" name="Google Shape;209;p35"/>
           <p:cNvSpPr txBox="1"/>
           <p:nvPr>
             <p:ph type="title"/>
@@ -9431,7 +14036,7 @@
       </p:sp>
       <p:sp>
         <p:nvSpPr>
-          <p:cNvPr id="165" name="Google Shape;165;p23"/>
+          <p:cNvPr id="210" name="Google Shape;210;p35"/>
           <p:cNvSpPr txBox="1"/>
           <p:nvPr>
             <p:ph idx="12" type="sldNum"/>
@@ -9471,7 +14076,7 @@
       </p:sp>
       <p:pic>
         <p:nvPicPr>
-          <p:cNvPr descr="Tabla&#10;&#10;Descripción generada automáticamente" id="166" name="Google Shape;166;p23"/>
+          <p:cNvPr descr="Tabla&#10;&#10;Descripción generada automáticamente" id="211" name="Google Shape;211;p35"/>
           <p:cNvPicPr preferRelativeResize="0"/>
           <p:nvPr/>
         </p:nvPicPr>
@@ -9498,7 +14103,7 @@
       </p:pic>
       <p:pic>
         <p:nvPicPr>
-          <p:cNvPr descr="Interfaz de usuario gráfica, Aplicación, Tabla, Excel&#10;&#10;Descripción generada automáticamente" id="167" name="Google Shape;167;p23"/>
+          <p:cNvPr descr="Interfaz de usuario gráfica, Aplicación, Tabla, Excel&#10;&#10;Descripción generada automáticamente" id="212" name="Google Shape;212;p35"/>
           <p:cNvPicPr preferRelativeResize="0"/>
           <p:nvPr/>
         </p:nvPicPr>
@@ -9525,7 +14130,7 @@
       </p:pic>
       <p:pic>
         <p:nvPicPr>
-          <p:cNvPr descr="Interfaz de usuario gráfica, Texto, Aplicación, Correo electrónico&#10;&#10;Descripción generada automáticamente" id="168" name="Google Shape;168;p23"/>
+          <p:cNvPr descr="Interfaz de usuario gráfica, Texto, Aplicación, Correo electrónico&#10;&#10;Descripción generada automáticamente" id="213" name="Google Shape;213;p35"/>
           <p:cNvPicPr preferRelativeResize="0"/>
           <p:nvPr/>
         </p:nvPicPr>
@@ -9563,7 +14168,7 @@
   <p:cSld>
     <p:spTree>
       <p:nvGrpSpPr>
-        <p:cNvPr id="172" name="Shape 172"/>
+        <p:cNvPr id="217" name="Shape 217"/>
         <p:cNvGrpSpPr/>
         <p:nvPr/>
       </p:nvGrpSpPr>
@@ -9577,7 +14182,7 @@
       </p:grpSpPr>
       <p:sp>
         <p:nvSpPr>
-          <p:cNvPr id="173" name="Google Shape;173;p24"/>
+          <p:cNvPr id="218" name="Google Shape;218;p36"/>
           <p:cNvSpPr txBox="1"/>
           <p:nvPr>
             <p:ph type="title"/>
@@ -9667,7 +14272,7 @@
       </p:sp>
       <p:sp>
         <p:nvSpPr>
-          <p:cNvPr id="174" name="Google Shape;174;p24"/>
+          <p:cNvPr id="219" name="Google Shape;219;p36"/>
           <p:cNvSpPr txBox="1"/>
           <p:nvPr>
             <p:ph idx="12" type="sldNum"/>
@@ -9707,7 +14312,7 @@
       </p:sp>
       <p:sp>
         <p:nvSpPr>
-          <p:cNvPr id="175" name="Google Shape;175;p24"/>
+          <p:cNvPr id="220" name="Google Shape;220;p36"/>
           <p:cNvSpPr txBox="1"/>
           <p:nvPr>
             <p:ph idx="1" type="body"/>
@@ -9757,7 +14362,7 @@
       </p:sp>
       <p:graphicFrame>
         <p:nvGraphicFramePr>
-          <p:cNvPr id="176" name="Google Shape;176;p24"/>
+          <p:cNvPr id="221" name="Google Shape;221;p36"/>
           <p:cNvGraphicFramePr/>
           <p:nvPr/>
         </p:nvGraphicFramePr>
@@ -9770,7 +14375,7 @@
             <a:tbl>
               <a:tblPr bandRow="1" firstRow="1">
                 <a:noFill/>
-                <a:tableStyleId>{D489E30B-2129-4DD7-8682-40727AD94D1E}</a:tableStyleId>
+                <a:tableStyleId>{BB5985F3-8DD7-48AF-B3DD-B0399FADE051}</a:tableStyleId>
               </a:tblPr>
               <a:tblGrid>
                 <a:gridCol w="643525"/>
@@ -10622,7 +15227,7 @@
       </p:graphicFrame>
       <p:sp>
         <p:nvSpPr>
-          <p:cNvPr id="177" name="Google Shape;177;p24"/>
+          <p:cNvPr id="222" name="Google Shape;222;p36"/>
           <p:cNvSpPr txBox="1"/>
           <p:nvPr/>
         </p:nvSpPr>
@@ -10787,7 +15392,7 @@
   <p:cSld>
     <p:spTree>
       <p:nvGrpSpPr>
-        <p:cNvPr id="181" name="Shape 181"/>
+        <p:cNvPr id="226" name="Shape 226"/>
         <p:cNvGrpSpPr/>
         <p:nvPr/>
       </p:nvGrpSpPr>
@@ -10801,7 +15406,7 @@
       </p:grpSpPr>
       <p:sp>
         <p:nvSpPr>
-          <p:cNvPr id="182" name="Google Shape;182;p25"/>
+          <p:cNvPr id="227" name="Google Shape;227;p37"/>
           <p:cNvSpPr txBox="1"/>
           <p:nvPr>
             <p:ph type="title"/>
@@ -10851,7 +15456,7 @@
       </p:sp>
       <p:sp>
         <p:nvSpPr>
-          <p:cNvPr id="183" name="Google Shape;183;p25"/>
+          <p:cNvPr id="228" name="Google Shape;228;p37"/>
           <p:cNvSpPr txBox="1"/>
           <p:nvPr>
             <p:ph idx="1" type="body"/>
@@ -11231,7 +15836,7 @@
       </p:sp>
       <p:sp>
         <p:nvSpPr>
-          <p:cNvPr id="184" name="Google Shape;184;p25"/>
+          <p:cNvPr id="229" name="Google Shape;229;p37"/>
           <p:cNvSpPr txBox="1"/>
           <p:nvPr>
             <p:ph idx="12" type="sldNum"/>
@@ -11282,7 +15887,7 @@
   <p:cSld>
     <p:spTree>
       <p:nvGrpSpPr>
-        <p:cNvPr id="188" name="Shape 188"/>
+        <p:cNvPr id="233" name="Shape 233"/>
         <p:cNvGrpSpPr/>
         <p:nvPr/>
       </p:nvGrpSpPr>
@@ -11296,7 +15901,7 @@
       </p:grpSpPr>
       <p:sp>
         <p:nvSpPr>
-          <p:cNvPr id="189" name="Google Shape;189;p26"/>
+          <p:cNvPr id="234" name="Google Shape;234;p38"/>
           <p:cNvSpPr txBox="1"/>
           <p:nvPr>
             <p:ph idx="1" type="body"/>
@@ -11458,7 +16063,7 @@
       </p:sp>
       <p:sp>
         <p:nvSpPr>
-          <p:cNvPr id="190" name="Google Shape;190;p26"/>
+          <p:cNvPr id="235" name="Google Shape;235;p38"/>
           <p:cNvSpPr txBox="1"/>
           <p:nvPr>
             <p:ph type="title"/>
@@ -11508,7 +16113,7 @@
       </p:sp>
       <p:sp>
         <p:nvSpPr>
-          <p:cNvPr id="191" name="Google Shape;191;p26"/>
+          <p:cNvPr id="236" name="Google Shape;236;p38"/>
           <p:cNvSpPr txBox="1"/>
           <p:nvPr>
             <p:ph idx="12" type="sldNum"/>
@@ -11559,7 +16164,7 @@
   <p:cSld>
     <p:spTree>
       <p:nvGrpSpPr>
-        <p:cNvPr id="195" name="Shape 195"/>
+        <p:cNvPr id="240" name="Shape 240"/>
         <p:cNvGrpSpPr/>
         <p:nvPr/>
       </p:nvGrpSpPr>
@@ -11573,7 +16178,7 @@
       </p:grpSpPr>
       <p:sp>
         <p:nvSpPr>
-          <p:cNvPr id="196" name="Google Shape;196;p27"/>
+          <p:cNvPr id="241" name="Google Shape;241;p39"/>
           <p:cNvSpPr txBox="1"/>
           <p:nvPr>
             <p:ph type="title"/>
@@ -11623,7 +16228,7 @@
       </p:sp>
       <p:sp>
         <p:nvSpPr>
-          <p:cNvPr id="197" name="Google Shape;197;p27"/>
+          <p:cNvPr id="242" name="Google Shape;242;p39"/>
           <p:cNvSpPr txBox="1"/>
           <p:nvPr>
             <p:ph idx="1" type="body"/>
@@ -11835,7 +16440,7 @@
       </p:sp>
       <p:sp>
         <p:nvSpPr>
-          <p:cNvPr id="198" name="Google Shape;198;p27"/>
+          <p:cNvPr id="243" name="Google Shape;243;p39"/>
           <p:cNvSpPr txBox="1"/>
           <p:nvPr>
             <p:ph idx="12" type="sldNum"/>
@@ -11893,7 +16498,7 @@
     </p:bg>
     <p:spTree>
       <p:nvGrpSpPr>
-        <p:cNvPr id="202" name="Shape 202"/>
+        <p:cNvPr id="247" name="Shape 247"/>
         <p:cNvGrpSpPr/>
         <p:nvPr/>
       </p:nvGrpSpPr>
@@ -11907,7 +16512,7 @@
       </p:grpSpPr>
       <p:sp>
         <p:nvSpPr>
-          <p:cNvPr id="203" name="Google Shape;203;p28"/>
+          <p:cNvPr id="248" name="Google Shape;248;p40"/>
           <p:cNvSpPr txBox="1"/>
           <p:nvPr>
             <p:ph type="title"/>
@@ -11968,7 +16573,7 @@
       </p:sp>
       <p:sp>
         <p:nvSpPr>
-          <p:cNvPr id="204" name="Google Shape;204;p28"/>
+          <p:cNvPr id="249" name="Google Shape;249;p40"/>
           <p:cNvSpPr txBox="1"/>
           <p:nvPr>
             <p:ph idx="12" type="sldNum"/>
@@ -12019,7 +16624,7 @@
   <p:cSld>
     <p:spTree>
       <p:nvGrpSpPr>
-        <p:cNvPr id="208" name="Shape 208"/>
+        <p:cNvPr id="253" name="Shape 253"/>
         <p:cNvGrpSpPr/>
         <p:nvPr/>
       </p:nvGrpSpPr>
@@ -12033,7 +16638,7 @@
       </p:grpSpPr>
       <p:sp>
         <p:nvSpPr>
-          <p:cNvPr id="209" name="Google Shape;209;p29"/>
+          <p:cNvPr id="254" name="Google Shape;254;p41"/>
           <p:cNvSpPr txBox="1"/>
           <p:nvPr>
             <p:ph type="title"/>
@@ -12083,7 +16688,7 @@
       </p:sp>
       <p:sp>
         <p:nvSpPr>
-          <p:cNvPr id="210" name="Google Shape;210;p29"/>
+          <p:cNvPr id="255" name="Google Shape;255;p41"/>
           <p:cNvSpPr txBox="1"/>
           <p:nvPr>
             <p:ph idx="1" type="body"/>
@@ -12225,7 +16830,7 @@
       </p:sp>
       <p:sp>
         <p:nvSpPr>
-          <p:cNvPr id="211" name="Google Shape;211;p29"/>
+          <p:cNvPr id="256" name="Google Shape;256;p41"/>
           <p:cNvSpPr txBox="1"/>
           <p:nvPr>
             <p:ph idx="12" type="sldNum"/>
@@ -12265,7 +16870,7 @@
       </p:sp>
       <p:pic>
         <p:nvPicPr>
-          <p:cNvPr descr="Forma&#10;&#10;Descripción generada automáticamente con confianza baja" id="212" name="Google Shape;212;p29"/>
+          <p:cNvPr descr="Forma&#10;&#10;Descripción generada automáticamente con confianza baja" id="257" name="Google Shape;257;p41"/>
           <p:cNvPicPr preferRelativeResize="0"/>
           <p:nvPr/>
         </p:nvPicPr>
@@ -12303,7 +16908,7 @@
   <p:cSld>
     <p:spTree>
       <p:nvGrpSpPr>
-        <p:cNvPr id="216" name="Shape 216"/>
+        <p:cNvPr id="261" name="Shape 261"/>
         <p:cNvGrpSpPr/>
         <p:nvPr/>
       </p:nvGrpSpPr>
@@ -12317,7 +16922,7 @@
       </p:grpSpPr>
       <p:sp>
         <p:nvSpPr>
-          <p:cNvPr id="217" name="Google Shape;217;p30"/>
+          <p:cNvPr id="262" name="Google Shape;262;p42"/>
           <p:cNvSpPr txBox="1"/>
           <p:nvPr>
             <p:ph type="title"/>
@@ -12367,7 +16972,7 @@
       </p:sp>
       <p:sp>
         <p:nvSpPr>
-          <p:cNvPr id="218" name="Google Shape;218;p30"/>
+          <p:cNvPr id="263" name="Google Shape;263;p42"/>
           <p:cNvSpPr txBox="1"/>
           <p:nvPr>
             <p:ph idx="1" type="body"/>
@@ -12554,7 +17159,7 @@
       </p:sp>
       <p:sp>
         <p:nvSpPr>
-          <p:cNvPr id="219" name="Google Shape;219;p30"/>
+          <p:cNvPr id="264" name="Google Shape;264;p42"/>
           <p:cNvSpPr txBox="1"/>
           <p:nvPr>
             <p:ph idx="12" type="sldNum"/>
@@ -12594,7 +17199,7 @@
       </p:sp>
       <p:pic>
         <p:nvPicPr>
-          <p:cNvPr descr="Diagrama&#10;&#10;Descripción generada automáticamente" id="220" name="Google Shape;220;p30"/>
+          <p:cNvPr descr="Diagrama&#10;&#10;Descripción generada automáticamente" id="265" name="Google Shape;265;p42"/>
           <p:cNvPicPr preferRelativeResize="0"/>
           <p:nvPr/>
         </p:nvPicPr>
@@ -12632,7 +17237,7 @@
   <p:cSld>
     <p:spTree>
       <p:nvGrpSpPr>
-        <p:cNvPr id="224" name="Shape 224"/>
+        <p:cNvPr id="269" name="Shape 269"/>
         <p:cNvGrpSpPr/>
         <p:nvPr/>
       </p:nvGrpSpPr>
@@ -12646,7 +17251,7 @@
       </p:grpSpPr>
       <p:sp>
         <p:nvSpPr>
-          <p:cNvPr id="225" name="Google Shape;225;p31"/>
+          <p:cNvPr id="270" name="Google Shape;270;p43"/>
           <p:cNvSpPr txBox="1"/>
           <p:nvPr>
             <p:ph idx="12" type="sldNum"/>
@@ -12686,7 +17291,7 @@
       </p:sp>
       <p:sp>
         <p:nvSpPr>
-          <p:cNvPr id="226" name="Google Shape;226;p31"/>
+          <p:cNvPr id="271" name="Google Shape;271;p43"/>
           <p:cNvSpPr txBox="1"/>
           <p:nvPr/>
         </p:nvSpPr>
@@ -12747,7 +17352,7 @@
       </p:sp>
       <p:sp>
         <p:nvSpPr>
-          <p:cNvPr id="227" name="Google Shape;227;p31"/>
+          <p:cNvPr id="272" name="Google Shape;272;p43"/>
           <p:cNvSpPr txBox="1"/>
           <p:nvPr/>
         </p:nvSpPr>
@@ -12917,7 +17522,7 @@
       </p:sp>
       <p:grpSp>
         <p:nvGrpSpPr>
-          <p:cNvPr id="228" name="Google Shape;228;p31"/>
+          <p:cNvPr id="273" name="Google Shape;273;p43"/>
           <p:cNvGrpSpPr/>
           <p:nvPr/>
         </p:nvGrpSpPr>
@@ -12931,7 +17536,7 @@
         </p:grpSpPr>
         <p:sp>
           <p:nvSpPr>
-            <p:cNvPr id="229" name="Google Shape;229;p31"/>
+            <p:cNvPr id="274" name="Google Shape;274;p43"/>
             <p:cNvSpPr/>
             <p:nvPr/>
           </p:nvSpPr>
@@ -12979,7 +17584,7 @@
         </p:sp>
         <p:sp>
           <p:nvSpPr>
-            <p:cNvPr id="230" name="Google Shape;230;p31"/>
+            <p:cNvPr id="275" name="Google Shape;275;p43"/>
             <p:cNvSpPr txBox="1"/>
             <p:nvPr/>
           </p:nvSpPr>
@@ -13038,7 +17643,7 @@
       </p:grpSp>
       <p:grpSp>
         <p:nvGrpSpPr>
-          <p:cNvPr id="231" name="Google Shape;231;p31"/>
+          <p:cNvPr id="276" name="Google Shape;276;p43"/>
           <p:cNvGrpSpPr/>
           <p:nvPr/>
         </p:nvGrpSpPr>
@@ -13052,7 +17657,7 @@
         </p:grpSpPr>
         <p:sp>
           <p:nvSpPr>
-            <p:cNvPr id="232" name="Google Shape;232;p31"/>
+            <p:cNvPr id="277" name="Google Shape;277;p43"/>
             <p:cNvSpPr/>
             <p:nvPr/>
           </p:nvSpPr>
@@ -13100,7 +17705,7 @@
         </p:sp>
         <p:sp>
           <p:nvSpPr>
-            <p:cNvPr id="233" name="Google Shape;233;p31"/>
+            <p:cNvPr id="278" name="Google Shape;278;p43"/>
             <p:cNvSpPr txBox="1"/>
             <p:nvPr/>
           </p:nvSpPr>
@@ -13170,7 +17775,7 @@
   <p:cSld>
     <p:spTree>
       <p:nvGrpSpPr>
-        <p:cNvPr id="62" name="Shape 62"/>
+        <p:cNvPr id="107" name="Shape 107"/>
         <p:cNvGrpSpPr/>
         <p:nvPr/>
       </p:nvGrpSpPr>
@@ -13184,7 +17789,7 @@
       </p:grpSpPr>
       <p:sp>
         <p:nvSpPr>
-          <p:cNvPr id="63" name="Google Shape;63;p14"/>
+          <p:cNvPr id="108" name="Google Shape;108;p26"/>
           <p:cNvSpPr txBox="1"/>
           <p:nvPr>
             <p:ph type="title"/>
@@ -13241,49 +17846,17 @@
               <a:buNone/>
             </a:pPr>
             <a:r>
-              <a:rPr b="0" lang="es" u="sng">
+              <a:rPr lang="es" u="sng">
                 <a:solidFill>
                   <a:schemeClr val="hlink"/>
                 </a:solidFill>
-                <a:hlinkClick r:id="rId3"/>
-              </a:rPr>
-              <a:t>daniela.olivares2@mail.udp.cl</a:t>
-            </a:r>
-            <a:endParaRPr b="0"/>
-          </a:p>
-          <a:p>
-            <a:pPr indent="0" lvl="0" marL="0" rtl="0" algn="ctr">
-              <a:spcBef>
-                <a:spcPts val="0"/>
-              </a:spcBef>
-              <a:spcAft>
-                <a:spcPts val="0"/>
-              </a:spcAft>
-              <a:buNone/>
-            </a:pPr>
-            <a:r>
-              <a:t/>
-            </a:r>
-            <a:endParaRPr b="0"/>
-          </a:p>
-          <a:p>
-            <a:pPr indent="0" lvl="0" marL="0" rtl="0" algn="ctr">
-              <a:spcBef>
-                <a:spcPts val="0"/>
-              </a:spcBef>
-              <a:spcAft>
-                <a:spcPts val="0"/>
-              </a:spcAft>
-              <a:buNone/>
-            </a:pPr>
-            <a:r>
-              <a:rPr lang="es">
                 <a:latin typeface="EB Garamond"/>
                 <a:ea typeface="EB Garamond"/>
                 <a:cs typeface="EB Garamond"/>
                 <a:sym typeface="EB Garamond"/>
+                <a:hlinkClick r:id="rId3"/>
               </a:rPr>
-              <a:t>Ayudante: María Fernanda Núñez</a:t>
+              <a:t>daniela.olivares2@mail.udp.cl</a:t>
             </a:r>
             <a:endParaRPr>
               <a:latin typeface="EB Garamond"/>
@@ -13303,21 +17876,76 @@
               <a:buNone/>
             </a:pPr>
             <a:r>
-              <a:rPr b="0" lang="es" u="sng">
+              <a:t/>
+            </a:r>
+            <a:endParaRPr>
+              <a:latin typeface="EB Garamond"/>
+              <a:ea typeface="EB Garamond"/>
+              <a:cs typeface="EB Garamond"/>
+              <a:sym typeface="EB Garamond"/>
+            </a:endParaRPr>
+          </a:p>
+          <a:p>
+            <a:pPr indent="0" lvl="0" marL="0" rtl="0" algn="ctr">
+              <a:spcBef>
+                <a:spcPts val="0"/>
+              </a:spcBef>
+              <a:spcAft>
+                <a:spcPts val="0"/>
+              </a:spcAft>
+              <a:buNone/>
+            </a:pPr>
+            <a:r>
+              <a:rPr lang="es">
+                <a:latin typeface="EB Garamond"/>
+                <a:ea typeface="EB Garamond"/>
+                <a:cs typeface="EB Garamond"/>
+                <a:sym typeface="EB Garamond"/>
+              </a:rPr>
+              <a:t>Ayudante: Katherine Aravena Herrera</a:t>
+            </a:r>
+            <a:endParaRPr>
+              <a:latin typeface="EB Garamond"/>
+              <a:ea typeface="EB Garamond"/>
+              <a:cs typeface="EB Garamond"/>
+              <a:sym typeface="EB Garamond"/>
+            </a:endParaRPr>
+          </a:p>
+          <a:p>
+            <a:pPr indent="0" lvl="0" marL="0" rtl="0" algn="ctr">
+              <a:spcBef>
+                <a:spcPts val="0"/>
+              </a:spcBef>
+              <a:spcAft>
+                <a:spcPts val="0"/>
+              </a:spcAft>
+              <a:buNone/>
+            </a:pPr>
+            <a:r>
+              <a:rPr lang="es" u="sng">
                 <a:solidFill>
                   <a:schemeClr val="hlink"/>
                 </a:solidFill>
+                <a:latin typeface="EB Garamond"/>
+                <a:ea typeface="EB Garamond"/>
+                <a:cs typeface="EB Garamond"/>
+                <a:sym typeface="EB Garamond"/>
                 <a:hlinkClick r:id="rId4"/>
               </a:rPr>
-              <a:t>maria.nunez.2@ug.uchile.cl</a:t>
+              <a:t>katherine.aravena@mail.udp.cl</a:t>
             </a:r>
-            <a:endParaRPr b="0"/>
+            <a:endParaRPr>
+              <a:latin typeface="EB Garamond"/>
+              <a:ea typeface="EB Garamond"/>
+              <a:cs typeface="EB Garamond"/>
+              <a:sym typeface="EB Garamond"/>
+            </a:endParaRPr>
           </a:p>
         </p:txBody>
       </p:sp>
       <p:sp>
         <p:nvSpPr>
-          <p:cNvPr id="64" name="Google Shape;64;p14"/>
+          <p:cNvPr id="109" name="Google Shape;109;p26"/>
           <p:cNvSpPr txBox="1"/>
           <p:nvPr>
             <p:ph idx="12" type="sldNum"/>
@@ -13368,7 +17996,7 @@
   <p:cSld>
     <p:spTree>
       <p:nvGrpSpPr>
-        <p:cNvPr id="237" name="Shape 237"/>
+        <p:cNvPr id="282" name="Shape 282"/>
         <p:cNvGrpSpPr/>
         <p:nvPr/>
       </p:nvGrpSpPr>
@@ -13382,7 +18010,7 @@
       </p:grpSpPr>
       <p:sp>
         <p:nvSpPr>
-          <p:cNvPr id="238" name="Google Shape;238;p32"/>
+          <p:cNvPr id="283" name="Google Shape;283;p44"/>
           <p:cNvSpPr txBox="1"/>
           <p:nvPr>
             <p:ph type="title"/>
@@ -13432,7 +18060,7 @@
       </p:sp>
       <p:sp>
         <p:nvSpPr>
-          <p:cNvPr id="239" name="Google Shape;239;p32"/>
+          <p:cNvPr id="284" name="Google Shape;284;p44"/>
           <p:cNvSpPr txBox="1"/>
           <p:nvPr>
             <p:ph idx="12" type="sldNum"/>
@@ -13472,7 +18100,7 @@
       </p:sp>
       <p:grpSp>
         <p:nvGrpSpPr>
-          <p:cNvPr id="240" name="Google Shape;240;p32"/>
+          <p:cNvPr id="285" name="Google Shape;285;p44"/>
           <p:cNvGrpSpPr/>
           <p:nvPr/>
         </p:nvGrpSpPr>
@@ -13486,7 +18114,7 @@
         </p:grpSpPr>
         <p:sp>
           <p:nvSpPr>
-            <p:cNvPr id="241" name="Google Shape;241;p32"/>
+            <p:cNvPr id="286" name="Google Shape;286;p44"/>
             <p:cNvSpPr/>
             <p:nvPr/>
           </p:nvSpPr>
@@ -13534,7 +18162,7 @@
         </p:sp>
         <p:sp>
           <p:nvSpPr>
-            <p:cNvPr id="242" name="Google Shape;242;p32"/>
+            <p:cNvPr id="287" name="Google Shape;287;p44"/>
             <p:cNvSpPr txBox="1"/>
             <p:nvPr/>
           </p:nvSpPr>
@@ -13593,7 +18221,7 @@
       </p:grpSp>
       <p:grpSp>
         <p:nvGrpSpPr>
-          <p:cNvPr id="243" name="Google Shape;243;p32"/>
+          <p:cNvPr id="288" name="Google Shape;288;p44"/>
           <p:cNvGrpSpPr/>
           <p:nvPr/>
         </p:nvGrpSpPr>
@@ -13607,7 +18235,7 @@
         </p:grpSpPr>
         <p:sp>
           <p:nvSpPr>
-            <p:cNvPr id="244" name="Google Shape;244;p32"/>
+            <p:cNvPr id="289" name="Google Shape;289;p44"/>
             <p:cNvSpPr/>
             <p:nvPr/>
           </p:nvSpPr>
@@ -13655,7 +18283,7 @@
         </p:sp>
         <p:sp>
           <p:nvSpPr>
-            <p:cNvPr id="245" name="Google Shape;245;p32"/>
+            <p:cNvPr id="290" name="Google Shape;290;p44"/>
             <p:cNvSpPr txBox="1"/>
             <p:nvPr/>
           </p:nvSpPr>
@@ -13714,7 +18342,7 @@
       </p:grpSp>
       <p:pic>
         <p:nvPicPr>
-          <p:cNvPr id="246" name="Google Shape;246;p32"/>
+          <p:cNvPr id="291" name="Google Shape;291;p44"/>
           <p:cNvPicPr preferRelativeResize="0"/>
           <p:nvPr/>
         </p:nvPicPr>
@@ -13742,7 +18370,7 @@
       </p:pic>
       <p:pic>
         <p:nvPicPr>
-          <p:cNvPr id="247" name="Google Shape;247;p32"/>
+          <p:cNvPr id="292" name="Google Shape;292;p44"/>
           <p:cNvPicPr preferRelativeResize="0"/>
           <p:nvPr/>
         </p:nvPicPr>
@@ -13770,7 +18398,7 @@
       </p:pic>
       <p:pic>
         <p:nvPicPr>
-          <p:cNvPr id="248" name="Google Shape;248;p32"/>
+          <p:cNvPr id="293" name="Google Shape;293;p44"/>
           <p:cNvPicPr preferRelativeResize="0"/>
           <p:nvPr/>
         </p:nvPicPr>
@@ -13809,7 +18437,7 @@
   <p:cSld>
     <p:spTree>
       <p:nvGrpSpPr>
-        <p:cNvPr id="252" name="Shape 252"/>
+        <p:cNvPr id="297" name="Shape 297"/>
         <p:cNvGrpSpPr/>
         <p:nvPr/>
       </p:nvGrpSpPr>
@@ -13823,7 +18451,7 @@
       </p:grpSpPr>
       <p:sp>
         <p:nvSpPr>
-          <p:cNvPr id="253" name="Google Shape;253;p33"/>
+          <p:cNvPr id="298" name="Google Shape;298;p45"/>
           <p:cNvSpPr txBox="1"/>
           <p:nvPr>
             <p:ph type="title"/>
@@ -13873,7 +18501,7 @@
       </p:sp>
       <p:sp>
         <p:nvSpPr>
-          <p:cNvPr id="254" name="Google Shape;254;p33"/>
+          <p:cNvPr id="299" name="Google Shape;299;p45"/>
           <p:cNvSpPr txBox="1"/>
           <p:nvPr>
             <p:ph idx="12" type="sldNum"/>
@@ -13913,7 +18541,7 @@
       </p:sp>
       <p:pic>
         <p:nvPicPr>
-          <p:cNvPr id="255" name="Google Shape;255;p33"/>
+          <p:cNvPr id="300" name="Google Shape;300;p45"/>
           <p:cNvPicPr preferRelativeResize="0"/>
           <p:nvPr/>
         </p:nvPicPr>
@@ -13951,7 +18579,7 @@
   <p:cSld>
     <p:spTree>
       <p:nvGrpSpPr>
-        <p:cNvPr id="259" name="Shape 259"/>
+        <p:cNvPr id="304" name="Shape 304"/>
         <p:cNvGrpSpPr/>
         <p:nvPr/>
       </p:nvGrpSpPr>
@@ -13965,7 +18593,7 @@
       </p:grpSpPr>
       <p:sp>
         <p:nvSpPr>
-          <p:cNvPr id="260" name="Google Shape;260;p34"/>
+          <p:cNvPr id="305" name="Google Shape;305;p46"/>
           <p:cNvSpPr txBox="1"/>
           <p:nvPr>
             <p:ph type="title"/>
@@ -14015,7 +18643,7 @@
       </p:sp>
       <p:sp>
         <p:nvSpPr>
-          <p:cNvPr id="261" name="Google Shape;261;p34"/>
+          <p:cNvPr id="306" name="Google Shape;306;p46"/>
           <p:cNvSpPr txBox="1"/>
           <p:nvPr>
             <p:ph idx="12" type="sldNum"/>
@@ -14055,7 +18683,7 @@
       </p:sp>
       <p:sp>
         <p:nvSpPr>
-          <p:cNvPr id="262" name="Google Shape;262;p34"/>
+          <p:cNvPr id="307" name="Google Shape;307;p46"/>
           <p:cNvSpPr txBox="1"/>
           <p:nvPr/>
         </p:nvSpPr>
@@ -14247,7 +18875,7 @@
       </p:sp>
       <p:grpSp>
         <p:nvGrpSpPr>
-          <p:cNvPr id="263" name="Google Shape;263;p34"/>
+          <p:cNvPr id="308" name="Google Shape;308;p46"/>
           <p:cNvGrpSpPr/>
           <p:nvPr/>
         </p:nvGrpSpPr>
@@ -14261,7 +18889,7 @@
         </p:grpSpPr>
         <p:sp>
           <p:nvSpPr>
-            <p:cNvPr id="264" name="Google Shape;264;p34"/>
+            <p:cNvPr id="309" name="Google Shape;309;p46"/>
             <p:cNvSpPr/>
             <p:nvPr/>
           </p:nvSpPr>
@@ -14309,7 +18937,7 @@
         </p:sp>
         <p:sp>
           <p:nvSpPr>
-            <p:cNvPr id="265" name="Google Shape;265;p34"/>
+            <p:cNvPr id="310" name="Google Shape;310;p46"/>
             <p:cNvSpPr txBox="1"/>
             <p:nvPr/>
           </p:nvSpPr>
@@ -14368,7 +18996,7 @@
       </p:grpSp>
       <p:grpSp>
         <p:nvGrpSpPr>
-          <p:cNvPr id="266" name="Google Shape;266;p34"/>
+          <p:cNvPr id="311" name="Google Shape;311;p46"/>
           <p:cNvGrpSpPr/>
           <p:nvPr/>
         </p:nvGrpSpPr>
@@ -14382,7 +19010,7 @@
         </p:grpSpPr>
         <p:sp>
           <p:nvSpPr>
-            <p:cNvPr id="267" name="Google Shape;267;p34"/>
+            <p:cNvPr id="312" name="Google Shape;312;p46"/>
             <p:cNvSpPr/>
             <p:nvPr/>
           </p:nvSpPr>
@@ -14430,7 +19058,7 @@
         </p:sp>
         <p:sp>
           <p:nvSpPr>
-            <p:cNvPr id="268" name="Google Shape;268;p34"/>
+            <p:cNvPr id="313" name="Google Shape;313;p46"/>
             <p:cNvSpPr txBox="1"/>
             <p:nvPr/>
           </p:nvSpPr>
@@ -14489,7 +19117,7 @@
       </p:grpSp>
       <p:sp>
         <p:nvSpPr>
-          <p:cNvPr id="269" name="Google Shape;269;p34"/>
+          <p:cNvPr id="314" name="Google Shape;314;p46"/>
           <p:cNvSpPr/>
           <p:nvPr/>
         </p:nvSpPr>
@@ -14546,7 +19174,7 @@
       </p:sp>
       <p:sp>
         <p:nvSpPr>
-          <p:cNvPr id="270" name="Google Shape;270;p34"/>
+          <p:cNvPr id="315" name="Google Shape;315;p46"/>
           <p:cNvSpPr/>
           <p:nvPr/>
         </p:nvSpPr>
@@ -14614,7 +19242,7 @@
   <p:cSld>
     <p:spTree>
       <p:nvGrpSpPr>
-        <p:cNvPr id="274" name="Shape 274"/>
+        <p:cNvPr id="319" name="Shape 319"/>
         <p:cNvGrpSpPr/>
         <p:nvPr/>
       </p:nvGrpSpPr>
@@ -14628,7 +19256,7 @@
       </p:grpSpPr>
       <p:sp>
         <p:nvSpPr>
-          <p:cNvPr id="275" name="Google Shape;275;p35"/>
+          <p:cNvPr id="320" name="Google Shape;320;p47"/>
           <p:cNvSpPr txBox="1"/>
           <p:nvPr>
             <p:ph type="title"/>
@@ -14678,7 +19306,7 @@
       </p:sp>
       <p:sp>
         <p:nvSpPr>
-          <p:cNvPr id="276" name="Google Shape;276;p35"/>
+          <p:cNvPr id="321" name="Google Shape;321;p47"/>
           <p:cNvSpPr txBox="1"/>
           <p:nvPr>
             <p:ph idx="12" type="sldNum"/>
@@ -14718,7 +19346,7 @@
       </p:sp>
       <p:sp>
         <p:nvSpPr>
-          <p:cNvPr id="277" name="Google Shape;277;p35"/>
+          <p:cNvPr id="322" name="Google Shape;322;p47"/>
           <p:cNvSpPr txBox="1"/>
           <p:nvPr/>
         </p:nvSpPr>
@@ -14943,7 +19571,7 @@
       </p:sp>
       <p:pic>
         <p:nvPicPr>
-          <p:cNvPr id="278" name="Google Shape;278;p35"/>
+          <p:cNvPr id="323" name="Google Shape;323;p47"/>
           <p:cNvPicPr preferRelativeResize="0"/>
           <p:nvPr/>
         </p:nvPicPr>
@@ -14971,7 +19599,7 @@
       </p:pic>
       <p:pic>
         <p:nvPicPr>
-          <p:cNvPr id="279" name="Google Shape;279;p35"/>
+          <p:cNvPr id="324" name="Google Shape;324;p47"/>
           <p:cNvPicPr preferRelativeResize="0"/>
           <p:nvPr/>
         </p:nvPicPr>
@@ -14999,7 +19627,7 @@
       </p:pic>
       <p:pic>
         <p:nvPicPr>
-          <p:cNvPr id="280" name="Google Shape;280;p35"/>
+          <p:cNvPr id="325" name="Google Shape;325;p47"/>
           <p:cNvPicPr preferRelativeResize="0"/>
           <p:nvPr/>
         </p:nvPicPr>
@@ -15038,7 +19666,7 @@
   <p:cSld>
     <p:spTree>
       <p:nvGrpSpPr>
-        <p:cNvPr id="284" name="Shape 284"/>
+        <p:cNvPr id="329" name="Shape 329"/>
         <p:cNvGrpSpPr/>
         <p:nvPr/>
       </p:nvGrpSpPr>
@@ -15052,7 +19680,7 @@
       </p:grpSpPr>
       <p:sp>
         <p:nvSpPr>
-          <p:cNvPr id="285" name="Google Shape;285;p36"/>
+          <p:cNvPr id="330" name="Google Shape;330;p48"/>
           <p:cNvSpPr txBox="1"/>
           <p:nvPr>
             <p:ph idx="12" type="sldNum"/>
@@ -15092,7 +19720,7 @@
       </p:sp>
       <p:pic>
         <p:nvPicPr>
-          <p:cNvPr descr="Diagrama&#10;&#10;Descripción generada automáticamente" id="286" name="Google Shape;286;p36"/>
+          <p:cNvPr descr="Diagrama&#10;&#10;Descripción generada automáticamente" id="331" name="Google Shape;331;p48"/>
           <p:cNvPicPr preferRelativeResize="0"/>
           <p:nvPr/>
         </p:nvPicPr>
@@ -15137,7 +19765,7 @@
     </p:bg>
     <p:spTree>
       <p:nvGrpSpPr>
-        <p:cNvPr id="290" name="Shape 290"/>
+        <p:cNvPr id="335" name="Shape 335"/>
         <p:cNvGrpSpPr/>
         <p:nvPr/>
       </p:nvGrpSpPr>
@@ -15151,7 +19779,7 @@
       </p:grpSpPr>
       <p:sp>
         <p:nvSpPr>
-          <p:cNvPr id="291" name="Google Shape;291;p37"/>
+          <p:cNvPr id="336" name="Google Shape;336;p49"/>
           <p:cNvSpPr txBox="1"/>
           <p:nvPr>
             <p:ph type="title"/>
@@ -15207,7 +19835,7 @@
       </p:sp>
       <p:sp>
         <p:nvSpPr>
-          <p:cNvPr id="292" name="Google Shape;292;p37"/>
+          <p:cNvPr id="337" name="Google Shape;337;p49"/>
           <p:cNvSpPr txBox="1"/>
           <p:nvPr>
             <p:ph idx="12" type="sldNum"/>
@@ -15258,7 +19886,7 @@
   <p:cSld>
     <p:spTree>
       <p:nvGrpSpPr>
-        <p:cNvPr id="296" name="Shape 296"/>
+        <p:cNvPr id="341" name="Shape 341"/>
         <p:cNvGrpSpPr/>
         <p:nvPr/>
       </p:nvGrpSpPr>
@@ -15272,7 +19900,7 @@
       </p:grpSpPr>
       <p:sp>
         <p:nvSpPr>
-          <p:cNvPr id="297" name="Google Shape;297;p38"/>
+          <p:cNvPr id="342" name="Google Shape;342;p50"/>
           <p:cNvSpPr txBox="1"/>
           <p:nvPr>
             <p:ph type="title"/>
@@ -15322,7 +19950,7 @@
       </p:sp>
       <p:sp>
         <p:nvSpPr>
-          <p:cNvPr id="298" name="Google Shape;298;p38"/>
+          <p:cNvPr id="343" name="Google Shape;343;p50"/>
           <p:cNvSpPr txBox="1"/>
           <p:nvPr>
             <p:ph idx="1" type="body"/>
@@ -15422,7 +20050,7 @@
       </p:sp>
       <p:sp>
         <p:nvSpPr>
-          <p:cNvPr id="299" name="Google Shape;299;p38"/>
+          <p:cNvPr id="344" name="Google Shape;344;p50"/>
           <p:cNvSpPr txBox="1"/>
           <p:nvPr>
             <p:ph idx="12" type="sldNum"/>
@@ -15473,7 +20101,7 @@
   <p:cSld>
     <p:spTree>
       <p:nvGrpSpPr>
-        <p:cNvPr id="303" name="Shape 303"/>
+        <p:cNvPr id="348" name="Shape 348"/>
         <p:cNvGrpSpPr/>
         <p:nvPr/>
       </p:nvGrpSpPr>
@@ -15487,7 +20115,7 @@
       </p:grpSpPr>
       <p:sp>
         <p:nvSpPr>
-          <p:cNvPr id="304" name="Google Shape;304;p39"/>
+          <p:cNvPr id="349" name="Google Shape;349;p51"/>
           <p:cNvSpPr txBox="1"/>
           <p:nvPr>
             <p:ph type="title"/>
@@ -15537,7 +20165,7 @@
       </p:sp>
       <p:sp>
         <p:nvSpPr>
-          <p:cNvPr id="305" name="Google Shape;305;p39"/>
+          <p:cNvPr id="350" name="Google Shape;350;p51"/>
           <p:cNvSpPr txBox="1"/>
           <p:nvPr>
             <p:ph idx="1" type="body"/>
@@ -15685,7 +20313,7 @@
       </p:sp>
       <p:sp>
         <p:nvSpPr>
-          <p:cNvPr id="306" name="Google Shape;306;p39"/>
+          <p:cNvPr id="351" name="Google Shape;351;p51"/>
           <p:cNvSpPr txBox="1"/>
           <p:nvPr>
             <p:ph idx="12" type="sldNum"/>
@@ -15736,7 +20364,7 @@
   <p:cSld>
     <p:spTree>
       <p:nvGrpSpPr>
-        <p:cNvPr id="310" name="Shape 310"/>
+        <p:cNvPr id="355" name="Shape 355"/>
         <p:cNvGrpSpPr/>
         <p:nvPr/>
       </p:nvGrpSpPr>
@@ -15750,7 +20378,7 @@
       </p:grpSpPr>
       <p:sp>
         <p:nvSpPr>
-          <p:cNvPr id="311" name="Google Shape;311;p40"/>
+          <p:cNvPr id="356" name="Google Shape;356;p52"/>
           <p:cNvSpPr txBox="1"/>
           <p:nvPr>
             <p:ph type="title"/>
@@ -15800,7 +20428,7 @@
       </p:sp>
       <p:sp>
         <p:nvSpPr>
-          <p:cNvPr id="312" name="Google Shape;312;p40"/>
+          <p:cNvPr id="357" name="Google Shape;357;p52"/>
           <p:cNvSpPr txBox="1"/>
           <p:nvPr>
             <p:ph idx="1" type="body"/>
@@ -15936,7 +20564,7 @@
       </p:sp>
       <p:sp>
         <p:nvSpPr>
-          <p:cNvPr id="313" name="Google Shape;313;p40"/>
+          <p:cNvPr id="358" name="Google Shape;358;p52"/>
           <p:cNvSpPr txBox="1"/>
           <p:nvPr>
             <p:ph idx="12" type="sldNum"/>
@@ -15987,7 +20615,7 @@
   <p:cSld>
     <p:spTree>
       <p:nvGrpSpPr>
-        <p:cNvPr id="317" name="Shape 317"/>
+        <p:cNvPr id="362" name="Shape 362"/>
         <p:cNvGrpSpPr/>
         <p:nvPr/>
       </p:nvGrpSpPr>
@@ -16001,7 +20629,7 @@
       </p:grpSpPr>
       <p:sp>
         <p:nvSpPr>
-          <p:cNvPr id="318" name="Google Shape;318;p41"/>
+          <p:cNvPr id="363" name="Google Shape;363;p53"/>
           <p:cNvSpPr txBox="1"/>
           <p:nvPr>
             <p:ph type="ctrTitle"/>
@@ -16051,7 +20679,7 @@
       </p:sp>
       <p:sp>
         <p:nvSpPr>
-          <p:cNvPr id="319" name="Google Shape;319;p41"/>
+          <p:cNvPr id="364" name="Google Shape;364;p53"/>
           <p:cNvSpPr txBox="1"/>
           <p:nvPr>
             <p:ph idx="1" type="subTitle"/>
@@ -16101,7 +20729,7 @@
       </p:sp>
       <p:sp>
         <p:nvSpPr>
-          <p:cNvPr id="320" name="Google Shape;320;p41"/>
+          <p:cNvPr id="365" name="Google Shape;365;p53"/>
           <p:cNvSpPr txBox="1"/>
           <p:nvPr>
             <p:ph idx="1" type="subTitle"/>
@@ -16217,7 +20845,7 @@
       </p:sp>
       <p:sp>
         <p:nvSpPr>
-          <p:cNvPr id="321" name="Google Shape;321;p41"/>
+          <p:cNvPr id="366" name="Google Shape;366;p53"/>
           <p:cNvSpPr txBox="1"/>
           <p:nvPr>
             <p:ph idx="1" type="subTitle"/>
@@ -16355,7 +20983,7 @@
       </p:sp>
       <p:pic>
         <p:nvPicPr>
-          <p:cNvPr id="322" name="Google Shape;322;p41" title="UDP_LogoRGB_2lineas_Color_SinFondo.png"/>
+          <p:cNvPr id="367" name="Google Shape;367;p53" title="UDP_LogoRGB_2lineas_Color_SinFondo.png"/>
           <p:cNvPicPr preferRelativeResize="0"/>
           <p:nvPr/>
         </p:nvPicPr>
@@ -16394,7 +21022,7 @@
   <p:cSld>
     <p:spTree>
       <p:nvGrpSpPr>
-        <p:cNvPr id="68" name="Shape 68"/>
+        <p:cNvPr id="113" name="Shape 113"/>
         <p:cNvGrpSpPr/>
         <p:nvPr/>
       </p:nvGrpSpPr>
@@ -16408,7 +21036,7 @@
       </p:grpSpPr>
       <p:sp>
         <p:nvSpPr>
-          <p:cNvPr id="69" name="Google Shape;69;p15"/>
+          <p:cNvPr id="114" name="Google Shape;114;p27"/>
           <p:cNvSpPr txBox="1"/>
           <p:nvPr>
             <p:ph type="title"/>
@@ -16458,7 +21086,7 @@
       </p:sp>
       <p:sp>
         <p:nvSpPr>
-          <p:cNvPr id="70" name="Google Shape;70;p15"/>
+          <p:cNvPr id="115" name="Google Shape;115;p27"/>
           <p:cNvSpPr txBox="1"/>
           <p:nvPr>
             <p:ph idx="2" type="body"/>
@@ -16596,7 +21224,7 @@
       </p:sp>
       <p:sp>
         <p:nvSpPr>
-          <p:cNvPr id="71" name="Google Shape;71;p15"/>
+          <p:cNvPr id="116" name="Google Shape;116;p27"/>
           <p:cNvSpPr txBox="1"/>
           <p:nvPr>
             <p:ph idx="1" type="subTitle"/>
@@ -16646,7 +21274,7 @@
       </p:sp>
       <p:sp>
         <p:nvSpPr>
-          <p:cNvPr id="72" name="Google Shape;72;p15"/>
+          <p:cNvPr id="117" name="Google Shape;117;p27"/>
           <p:cNvSpPr txBox="1"/>
           <p:nvPr>
             <p:ph idx="12" type="sldNum"/>
@@ -16704,7 +21332,7 @@
     </p:bg>
     <p:spTree>
       <p:nvGrpSpPr>
-        <p:cNvPr id="76" name="Shape 76"/>
+        <p:cNvPr id="121" name="Shape 121"/>
         <p:cNvGrpSpPr/>
         <p:nvPr/>
       </p:nvGrpSpPr>
@@ -16718,7 +21346,7 @@
       </p:grpSpPr>
       <p:sp>
         <p:nvSpPr>
-          <p:cNvPr id="77" name="Google Shape;77;p16"/>
+          <p:cNvPr id="122" name="Google Shape;122;p28"/>
           <p:cNvSpPr txBox="1"/>
           <p:nvPr>
             <p:ph type="title"/>
@@ -16775,7 +21403,7 @@
       </p:sp>
       <p:sp>
         <p:nvSpPr>
-          <p:cNvPr id="78" name="Google Shape;78;p16"/>
+          <p:cNvPr id="123" name="Google Shape;123;p28"/>
           <p:cNvSpPr txBox="1"/>
           <p:nvPr>
             <p:ph idx="12" type="sldNum"/>
@@ -16826,7 +21454,7 @@
   <p:cSld>
     <p:spTree>
       <p:nvGrpSpPr>
-        <p:cNvPr id="82" name="Shape 82"/>
+        <p:cNvPr id="127" name="Shape 127"/>
         <p:cNvGrpSpPr/>
         <p:nvPr/>
       </p:nvGrpSpPr>
@@ -16840,7 +21468,7 @@
       </p:grpSpPr>
       <p:sp>
         <p:nvSpPr>
-          <p:cNvPr id="83" name="Google Shape;83;p17"/>
+          <p:cNvPr id="128" name="Google Shape;128;p29"/>
           <p:cNvSpPr txBox="1"/>
           <p:nvPr>
             <p:ph type="title"/>
@@ -16940,7 +21568,7 @@
       </p:sp>
       <p:sp>
         <p:nvSpPr>
-          <p:cNvPr id="84" name="Google Shape;84;p17"/>
+          <p:cNvPr id="129" name="Google Shape;129;p29"/>
           <p:cNvSpPr txBox="1"/>
           <p:nvPr>
             <p:ph idx="12" type="sldNum"/>
@@ -16980,7 +21608,7 @@
       </p:sp>
       <p:sp>
         <p:nvSpPr>
-          <p:cNvPr id="85" name="Google Shape;85;p17"/>
+          <p:cNvPr id="130" name="Google Shape;130;p29"/>
           <p:cNvSpPr txBox="1"/>
           <p:nvPr>
             <p:ph idx="1" type="body"/>
@@ -17186,7 +21814,7 @@
   <p:cSld>
     <p:spTree>
       <p:nvGrpSpPr>
-        <p:cNvPr id="89" name="Shape 89"/>
+        <p:cNvPr id="134" name="Shape 134"/>
         <p:cNvGrpSpPr/>
         <p:nvPr/>
       </p:nvGrpSpPr>
@@ -17200,7 +21828,7 @@
       </p:grpSpPr>
       <p:sp>
         <p:nvSpPr>
-          <p:cNvPr id="90" name="Google Shape;90;p18"/>
+          <p:cNvPr id="135" name="Google Shape;135;p30"/>
           <p:cNvSpPr txBox="1"/>
           <p:nvPr>
             <p:ph type="title"/>
@@ -17290,7 +21918,7 @@
       </p:sp>
       <p:sp>
         <p:nvSpPr>
-          <p:cNvPr id="91" name="Google Shape;91;p18"/>
+          <p:cNvPr id="136" name="Google Shape;136;p30"/>
           <p:cNvSpPr txBox="1"/>
           <p:nvPr>
             <p:ph idx="12" type="sldNum"/>
@@ -17330,7 +21958,7 @@
       </p:sp>
       <p:grpSp>
         <p:nvGrpSpPr>
-          <p:cNvPr id="92" name="Google Shape;92;p18"/>
+          <p:cNvPr id="137" name="Google Shape;137;p30"/>
           <p:cNvGrpSpPr/>
           <p:nvPr/>
         </p:nvGrpSpPr>
@@ -17344,7 +21972,7 @@
         </p:grpSpPr>
         <p:sp>
           <p:nvSpPr>
-            <p:cNvPr id="93" name="Google Shape;93;p18"/>
+            <p:cNvPr id="138" name="Google Shape;138;p30"/>
             <p:cNvSpPr/>
             <p:nvPr/>
           </p:nvSpPr>
@@ -17392,7 +22020,7 @@
         </p:sp>
         <p:sp>
           <p:nvSpPr>
-            <p:cNvPr id="94" name="Google Shape;94;p18"/>
+            <p:cNvPr id="139" name="Google Shape;139;p30"/>
             <p:cNvSpPr/>
             <p:nvPr/>
           </p:nvSpPr>
@@ -17448,7 +22076,7 @@
         </p:sp>
         <p:sp>
           <p:nvSpPr>
-            <p:cNvPr id="95" name="Google Shape;95;p18"/>
+            <p:cNvPr id="140" name="Google Shape;140;p30"/>
             <p:cNvSpPr txBox="1"/>
             <p:nvPr/>
           </p:nvSpPr>
@@ -17509,7 +22137,7 @@
         </p:sp>
         <p:sp>
           <p:nvSpPr>
-            <p:cNvPr id="96" name="Google Shape;96;p18"/>
+            <p:cNvPr id="141" name="Google Shape;141;p30"/>
             <p:cNvSpPr/>
             <p:nvPr/>
           </p:nvSpPr>
@@ -17557,7 +22185,7 @@
         </p:sp>
         <p:sp>
           <p:nvSpPr>
-            <p:cNvPr id="97" name="Google Shape;97;p18"/>
+            <p:cNvPr id="142" name="Google Shape;142;p30"/>
             <p:cNvSpPr/>
             <p:nvPr/>
           </p:nvSpPr>
@@ -17613,7 +22241,7 @@
         </p:sp>
         <p:sp>
           <p:nvSpPr>
-            <p:cNvPr id="98" name="Google Shape;98;p18"/>
+            <p:cNvPr id="143" name="Google Shape;143;p30"/>
             <p:cNvSpPr txBox="1"/>
             <p:nvPr/>
           </p:nvSpPr>
@@ -17674,7 +22302,7 @@
         </p:sp>
         <p:sp>
           <p:nvSpPr>
-            <p:cNvPr id="99" name="Google Shape;99;p18"/>
+            <p:cNvPr id="144" name="Google Shape;144;p30"/>
             <p:cNvSpPr/>
             <p:nvPr/>
           </p:nvSpPr>
@@ -17722,7 +22350,7 @@
         </p:sp>
         <p:sp>
           <p:nvSpPr>
-            <p:cNvPr id="100" name="Google Shape;100;p18"/>
+            <p:cNvPr id="145" name="Google Shape;145;p30"/>
             <p:cNvSpPr/>
             <p:nvPr/>
           </p:nvSpPr>
@@ -17778,7 +22406,7 @@
         </p:sp>
         <p:sp>
           <p:nvSpPr>
-            <p:cNvPr id="101" name="Google Shape;101;p18"/>
+            <p:cNvPr id="146" name="Google Shape;146;p30"/>
             <p:cNvSpPr txBox="1"/>
             <p:nvPr/>
           </p:nvSpPr>
@@ -17839,7 +22467,7 @@
         </p:sp>
         <p:sp>
           <p:nvSpPr>
-            <p:cNvPr id="102" name="Google Shape;102;p18"/>
+            <p:cNvPr id="147" name="Google Shape;147;p30"/>
             <p:cNvSpPr/>
             <p:nvPr/>
           </p:nvSpPr>
@@ -17887,7 +22515,7 @@
         </p:sp>
         <p:sp>
           <p:nvSpPr>
-            <p:cNvPr id="103" name="Google Shape;103;p18"/>
+            <p:cNvPr id="148" name="Google Shape;148;p30"/>
             <p:cNvSpPr/>
             <p:nvPr/>
           </p:nvSpPr>
@@ -17943,7 +22571,7 @@
         </p:sp>
         <p:sp>
           <p:nvSpPr>
-            <p:cNvPr id="104" name="Google Shape;104;p18"/>
+            <p:cNvPr id="149" name="Google Shape;149;p30"/>
             <p:cNvSpPr txBox="1"/>
             <p:nvPr/>
           </p:nvSpPr>
@@ -18004,7 +22632,7 @@
         </p:sp>
         <p:sp>
           <p:nvSpPr>
-            <p:cNvPr id="105" name="Google Shape;105;p18"/>
+            <p:cNvPr id="150" name="Google Shape;150;p30"/>
             <p:cNvSpPr/>
             <p:nvPr/>
           </p:nvSpPr>
@@ -18052,7 +22680,7 @@
         </p:sp>
         <p:sp>
           <p:nvSpPr>
-            <p:cNvPr id="106" name="Google Shape;106;p18"/>
+            <p:cNvPr id="151" name="Google Shape;151;p30"/>
             <p:cNvSpPr/>
             <p:nvPr/>
           </p:nvSpPr>
@@ -18108,7 +22736,7 @@
         </p:sp>
         <p:sp>
           <p:nvSpPr>
-            <p:cNvPr id="107" name="Google Shape;107;p18"/>
+            <p:cNvPr id="152" name="Google Shape;152;p30"/>
             <p:cNvSpPr txBox="1"/>
             <p:nvPr/>
           </p:nvSpPr>
@@ -18169,7 +22797,7 @@
         </p:sp>
         <p:sp>
           <p:nvSpPr>
-            <p:cNvPr id="108" name="Google Shape;108;p18"/>
+            <p:cNvPr id="153" name="Google Shape;153;p30"/>
             <p:cNvSpPr/>
             <p:nvPr/>
           </p:nvSpPr>
@@ -18217,7 +22845,7 @@
         </p:sp>
         <p:sp>
           <p:nvSpPr>
-            <p:cNvPr id="109" name="Google Shape;109;p18"/>
+            <p:cNvPr id="154" name="Google Shape;154;p30"/>
             <p:cNvSpPr/>
             <p:nvPr/>
           </p:nvSpPr>
@@ -18273,7 +22901,7 @@
         </p:sp>
         <p:sp>
           <p:nvSpPr>
-            <p:cNvPr id="110" name="Google Shape;110;p18"/>
+            <p:cNvPr id="155" name="Google Shape;155;p30"/>
             <p:cNvSpPr txBox="1"/>
             <p:nvPr/>
           </p:nvSpPr>
@@ -18334,7 +22962,7 @@
         </p:sp>
         <p:sp>
           <p:nvSpPr>
-            <p:cNvPr id="111" name="Google Shape;111;p18"/>
+            <p:cNvPr id="156" name="Google Shape;156;p30"/>
             <p:cNvSpPr/>
             <p:nvPr/>
           </p:nvSpPr>
@@ -18382,7 +23010,7 @@
         </p:sp>
         <p:sp>
           <p:nvSpPr>
-            <p:cNvPr id="112" name="Google Shape;112;p18"/>
+            <p:cNvPr id="157" name="Google Shape;157;p30"/>
             <p:cNvSpPr/>
             <p:nvPr/>
           </p:nvSpPr>
@@ -18438,7 +23066,7 @@
         </p:sp>
         <p:sp>
           <p:nvSpPr>
-            <p:cNvPr id="113" name="Google Shape;113;p18"/>
+            <p:cNvPr id="158" name="Google Shape;158;p30"/>
             <p:cNvSpPr txBox="1"/>
             <p:nvPr/>
           </p:nvSpPr>
@@ -18502,7 +23130,7 @@
         </p:sp>
         <p:sp>
           <p:nvSpPr>
-            <p:cNvPr id="114" name="Google Shape;114;p18"/>
+            <p:cNvPr id="159" name="Google Shape;159;p30"/>
             <p:cNvSpPr/>
             <p:nvPr/>
           </p:nvSpPr>
@@ -18550,7 +23178,7 @@
         </p:sp>
         <p:sp>
           <p:nvSpPr>
-            <p:cNvPr id="115" name="Google Shape;115;p18"/>
+            <p:cNvPr id="160" name="Google Shape;160;p30"/>
             <p:cNvSpPr/>
             <p:nvPr/>
           </p:nvSpPr>
@@ -18606,7 +23234,7 @@
         </p:sp>
         <p:sp>
           <p:nvSpPr>
-            <p:cNvPr id="116" name="Google Shape;116;p18"/>
+            <p:cNvPr id="161" name="Google Shape;161;p30"/>
             <p:cNvSpPr txBox="1"/>
             <p:nvPr/>
           </p:nvSpPr>
@@ -18667,7 +23295,7 @@
         </p:sp>
         <p:sp>
           <p:nvSpPr>
-            <p:cNvPr id="117" name="Google Shape;117;p18"/>
+            <p:cNvPr id="162" name="Google Shape;162;p30"/>
             <p:cNvSpPr/>
             <p:nvPr/>
           </p:nvSpPr>
@@ -18723,7 +23351,7 @@
         </p:sp>
         <p:sp>
           <p:nvSpPr>
-            <p:cNvPr id="118" name="Google Shape;118;p18"/>
+            <p:cNvPr id="163" name="Google Shape;163;p30"/>
             <p:cNvSpPr txBox="1"/>
             <p:nvPr/>
           </p:nvSpPr>
@@ -18796,7 +23424,7 @@
   <p:cSld>
     <p:spTree>
       <p:nvGrpSpPr>
-        <p:cNvPr id="122" name="Shape 122"/>
+        <p:cNvPr id="167" name="Shape 167"/>
         <p:cNvGrpSpPr/>
         <p:nvPr/>
       </p:nvGrpSpPr>
@@ -18810,7 +23438,7 @@
       </p:grpSpPr>
       <p:sp>
         <p:nvSpPr>
-          <p:cNvPr id="123" name="Google Shape;123;p19"/>
+          <p:cNvPr id="168" name="Google Shape;168;p31"/>
           <p:cNvSpPr txBox="1"/>
           <p:nvPr>
             <p:ph type="title"/>
@@ -18900,7 +23528,7 @@
       </p:sp>
       <p:sp>
         <p:nvSpPr>
-          <p:cNvPr id="124" name="Google Shape;124;p19"/>
+          <p:cNvPr id="169" name="Google Shape;169;p31"/>
           <p:cNvSpPr txBox="1"/>
           <p:nvPr>
             <p:ph idx="12" type="sldNum"/>
@@ -18940,7 +23568,7 @@
       </p:sp>
       <p:sp>
         <p:nvSpPr>
-          <p:cNvPr id="125" name="Google Shape;125;p19"/>
+          <p:cNvPr id="170" name="Google Shape;170;p31"/>
           <p:cNvSpPr txBox="1"/>
           <p:nvPr>
             <p:ph idx="1" type="body"/>
@@ -18990,7 +23618,7 @@
       </p:sp>
       <p:graphicFrame>
         <p:nvGraphicFramePr>
-          <p:cNvPr id="126" name="Google Shape;126;p19"/>
+          <p:cNvPr id="171" name="Google Shape;171;p31"/>
           <p:cNvGraphicFramePr/>
           <p:nvPr/>
         </p:nvGraphicFramePr>
@@ -19003,7 +23631,7 @@
             <a:tbl>
               <a:tblPr bandRow="1" firstRow="1">
                 <a:noFill/>
-                <a:tableStyleId>{D489E30B-2129-4DD7-8682-40727AD94D1E}</a:tableStyleId>
+                <a:tableStyleId>{BB5985F3-8DD7-48AF-B3DD-B0399FADE051}</a:tableStyleId>
               </a:tblPr>
               <a:tblGrid>
                 <a:gridCol w="643525"/>
@@ -19866,7 +24494,7 @@
   <p:cSld>
     <p:spTree>
       <p:nvGrpSpPr>
-        <p:cNvPr id="130" name="Shape 130"/>
+        <p:cNvPr id="175" name="Shape 175"/>
         <p:cNvGrpSpPr/>
         <p:nvPr/>
       </p:nvGrpSpPr>
@@ -19880,7 +24508,7 @@
       </p:grpSpPr>
       <p:sp>
         <p:nvSpPr>
-          <p:cNvPr id="131" name="Google Shape;131;p20"/>
+          <p:cNvPr id="176" name="Google Shape;176;p32"/>
           <p:cNvSpPr txBox="1"/>
           <p:nvPr>
             <p:ph type="title"/>
@@ -19970,7 +24598,7 @@
       </p:sp>
       <p:sp>
         <p:nvSpPr>
-          <p:cNvPr id="132" name="Google Shape;132;p20"/>
+          <p:cNvPr id="177" name="Google Shape;177;p32"/>
           <p:cNvSpPr txBox="1"/>
           <p:nvPr>
             <p:ph idx="12" type="sldNum"/>
@@ -20010,7 +24638,7 @@
       </p:sp>
       <p:sp>
         <p:nvSpPr>
-          <p:cNvPr id="133" name="Google Shape;133;p20"/>
+          <p:cNvPr id="178" name="Google Shape;178;p32"/>
           <p:cNvSpPr txBox="1"/>
           <p:nvPr>
             <p:ph idx="1" type="body"/>
@@ -20060,7 +24688,7 @@
       </p:sp>
       <p:graphicFrame>
         <p:nvGraphicFramePr>
-          <p:cNvPr id="134" name="Google Shape;134;p20"/>
+          <p:cNvPr id="179" name="Google Shape;179;p32"/>
           <p:cNvGraphicFramePr/>
           <p:nvPr/>
         </p:nvGraphicFramePr>
@@ -20073,7 +24701,7 @@
             <a:tbl>
               <a:tblPr bandRow="1" firstRow="1">
                 <a:noFill/>
-                <a:tableStyleId>{D489E30B-2129-4DD7-8682-40727AD94D1E}</a:tableStyleId>
+                <a:tableStyleId>{BB5985F3-8DD7-48AF-B3DD-B0399FADE051}</a:tableStyleId>
               </a:tblPr>
               <a:tblGrid>
                 <a:gridCol w="643525"/>
@@ -20925,7 +25553,7 @@
       </p:graphicFrame>
       <p:sp>
         <p:nvSpPr>
-          <p:cNvPr id="135" name="Google Shape;135;p20"/>
+          <p:cNvPr id="180" name="Google Shape;180;p32"/>
           <p:cNvSpPr txBox="1"/>
           <p:nvPr/>
         </p:nvSpPr>
@@ -21623,7 +26251,7 @@
   <p:cSld>
     <p:spTree>
       <p:nvGrpSpPr>
-        <p:cNvPr id="139" name="Shape 139"/>
+        <p:cNvPr id="184" name="Shape 184"/>
         <p:cNvGrpSpPr/>
         <p:nvPr/>
       </p:nvGrpSpPr>
@@ -21637,7 +26265,7 @@
       </p:grpSpPr>
       <p:sp>
         <p:nvSpPr>
-          <p:cNvPr id="140" name="Google Shape;140;p21"/>
+          <p:cNvPr id="185" name="Google Shape;185;p33"/>
           <p:cNvSpPr txBox="1"/>
           <p:nvPr>
             <p:ph type="title"/>
@@ -21727,7 +26355,7 @@
       </p:sp>
       <p:sp>
         <p:nvSpPr>
-          <p:cNvPr id="141" name="Google Shape;141;p21"/>
+          <p:cNvPr id="186" name="Google Shape;186;p33"/>
           <p:cNvSpPr txBox="1"/>
           <p:nvPr>
             <p:ph idx="12" type="sldNum"/>
@@ -21767,7 +26395,7 @@
       </p:sp>
       <p:sp>
         <p:nvSpPr>
-          <p:cNvPr id="142" name="Google Shape;142;p21"/>
+          <p:cNvPr id="187" name="Google Shape;187;p33"/>
           <p:cNvSpPr txBox="1"/>
           <p:nvPr>
             <p:ph idx="1" type="body"/>
@@ -21817,7 +26445,7 @@
       </p:sp>
       <p:graphicFrame>
         <p:nvGraphicFramePr>
-          <p:cNvPr id="143" name="Google Shape;143;p21"/>
+          <p:cNvPr id="188" name="Google Shape;188;p33"/>
           <p:cNvGraphicFramePr/>
           <p:nvPr/>
         </p:nvGraphicFramePr>
@@ -21830,7 +26458,7 @@
             <a:tbl>
               <a:tblPr bandRow="1" firstRow="1">
                 <a:noFill/>
-                <a:tableStyleId>{D489E30B-2129-4DD7-8682-40727AD94D1E}</a:tableStyleId>
+                <a:tableStyleId>{BB5985F3-8DD7-48AF-B3DD-B0399FADE051}</a:tableStyleId>
               </a:tblPr>
               <a:tblGrid>
                 <a:gridCol w="643525"/>
@@ -22682,7 +27310,7 @@
       </p:graphicFrame>
       <p:sp>
         <p:nvSpPr>
-          <p:cNvPr id="144" name="Google Shape;144;p21"/>
+          <p:cNvPr id="189" name="Google Shape;189;p33"/>
           <p:cNvSpPr txBox="1"/>
           <p:nvPr/>
         </p:nvSpPr>
@@ -23398,4 +28026,283 @@
     </a:fmtScheme>
   </a:themeElements>
 </a:theme>
+</file>
+
+<file path=ppt/theme/theme3.xml><?xml version="1.0" encoding="utf-8"?>
+<a:theme xmlns:a="http://schemas.openxmlformats.org/drawingml/2006/main" xmlns:r="http://schemas.openxmlformats.org/officeDocument/2006/relationships" name="Simple Light">
+  <a:themeElements>
+    <a:clrScheme name="Simple Light">
+      <a:dk1>
+        <a:srgbClr val="000000"/>
+      </a:dk1>
+      <a:lt1>
+        <a:srgbClr val="FFFFFF"/>
+      </a:lt1>
+      <a:dk2>
+        <a:srgbClr val="595959"/>
+      </a:dk2>
+      <a:lt2>
+        <a:srgbClr val="EEEEEE"/>
+      </a:lt2>
+      <a:accent1>
+        <a:srgbClr val="4285F4"/>
+      </a:accent1>
+      <a:accent2>
+        <a:srgbClr val="212121"/>
+      </a:accent2>
+      <a:accent3>
+        <a:srgbClr val="78909C"/>
+      </a:accent3>
+      <a:accent4>
+        <a:srgbClr val="FFAB40"/>
+      </a:accent4>
+      <a:accent5>
+        <a:srgbClr val="0097A7"/>
+      </a:accent5>
+      <a:accent6>
+        <a:srgbClr val="EEFF41"/>
+      </a:accent6>
+      <a:hlink>
+        <a:srgbClr val="0097A7"/>
+      </a:hlink>
+      <a:folHlink>
+        <a:srgbClr val="0097A7"/>
+      </a:folHlink>
+    </a:clrScheme>
+    <a:fontScheme name="Office">
+      <a:majorFont>
+        <a:latin typeface="Arial"/>
+        <a:ea typeface=""/>
+        <a:cs typeface=""/>
+        <a:font script="Jpan" typeface="ＭＳ Ｐゴシック"/>
+        <a:font script="Hang" typeface="맑은 고딕"/>
+        <a:font script="Hans" typeface="宋体"/>
+        <a:font script="Hant" typeface="新細明體"/>
+        <a:font script="Arab" typeface="Times New Roman"/>
+        <a:font script="Hebr" typeface="Times New Roman"/>
+        <a:font script="Thai" typeface="Angsana New"/>
+        <a:font script="Ethi" typeface="Nyala"/>
+        <a:font script="Beng" typeface="Vrinda"/>
+        <a:font script="Gujr" typeface="Shruti"/>
+        <a:font script="Khmr" typeface="MoolBoran"/>
+        <a:font script="Knda" typeface="Tunga"/>
+        <a:font script="Guru" typeface="Raavi"/>
+        <a:font script="Cans" typeface="Euphemia"/>
+        <a:font script="Cher" typeface="Plantagenet Cherokee"/>
+        <a:font script="Yiii" typeface="Microsoft Yi Baiti"/>
+        <a:font script="Tibt" typeface="Microsoft Himalaya"/>
+        <a:font script="Thaa" typeface="MV Boli"/>
+        <a:font script="Deva" typeface="Mangal"/>
+        <a:font script="Telu" typeface="Gautami"/>
+        <a:font script="Taml" typeface="Latha"/>
+        <a:font script="Syrc" typeface="Estrangelo Edessa"/>
+        <a:font script="Orya" typeface="Kalinga"/>
+        <a:font script="Mlym" typeface="Kartika"/>
+        <a:font script="Laoo" typeface="DokChampa"/>
+        <a:font script="Sinh" typeface="Iskoola Pota"/>
+        <a:font script="Mong" typeface="Mongolian Baiti"/>
+        <a:font script="Viet" typeface="Times New Roman"/>
+        <a:font script="Uigh" typeface="Microsoft Uighur"/>
+        <a:font script="Geor" typeface="Sylfaen"/>
+      </a:majorFont>
+      <a:minorFont>
+        <a:latin typeface="Arial"/>
+        <a:ea typeface=""/>
+        <a:cs typeface=""/>
+        <a:font script="Jpan" typeface="ＭＳ Ｐゴシック"/>
+        <a:font script="Hang" typeface="맑은 고딕"/>
+        <a:font script="Hans" typeface="宋体"/>
+        <a:font script="Hant" typeface="新細明體"/>
+        <a:font script="Arab" typeface="Arial"/>
+        <a:font script="Hebr" typeface="Arial"/>
+        <a:font script="Thai" typeface="Cordia New"/>
+        <a:font script="Ethi" typeface="Nyala"/>
+        <a:font script="Beng" typeface="Vrinda"/>
+        <a:font script="Gujr" typeface="Shruti"/>
+        <a:font script="Khmr" typeface="DaunPenh"/>
+        <a:font script="Knda" typeface="Tunga"/>
+        <a:font script="Guru" typeface="Raavi"/>
+        <a:font script="Cans" typeface="Euphemia"/>
+        <a:font script="Cher" typeface="Plantagenet Cherokee"/>
+        <a:font script="Yiii" typeface="Microsoft Yi Baiti"/>
+        <a:font script="Tibt" typeface="Microsoft Himalaya"/>
+        <a:font script="Thaa" typeface="MV Boli"/>
+        <a:font script="Deva" typeface="Mangal"/>
+        <a:font script="Telu" typeface="Gautami"/>
+        <a:font script="Taml" typeface="Latha"/>
+        <a:font script="Syrc" typeface="Estrangelo Edessa"/>
+        <a:font script="Orya" typeface="Kalinga"/>
+        <a:font script="Mlym" typeface="Kartika"/>
+        <a:font script="Laoo" typeface="DokChampa"/>
+        <a:font script="Sinh" typeface="Iskoola Pota"/>
+        <a:font script="Mong" typeface="Mongolian Baiti"/>
+        <a:font script="Viet" typeface="Arial"/>
+        <a:font script="Uigh" typeface="Microsoft Uighur"/>
+        <a:font script="Geor" typeface="Sylfaen"/>
+      </a:minorFont>
+    </a:fontScheme>
+    <a:fmtScheme name="Office">
+      <a:fillStyleLst>
+        <a:solidFill>
+          <a:schemeClr val="phClr"/>
+        </a:solidFill>
+        <a:gradFill rotWithShape="1">
+          <a:gsLst>
+            <a:gs pos="0">
+              <a:schemeClr val="phClr">
+                <a:tint val="50000"/>
+                <a:satMod val="300000"/>
+              </a:schemeClr>
+            </a:gs>
+            <a:gs pos="35000">
+              <a:schemeClr val="phClr">
+                <a:tint val="37000"/>
+                <a:satMod val="300000"/>
+              </a:schemeClr>
+            </a:gs>
+            <a:gs pos="100000">
+              <a:schemeClr val="phClr">
+                <a:tint val="15000"/>
+                <a:satMod val="350000"/>
+              </a:schemeClr>
+            </a:gs>
+          </a:gsLst>
+          <a:lin ang="16200000" scaled="1"/>
+        </a:gradFill>
+        <a:gradFill rotWithShape="1">
+          <a:gsLst>
+            <a:gs pos="0">
+              <a:schemeClr val="phClr">
+                <a:tint val="100000"/>
+                <a:shade val="100000"/>
+                <a:satMod val="130000"/>
+              </a:schemeClr>
+            </a:gs>
+            <a:gs pos="100000">
+              <a:schemeClr val="phClr">
+                <a:tint val="50000"/>
+                <a:shade val="100000"/>
+                <a:satMod val="350000"/>
+              </a:schemeClr>
+            </a:gs>
+          </a:gsLst>
+          <a:lin ang="16200000" scaled="0"/>
+        </a:gradFill>
+      </a:fillStyleLst>
+      <a:lnStyleLst>
+        <a:ln w="9525" cap="flat" cmpd="sng" algn="ctr">
+          <a:solidFill>
+            <a:schemeClr val="phClr">
+              <a:shade val="95000"/>
+              <a:satMod val="105000"/>
+            </a:schemeClr>
+          </a:solidFill>
+          <a:prstDash val="solid"/>
+        </a:ln>
+        <a:ln w="25400" cap="flat" cmpd="sng" algn="ctr">
+          <a:solidFill>
+            <a:schemeClr val="phClr"/>
+          </a:solidFill>
+          <a:prstDash val="solid"/>
+        </a:ln>
+        <a:ln w="38100" cap="flat" cmpd="sng" algn="ctr">
+          <a:solidFill>
+            <a:schemeClr val="phClr"/>
+          </a:solidFill>
+          <a:prstDash val="solid"/>
+        </a:ln>
+      </a:lnStyleLst>
+      <a:effectStyleLst>
+        <a:effectStyle>
+          <a:effectLst>
+            <a:outerShdw blurRad="40000" dist="20000" dir="5400000" rotWithShape="0">
+              <a:srgbClr val="000000">
+                <a:alpha val="38000"/>
+              </a:srgbClr>
+            </a:outerShdw>
+          </a:effectLst>
+        </a:effectStyle>
+        <a:effectStyle>
+          <a:effectLst>
+            <a:outerShdw blurRad="40000" dist="23000" dir="5400000" rotWithShape="0">
+              <a:srgbClr val="000000">
+                <a:alpha val="35000"/>
+              </a:srgbClr>
+            </a:outerShdw>
+          </a:effectLst>
+        </a:effectStyle>
+        <a:effectStyle>
+          <a:effectLst>
+            <a:outerShdw blurRad="40000" dist="23000" dir="5400000" rotWithShape="0">
+              <a:srgbClr val="000000">
+                <a:alpha val="35000"/>
+              </a:srgbClr>
+            </a:outerShdw>
+          </a:effectLst>
+          <a:scene3d>
+            <a:camera prst="orthographicFront">
+              <a:rot lat="0" lon="0" rev="0"/>
+            </a:camera>
+            <a:lightRig rig="threePt" dir="t">
+              <a:rot lat="0" lon="0" rev="1200000"/>
+            </a:lightRig>
+          </a:scene3d>
+          <a:sp3d>
+            <a:bevelT w="63500" h="25400"/>
+          </a:sp3d>
+        </a:effectStyle>
+      </a:effectStyleLst>
+      <a:bgFillStyleLst>
+        <a:solidFill>
+          <a:schemeClr val="phClr"/>
+        </a:solidFill>
+        <a:gradFill rotWithShape="1">
+          <a:gsLst>
+            <a:gs pos="0">
+              <a:schemeClr val="phClr">
+                <a:tint val="40000"/>
+                <a:satMod val="350000"/>
+              </a:schemeClr>
+            </a:gs>
+            <a:gs pos="40000">
+              <a:schemeClr val="phClr">
+                <a:tint val="45000"/>
+                <a:shade val="99000"/>
+                <a:satMod val="350000"/>
+              </a:schemeClr>
+            </a:gs>
+            <a:gs pos="100000">
+              <a:schemeClr val="phClr">
+                <a:shade val="20000"/>
+                <a:satMod val="255000"/>
+              </a:schemeClr>
+            </a:gs>
+          </a:gsLst>
+          <a:path path="circle">
+            <a:fillToRect l="50000" t="-80000" r="50000" b="180000"/>
+          </a:path>
+        </a:gradFill>
+        <a:gradFill rotWithShape="1">
+          <a:gsLst>
+            <a:gs pos="0">
+              <a:schemeClr val="phClr">
+                <a:tint val="80000"/>
+                <a:satMod val="300000"/>
+              </a:schemeClr>
+            </a:gs>
+            <a:gs pos="100000">
+              <a:schemeClr val="phClr">
+                <a:shade val="30000"/>
+                <a:satMod val="200000"/>
+              </a:schemeClr>
+            </a:gs>
+          </a:gsLst>
+          <a:path path="circle">
+            <a:fillToRect l="50000" t="50000" r="50000" b="50000"/>
+          </a:path>
+        </a:gradFill>
+      </a:bgFillStyleLst>
+    </a:fmtScheme>
+  </a:themeElements>
+</a:theme>
 </file>